--- a/LLP307_EAP_写作课_中英对照.pptx
+++ b/LLP307_EAP_写作课_中英对照.pptx
@@ -3145,8 +3145,8 @@
         </p:nvSpPr>
         <p:spPr>
           <a:xfrm>
-            <a:off x="365760" y="182880"/>
-            <a:ext cx="11430000" cy="640080"/>
+            <a:off x="365760" y="365760"/>
+            <a:ext cx="11430000" cy="594360"/>
           </a:xfrm>
           <a:prstGeom prst="rect">
             <a:avLst/>
@@ -3160,7 +3160,7 @@
           <a:lstStyle/>
           <a:p>
             <a:r>
-              <a:rPr sz="2000" b="1">
+              <a:rPr sz="2100" b="1">
                 <a:solidFill>
                   <a:srgbClr val="1F3B6E"/>
                 </a:solidFill>
@@ -3178,8 +3178,8 @@
         </p:nvSpPr>
         <p:spPr>
           <a:xfrm>
-            <a:off x="365760" y="960120"/>
-            <a:ext cx="5852160" cy="5669280"/>
+            <a:off x="365760" y="1051560"/>
+            <a:ext cx="5943600" cy="5623560"/>
           </a:xfrm>
           <a:prstGeom prst="rect">
             <a:avLst/>
@@ -3200,7 +3200,7 @@
               </a:spcAft>
             </a:pPr>
             <a:r>
-              <a:rPr sz="1200">
+              <a:rPr sz="1400">
                 <a:solidFill>
                   <a:srgbClr val="202020"/>
                 </a:solidFill>
@@ -3215,7 +3215,7 @@
               </a:spcAft>
             </a:pPr>
             <a:r>
-              <a:rPr sz="1200">
+              <a:rPr sz="1400">
                 <a:solidFill>
                   <a:srgbClr val="202020"/>
                 </a:solidFill>
@@ -3230,7 +3230,7 @@
               </a:spcAft>
             </a:pPr>
             <a:r>
-              <a:rPr sz="1200">
+              <a:rPr sz="1400">
                 <a:solidFill>
                   <a:srgbClr val="202020"/>
                 </a:solidFill>
@@ -3245,7 +3245,7 @@
               </a:spcAft>
             </a:pPr>
             <a:r>
-              <a:rPr sz="1200">
+              <a:rPr sz="1400">
                 <a:solidFill>
                   <a:srgbClr val="202020"/>
                 </a:solidFill>
@@ -3263,8 +3263,8 @@
         </p:nvSpPr>
         <p:spPr>
           <a:xfrm>
-            <a:off x="6400800" y="960120"/>
-            <a:ext cx="5440680" cy="5669280"/>
+            <a:off x="6446520" y="1051560"/>
+            <a:ext cx="5349240" cy="5623560"/>
           </a:xfrm>
           <a:prstGeom prst="rect">
             <a:avLst/>
@@ -3281,11 +3281,11 @@
           <a:p>
             <a:pPr>
               <a:spcAft>
-                <a:spcPts val="300"/>
-              </a:spcAft>
-            </a:pPr>
-            <a:r>
-              <a:rPr sz="1200">
+                <a:spcPts val="500"/>
+              </a:spcAft>
+            </a:pPr>
+            <a:r>
+              <a:rPr sz="1400">
                 <a:solidFill>
                   <a:srgbClr val="333333"/>
                 </a:solidFill>
@@ -3297,11 +3297,11 @@
           <a:p>
             <a:pPr>
               <a:spcAft>
-                <a:spcPts val="300"/>
-              </a:spcAft>
-            </a:pPr>
-            <a:r>
-              <a:rPr sz="1200">
+                <a:spcPts val="500"/>
+              </a:spcAft>
+            </a:pPr>
+            <a:r>
+              <a:rPr sz="1400">
                 <a:solidFill>
                   <a:srgbClr val="333333"/>
                 </a:solidFill>
@@ -3313,11 +3313,11 @@
           <a:p>
             <a:pPr>
               <a:spcAft>
-                <a:spcPts val="300"/>
-              </a:spcAft>
-            </a:pPr>
-            <a:r>
-              <a:rPr sz="1200">
+                <a:spcPts val="500"/>
+              </a:spcAft>
+            </a:pPr>
+            <a:r>
+              <a:rPr sz="1400">
                 <a:solidFill>
                   <a:srgbClr val="333333"/>
                 </a:solidFill>
@@ -3420,8 +3420,8 @@
         </p:nvSpPr>
         <p:spPr>
           <a:xfrm>
-            <a:off x="365760" y="182880"/>
-            <a:ext cx="11430000" cy="640080"/>
+            <a:off x="365760" y="365760"/>
+            <a:ext cx="11430000" cy="594360"/>
           </a:xfrm>
           <a:prstGeom prst="rect">
             <a:avLst/>
@@ -3435,7 +3435,7 @@
           <a:lstStyle/>
           <a:p>
             <a:r>
-              <a:rPr sz="2000" b="1">
+              <a:rPr sz="2100" b="1">
                 <a:solidFill>
                   <a:srgbClr val="1F3B6E"/>
                 </a:solidFill>
@@ -3453,8 +3453,8 @@
         </p:nvSpPr>
         <p:spPr>
           <a:xfrm>
-            <a:off x="365760" y="960120"/>
-            <a:ext cx="5852160" cy="5669280"/>
+            <a:off x="365760" y="1051560"/>
+            <a:ext cx="5943600" cy="5623560"/>
           </a:xfrm>
           <a:prstGeom prst="rect">
             <a:avLst/>
@@ -3475,7 +3475,7 @@
               </a:spcAft>
             </a:pPr>
             <a:r>
-              <a:rPr sz="1200">
+              <a:rPr sz="1400">
                 <a:solidFill>
                   <a:srgbClr val="202020"/>
                 </a:solidFill>
@@ -3490,7 +3490,7 @@
               </a:spcAft>
             </a:pPr>
             <a:r>
-              <a:rPr sz="1200">
+              <a:rPr sz="1400">
                 <a:solidFill>
                   <a:srgbClr val="202020"/>
                 </a:solidFill>
@@ -3505,7 +3505,7 @@
               </a:spcAft>
             </a:pPr>
             <a:r>
-              <a:rPr sz="1200">
+              <a:rPr sz="1400">
                 <a:solidFill>
                   <a:srgbClr val="202020"/>
                 </a:solidFill>
@@ -3520,7 +3520,7 @@
               </a:spcAft>
             </a:pPr>
             <a:r>
-              <a:rPr sz="1200">
+              <a:rPr sz="1400">
                 <a:solidFill>
                   <a:srgbClr val="202020"/>
                 </a:solidFill>
@@ -3535,7 +3535,7 @@
               </a:spcAft>
             </a:pPr>
             <a:r>
-              <a:rPr sz="1200">
+              <a:rPr sz="1400">
                 <a:solidFill>
                   <a:srgbClr val="202020"/>
                 </a:solidFill>
@@ -3550,7 +3550,7 @@
               </a:spcAft>
             </a:pPr>
             <a:r>
-              <a:rPr sz="1200">
+              <a:rPr sz="1400">
                 <a:solidFill>
                   <a:srgbClr val="202020"/>
                 </a:solidFill>
@@ -3565,7 +3565,7 @@
               </a:spcAft>
             </a:pPr>
             <a:r>
-              <a:rPr sz="1200">
+              <a:rPr sz="1400">
                 <a:solidFill>
                   <a:srgbClr val="202020"/>
                 </a:solidFill>
@@ -3583,8 +3583,8 @@
         </p:nvSpPr>
         <p:spPr>
           <a:xfrm>
-            <a:off x="6400800" y="960120"/>
-            <a:ext cx="5440680" cy="5669280"/>
+            <a:off x="6446520" y="1051560"/>
+            <a:ext cx="5349240" cy="5623560"/>
           </a:xfrm>
           <a:prstGeom prst="rect">
             <a:avLst/>
@@ -3601,11 +3601,11 @@
           <a:p>
             <a:pPr>
               <a:spcAft>
-                <a:spcPts val="300"/>
-              </a:spcAft>
-            </a:pPr>
-            <a:r>
-              <a:rPr sz="1200">
+                <a:spcPts val="500"/>
+              </a:spcAft>
+            </a:pPr>
+            <a:r>
+              <a:rPr sz="1400">
                 <a:solidFill>
                   <a:srgbClr val="333333"/>
                 </a:solidFill>
@@ -3617,11 +3617,11 @@
           <a:p>
             <a:pPr>
               <a:spcAft>
-                <a:spcPts val="300"/>
-              </a:spcAft>
-            </a:pPr>
-            <a:r>
-              <a:rPr sz="1200">
+                <a:spcPts val="500"/>
+              </a:spcAft>
+            </a:pPr>
+            <a:r>
+              <a:rPr sz="1400">
                 <a:solidFill>
                   <a:srgbClr val="333333"/>
                 </a:solidFill>
@@ -3633,11 +3633,11 @@
           <a:p>
             <a:pPr>
               <a:spcAft>
-                <a:spcPts val="300"/>
-              </a:spcAft>
-            </a:pPr>
-            <a:r>
-              <a:rPr sz="1200">
+                <a:spcPts val="500"/>
+              </a:spcAft>
+            </a:pPr>
+            <a:r>
+              <a:rPr sz="1400">
                 <a:solidFill>
                   <a:srgbClr val="333333"/>
                 </a:solidFill>
@@ -3649,11 +3649,11 @@
           <a:p>
             <a:pPr>
               <a:spcAft>
-                <a:spcPts val="300"/>
-              </a:spcAft>
-            </a:pPr>
-            <a:r>
-              <a:rPr sz="1200">
+                <a:spcPts val="500"/>
+              </a:spcAft>
+            </a:pPr>
+            <a:r>
+              <a:rPr sz="1400">
                 <a:solidFill>
                   <a:srgbClr val="333333"/>
                 </a:solidFill>
@@ -3665,11 +3665,11 @@
           <a:p>
             <a:pPr>
               <a:spcAft>
-                <a:spcPts val="300"/>
-              </a:spcAft>
-            </a:pPr>
-            <a:r>
-              <a:rPr sz="1200">
+                <a:spcPts val="500"/>
+              </a:spcAft>
+            </a:pPr>
+            <a:r>
+              <a:rPr sz="1400">
                 <a:solidFill>
                   <a:srgbClr val="333333"/>
                 </a:solidFill>
@@ -3681,11 +3681,11 @@
           <a:p>
             <a:pPr>
               <a:spcAft>
-                <a:spcPts val="300"/>
-              </a:spcAft>
-            </a:pPr>
-            <a:r>
-              <a:rPr sz="1200">
+                <a:spcPts val="500"/>
+              </a:spcAft>
+            </a:pPr>
+            <a:r>
+              <a:rPr sz="1400">
                 <a:solidFill>
                   <a:srgbClr val="333333"/>
                 </a:solidFill>
@@ -3697,11 +3697,11 @@
           <a:p>
             <a:pPr>
               <a:spcAft>
-                <a:spcPts val="300"/>
-              </a:spcAft>
-            </a:pPr>
-            <a:r>
-              <a:rPr sz="1200">
+                <a:spcPts val="500"/>
+              </a:spcAft>
+            </a:pPr>
+            <a:r>
+              <a:rPr sz="1400">
                 <a:solidFill>
                   <a:srgbClr val="333333"/>
                 </a:solidFill>
@@ -3804,8 +3804,8 @@
         </p:nvSpPr>
         <p:spPr>
           <a:xfrm>
-            <a:off x="365760" y="182880"/>
-            <a:ext cx="11430000" cy="640080"/>
+            <a:off x="365760" y="365760"/>
+            <a:ext cx="11430000" cy="594360"/>
           </a:xfrm>
           <a:prstGeom prst="rect">
             <a:avLst/>
@@ -3819,7 +3819,7 @@
           <a:lstStyle/>
           <a:p>
             <a:r>
-              <a:rPr sz="2000" b="1">
+              <a:rPr sz="2100" b="1">
                 <a:solidFill>
                   <a:srgbClr val="1F3B6E"/>
                 </a:solidFill>
@@ -3837,8 +3837,8 @@
         </p:nvSpPr>
         <p:spPr>
           <a:xfrm>
-            <a:off x="365760" y="960120"/>
-            <a:ext cx="5852160" cy="5669280"/>
+            <a:off x="365760" y="1051560"/>
+            <a:ext cx="5943600" cy="5623560"/>
           </a:xfrm>
           <a:prstGeom prst="rect">
             <a:avLst/>
@@ -3859,7 +3859,7 @@
               </a:spcAft>
             </a:pPr>
             <a:r>
-              <a:rPr sz="1200">
+              <a:rPr sz="1400">
                 <a:solidFill>
                   <a:srgbClr val="202020"/>
                 </a:solidFill>
@@ -3877,8 +3877,8 @@
         </p:nvSpPr>
         <p:spPr>
           <a:xfrm>
-            <a:off x="6400800" y="960120"/>
-            <a:ext cx="5440680" cy="5669280"/>
+            <a:off x="6446520" y="1051560"/>
+            <a:ext cx="5349240" cy="5623560"/>
           </a:xfrm>
           <a:prstGeom prst="rect">
             <a:avLst/>
@@ -3895,11 +3895,11 @@
           <a:p>
             <a:pPr>
               <a:spcAft>
-                <a:spcPts val="300"/>
-              </a:spcAft>
-            </a:pPr>
-            <a:r>
-              <a:rPr sz="1200">
+                <a:spcPts val="500"/>
+              </a:spcAft>
+            </a:pPr>
+            <a:r>
+              <a:rPr sz="1400">
                 <a:solidFill>
                   <a:srgbClr val="333333"/>
                 </a:solidFill>
@@ -3911,11 +3911,11 @@
           <a:p>
             <a:pPr>
               <a:spcAft>
-                <a:spcPts val="300"/>
-              </a:spcAft>
-            </a:pPr>
-            <a:r>
-              <a:rPr sz="1200">
+                <a:spcPts val="500"/>
+              </a:spcAft>
+            </a:pPr>
+            <a:r>
+              <a:rPr sz="1400">
                 <a:solidFill>
                   <a:srgbClr val="333333"/>
                 </a:solidFill>
@@ -4018,8 +4018,8 @@
         </p:nvSpPr>
         <p:spPr>
           <a:xfrm>
-            <a:off x="365760" y="182880"/>
-            <a:ext cx="11430000" cy="640080"/>
+            <a:off x="365760" y="365760"/>
+            <a:ext cx="11430000" cy="594360"/>
           </a:xfrm>
           <a:prstGeom prst="rect">
             <a:avLst/>
@@ -4033,7 +4033,7 @@
           <a:lstStyle/>
           <a:p>
             <a:r>
-              <a:rPr sz="2000" b="1">
+              <a:rPr sz="2100" b="1">
                 <a:solidFill>
                   <a:srgbClr val="1F3B6E"/>
                 </a:solidFill>
@@ -4051,8 +4051,8 @@
         </p:nvSpPr>
         <p:spPr>
           <a:xfrm>
-            <a:off x="365760" y="960120"/>
-            <a:ext cx="5852160" cy="5669280"/>
+            <a:off x="365760" y="1051560"/>
+            <a:ext cx="5943600" cy="5623560"/>
           </a:xfrm>
           <a:prstGeom prst="rect">
             <a:avLst/>
@@ -4073,7 +4073,7 @@
               </a:spcAft>
             </a:pPr>
             <a:r>
-              <a:rPr sz="1200">
+              <a:rPr sz="1400">
                 <a:solidFill>
                   <a:srgbClr val="202020"/>
                 </a:solidFill>
@@ -4088,7 +4088,7 @@
               </a:spcAft>
             </a:pPr>
             <a:r>
-              <a:rPr sz="1200">
+              <a:rPr sz="1400">
                 <a:solidFill>
                   <a:srgbClr val="202020"/>
                 </a:solidFill>
@@ -4103,7 +4103,7 @@
               </a:spcAft>
             </a:pPr>
             <a:r>
-              <a:rPr sz="1200">
+              <a:rPr sz="1400">
                 <a:solidFill>
                   <a:srgbClr val="202020"/>
                 </a:solidFill>
@@ -4118,7 +4118,7 @@
               </a:spcAft>
             </a:pPr>
             <a:r>
-              <a:rPr sz="1200">
+              <a:rPr sz="1400">
                 <a:solidFill>
                   <a:srgbClr val="202020"/>
                 </a:solidFill>
@@ -4133,7 +4133,7 @@
               </a:spcAft>
             </a:pPr>
             <a:r>
-              <a:rPr sz="1200">
+              <a:rPr sz="1400">
                 <a:solidFill>
                   <a:srgbClr val="202020"/>
                 </a:solidFill>
@@ -4148,7 +4148,7 @@
               </a:spcAft>
             </a:pPr>
             <a:r>
-              <a:rPr sz="1200">
+              <a:rPr sz="1400">
                 <a:solidFill>
                   <a:srgbClr val="202020"/>
                 </a:solidFill>
@@ -4166,8 +4166,8 @@
         </p:nvSpPr>
         <p:spPr>
           <a:xfrm>
-            <a:off x="6400800" y="960120"/>
-            <a:ext cx="5440680" cy="5669280"/>
+            <a:off x="6446520" y="1051560"/>
+            <a:ext cx="5349240" cy="5623560"/>
           </a:xfrm>
           <a:prstGeom prst="rect">
             <a:avLst/>
@@ -4184,11 +4184,11 @@
           <a:p>
             <a:pPr>
               <a:spcAft>
-                <a:spcPts val="300"/>
-              </a:spcAft>
-            </a:pPr>
-            <a:r>
-              <a:rPr sz="1200">
+                <a:spcPts val="500"/>
+              </a:spcAft>
+            </a:pPr>
+            <a:r>
+              <a:rPr sz="1400">
                 <a:solidFill>
                   <a:srgbClr val="333333"/>
                 </a:solidFill>
@@ -4200,11 +4200,11 @@
           <a:p>
             <a:pPr>
               <a:spcAft>
-                <a:spcPts val="300"/>
-              </a:spcAft>
-            </a:pPr>
-            <a:r>
-              <a:rPr sz="1200">
+                <a:spcPts val="500"/>
+              </a:spcAft>
+            </a:pPr>
+            <a:r>
+              <a:rPr sz="1400">
                 <a:solidFill>
                   <a:srgbClr val="333333"/>
                 </a:solidFill>
@@ -4216,11 +4216,11 @@
           <a:p>
             <a:pPr>
               <a:spcAft>
-                <a:spcPts val="300"/>
-              </a:spcAft>
-            </a:pPr>
-            <a:r>
-              <a:rPr sz="1200">
+                <a:spcPts val="500"/>
+              </a:spcAft>
+            </a:pPr>
+            <a:r>
+              <a:rPr sz="1400">
                 <a:solidFill>
                   <a:srgbClr val="333333"/>
                 </a:solidFill>
@@ -4232,11 +4232,11 @@
           <a:p>
             <a:pPr>
               <a:spcAft>
-                <a:spcPts val="300"/>
-              </a:spcAft>
-            </a:pPr>
-            <a:r>
-              <a:rPr sz="1200">
+                <a:spcPts val="500"/>
+              </a:spcAft>
+            </a:pPr>
+            <a:r>
+              <a:rPr sz="1400">
                 <a:solidFill>
                   <a:srgbClr val="333333"/>
                 </a:solidFill>
@@ -4248,11 +4248,11 @@
           <a:p>
             <a:pPr>
               <a:spcAft>
-                <a:spcPts val="300"/>
-              </a:spcAft>
-            </a:pPr>
-            <a:r>
-              <a:rPr sz="1200">
+                <a:spcPts val="500"/>
+              </a:spcAft>
+            </a:pPr>
+            <a:r>
+              <a:rPr sz="1400">
                 <a:solidFill>
                   <a:srgbClr val="333333"/>
                 </a:solidFill>
@@ -4264,11 +4264,11 @@
           <a:p>
             <a:pPr>
               <a:spcAft>
-                <a:spcPts val="300"/>
-              </a:spcAft>
-            </a:pPr>
-            <a:r>
-              <a:rPr sz="1200">
+                <a:spcPts val="500"/>
+              </a:spcAft>
+            </a:pPr>
+            <a:r>
+              <a:rPr sz="1400">
                 <a:solidFill>
                   <a:srgbClr val="333333"/>
                 </a:solidFill>
@@ -4371,8 +4371,8 @@
         </p:nvSpPr>
         <p:spPr>
           <a:xfrm>
-            <a:off x="365760" y="182880"/>
-            <a:ext cx="11430000" cy="640080"/>
+            <a:off x="365760" y="365760"/>
+            <a:ext cx="11430000" cy="594360"/>
           </a:xfrm>
           <a:prstGeom prst="rect">
             <a:avLst/>
@@ -4386,7 +4386,7 @@
           <a:lstStyle/>
           <a:p>
             <a:r>
-              <a:rPr sz="2000" b="1">
+              <a:rPr sz="2100" b="1">
                 <a:solidFill>
                   <a:srgbClr val="1F3B6E"/>
                 </a:solidFill>
@@ -4404,8 +4404,8 @@
         </p:nvSpPr>
         <p:spPr>
           <a:xfrm>
-            <a:off x="365760" y="960120"/>
-            <a:ext cx="5852160" cy="5669280"/>
+            <a:off x="365760" y="1051560"/>
+            <a:ext cx="5943600" cy="5623560"/>
           </a:xfrm>
           <a:prstGeom prst="rect">
             <a:avLst/>
@@ -4426,7 +4426,7 @@
               </a:spcAft>
             </a:pPr>
             <a:r>
-              <a:rPr sz="1200">
+              <a:rPr sz="1400">
                 <a:solidFill>
                   <a:srgbClr val="202020"/>
                 </a:solidFill>
@@ -4441,7 +4441,7 @@
               </a:spcAft>
             </a:pPr>
             <a:r>
-              <a:rPr sz="1200">
+              <a:rPr sz="1400">
                 <a:solidFill>
                   <a:srgbClr val="202020"/>
                 </a:solidFill>
@@ -4456,7 +4456,7 @@
               </a:spcAft>
             </a:pPr>
             <a:r>
-              <a:rPr sz="1200">
+              <a:rPr sz="1400">
                 <a:solidFill>
                   <a:srgbClr val="202020"/>
                 </a:solidFill>
@@ -4471,7 +4471,7 @@
               </a:spcAft>
             </a:pPr>
             <a:r>
-              <a:rPr sz="1200">
+              <a:rPr sz="1400">
                 <a:solidFill>
                   <a:srgbClr val="202020"/>
                 </a:solidFill>
@@ -4489,8 +4489,8 @@
         </p:nvSpPr>
         <p:spPr>
           <a:xfrm>
-            <a:off x="6400800" y="960120"/>
-            <a:ext cx="5440680" cy="5669280"/>
+            <a:off x="6446520" y="1051560"/>
+            <a:ext cx="5349240" cy="5623560"/>
           </a:xfrm>
           <a:prstGeom prst="rect">
             <a:avLst/>
@@ -4507,11 +4507,11 @@
           <a:p>
             <a:pPr>
               <a:spcAft>
-                <a:spcPts val="300"/>
-              </a:spcAft>
-            </a:pPr>
-            <a:r>
-              <a:rPr sz="1200">
+                <a:spcPts val="500"/>
+              </a:spcAft>
+            </a:pPr>
+            <a:r>
+              <a:rPr sz="1400">
                 <a:solidFill>
                   <a:srgbClr val="333333"/>
                 </a:solidFill>
@@ -4523,11 +4523,11 @@
           <a:p>
             <a:pPr>
               <a:spcAft>
-                <a:spcPts val="300"/>
-              </a:spcAft>
-            </a:pPr>
-            <a:r>
-              <a:rPr sz="1200">
+                <a:spcPts val="500"/>
+              </a:spcAft>
+            </a:pPr>
+            <a:r>
+              <a:rPr sz="1400">
                 <a:solidFill>
                   <a:srgbClr val="333333"/>
                 </a:solidFill>
@@ -4630,8 +4630,8 @@
         </p:nvSpPr>
         <p:spPr>
           <a:xfrm>
-            <a:off x="365760" y="182880"/>
-            <a:ext cx="11430000" cy="640080"/>
+            <a:off x="365760" y="365760"/>
+            <a:ext cx="11430000" cy="594360"/>
           </a:xfrm>
           <a:prstGeom prst="rect">
             <a:avLst/>
@@ -4645,7 +4645,7 @@
           <a:lstStyle/>
           <a:p>
             <a:r>
-              <a:rPr sz="2000" b="1">
+              <a:rPr sz="2100" b="1">
                 <a:solidFill>
                   <a:srgbClr val="1F3B6E"/>
                 </a:solidFill>
@@ -4663,8 +4663,8 @@
         </p:nvSpPr>
         <p:spPr>
           <a:xfrm>
-            <a:off x="365760" y="960120"/>
-            <a:ext cx="5852160" cy="5669280"/>
+            <a:off x="365760" y="1051560"/>
+            <a:ext cx="5943600" cy="5623560"/>
           </a:xfrm>
           <a:prstGeom prst="rect">
             <a:avLst/>
@@ -4685,7 +4685,7 @@
               </a:spcAft>
             </a:pPr>
             <a:r>
-              <a:rPr sz="1200">
+              <a:rPr sz="1400">
                 <a:solidFill>
                   <a:srgbClr val="202020"/>
                 </a:solidFill>
@@ -4703,8 +4703,8 @@
         </p:nvSpPr>
         <p:spPr>
           <a:xfrm>
-            <a:off x="6400800" y="960120"/>
-            <a:ext cx="5440680" cy="5669280"/>
+            <a:off x="6446520" y="1051560"/>
+            <a:ext cx="5349240" cy="5623560"/>
           </a:xfrm>
           <a:prstGeom prst="rect">
             <a:avLst/>
@@ -4721,11 +4721,11 @@
           <a:p>
             <a:pPr>
               <a:spcAft>
-                <a:spcPts val="300"/>
-              </a:spcAft>
-            </a:pPr>
-            <a:r>
-              <a:rPr sz="1200">
+                <a:spcPts val="500"/>
+              </a:spcAft>
+            </a:pPr>
+            <a:r>
+              <a:rPr sz="1400">
                 <a:solidFill>
                   <a:srgbClr val="333333"/>
                 </a:solidFill>
@@ -4737,11 +4737,11 @@
           <a:p>
             <a:pPr>
               <a:spcAft>
-                <a:spcPts val="300"/>
-              </a:spcAft>
-            </a:pPr>
-            <a:r>
-              <a:rPr sz="1200">
+                <a:spcPts val="500"/>
+              </a:spcAft>
+            </a:pPr>
+            <a:r>
+              <a:rPr sz="1400">
                 <a:solidFill>
                   <a:srgbClr val="333333"/>
                 </a:solidFill>
@@ -4844,8 +4844,8 @@
         </p:nvSpPr>
         <p:spPr>
           <a:xfrm>
-            <a:off x="365760" y="182880"/>
-            <a:ext cx="11430000" cy="640080"/>
+            <a:off x="365760" y="365760"/>
+            <a:ext cx="11430000" cy="594360"/>
           </a:xfrm>
           <a:prstGeom prst="rect">
             <a:avLst/>
@@ -4859,7 +4859,7 @@
           <a:lstStyle/>
           <a:p>
             <a:r>
-              <a:rPr sz="2000" b="1">
+              <a:rPr sz="2100" b="1">
                 <a:solidFill>
                   <a:srgbClr val="1F3B6E"/>
                 </a:solidFill>
@@ -4877,8 +4877,8 @@
         </p:nvSpPr>
         <p:spPr>
           <a:xfrm>
-            <a:off x="365760" y="960120"/>
-            <a:ext cx="5852160" cy="5669280"/>
+            <a:off x="365760" y="1051560"/>
+            <a:ext cx="5943600" cy="5623560"/>
           </a:xfrm>
           <a:prstGeom prst="rect">
             <a:avLst/>
@@ -4899,7 +4899,7 @@
               </a:spcAft>
             </a:pPr>
             <a:r>
-              <a:rPr sz="1200">
+              <a:rPr sz="1400">
                 <a:solidFill>
                   <a:srgbClr val="202020"/>
                 </a:solidFill>
@@ -4914,7 +4914,7 @@
               </a:spcAft>
             </a:pPr>
             <a:r>
-              <a:rPr sz="1200">
+              <a:rPr sz="1400">
                 <a:solidFill>
                   <a:srgbClr val="202020"/>
                 </a:solidFill>
@@ -4929,7 +4929,7 @@
               </a:spcAft>
             </a:pPr>
             <a:r>
-              <a:rPr sz="1200">
+              <a:rPr sz="1400">
                 <a:solidFill>
                   <a:srgbClr val="202020"/>
                 </a:solidFill>
@@ -4944,7 +4944,7 @@
               </a:spcAft>
             </a:pPr>
             <a:r>
-              <a:rPr sz="1200">
+              <a:rPr sz="1400">
                 <a:solidFill>
                   <a:srgbClr val="202020"/>
                 </a:solidFill>
@@ -4959,7 +4959,7 @@
               </a:spcAft>
             </a:pPr>
             <a:r>
-              <a:rPr sz="1200">
+              <a:rPr sz="1400">
                 <a:solidFill>
                   <a:srgbClr val="202020"/>
                 </a:solidFill>
@@ -4974,7 +4974,7 @@
               </a:spcAft>
             </a:pPr>
             <a:r>
-              <a:rPr sz="1200">
+              <a:rPr sz="1400">
                 <a:solidFill>
                   <a:srgbClr val="202020"/>
                 </a:solidFill>
@@ -4989,7 +4989,7 @@
               </a:spcAft>
             </a:pPr>
             <a:r>
-              <a:rPr sz="1200">
+              <a:rPr sz="1400">
                 <a:solidFill>
                   <a:srgbClr val="202020"/>
                 </a:solidFill>
@@ -5004,7 +5004,7 @@
               </a:spcAft>
             </a:pPr>
             <a:r>
-              <a:rPr sz="1200">
+              <a:rPr sz="1400">
                 <a:solidFill>
                   <a:srgbClr val="202020"/>
                 </a:solidFill>
@@ -5022,8 +5022,8 @@
         </p:nvSpPr>
         <p:spPr>
           <a:xfrm>
-            <a:off x="6400800" y="960120"/>
-            <a:ext cx="5440680" cy="5669280"/>
+            <a:off x="6446520" y="1051560"/>
+            <a:ext cx="5349240" cy="5623560"/>
           </a:xfrm>
           <a:prstGeom prst="rect">
             <a:avLst/>
@@ -5040,11 +5040,11 @@
           <a:p>
             <a:pPr>
               <a:spcAft>
-                <a:spcPts val="300"/>
-              </a:spcAft>
-            </a:pPr>
-            <a:r>
-              <a:rPr sz="1200">
+                <a:spcPts val="500"/>
+              </a:spcAft>
+            </a:pPr>
+            <a:r>
+              <a:rPr sz="1400">
                 <a:solidFill>
                   <a:srgbClr val="333333"/>
                 </a:solidFill>
@@ -5056,11 +5056,11 @@
           <a:p>
             <a:pPr>
               <a:spcAft>
-                <a:spcPts val="300"/>
-              </a:spcAft>
-            </a:pPr>
-            <a:r>
-              <a:rPr sz="1200">
+                <a:spcPts val="500"/>
+              </a:spcAft>
+            </a:pPr>
+            <a:r>
+              <a:rPr sz="1400">
                 <a:solidFill>
                   <a:srgbClr val="333333"/>
                 </a:solidFill>
@@ -5072,11 +5072,11 @@
           <a:p>
             <a:pPr>
               <a:spcAft>
-                <a:spcPts val="300"/>
-              </a:spcAft>
-            </a:pPr>
-            <a:r>
-              <a:rPr sz="1200">
+                <a:spcPts val="500"/>
+              </a:spcAft>
+            </a:pPr>
+            <a:r>
+              <a:rPr sz="1400">
                 <a:solidFill>
                   <a:srgbClr val="333333"/>
                 </a:solidFill>
@@ -5179,8 +5179,8 @@
         </p:nvSpPr>
         <p:spPr>
           <a:xfrm>
-            <a:off x="365760" y="182880"/>
-            <a:ext cx="11430000" cy="640080"/>
+            <a:off x="365760" y="365760"/>
+            <a:ext cx="11430000" cy="594360"/>
           </a:xfrm>
           <a:prstGeom prst="rect">
             <a:avLst/>
@@ -5194,7 +5194,7 @@
           <a:lstStyle/>
           <a:p>
             <a:r>
-              <a:rPr sz="2000" b="1">
+              <a:rPr sz="2100" b="1">
                 <a:solidFill>
                   <a:srgbClr val="1F3B6E"/>
                 </a:solidFill>
@@ -5212,8 +5212,8 @@
         </p:nvSpPr>
         <p:spPr>
           <a:xfrm>
-            <a:off x="365760" y="960120"/>
-            <a:ext cx="5852160" cy="5669280"/>
+            <a:off x="365760" y="1051560"/>
+            <a:ext cx="5943600" cy="5623560"/>
           </a:xfrm>
           <a:prstGeom prst="rect">
             <a:avLst/>
@@ -5234,7 +5234,7 @@
               </a:spcAft>
             </a:pPr>
             <a:r>
-              <a:rPr sz="1200">
+              <a:rPr sz="1400">
                 <a:solidFill>
                   <a:srgbClr val="202020"/>
                 </a:solidFill>
@@ -5249,7 +5249,7 @@
               </a:spcAft>
             </a:pPr>
             <a:r>
-              <a:rPr sz="1200">
+              <a:rPr sz="1400">
                 <a:solidFill>
                   <a:srgbClr val="202020"/>
                 </a:solidFill>
@@ -5264,7 +5264,7 @@
               </a:spcAft>
             </a:pPr>
             <a:r>
-              <a:rPr sz="1200">
+              <a:rPr sz="1400">
                 <a:solidFill>
                   <a:srgbClr val="202020"/>
                 </a:solidFill>
@@ -5282,8 +5282,8 @@
         </p:nvSpPr>
         <p:spPr>
           <a:xfrm>
-            <a:off x="6400800" y="960120"/>
-            <a:ext cx="5440680" cy="5669280"/>
+            <a:off x="6446520" y="1051560"/>
+            <a:ext cx="5349240" cy="5623560"/>
           </a:xfrm>
           <a:prstGeom prst="rect">
             <a:avLst/>
@@ -5300,11 +5300,11 @@
           <a:p>
             <a:pPr>
               <a:spcAft>
-                <a:spcPts val="300"/>
-              </a:spcAft>
-            </a:pPr>
-            <a:r>
-              <a:rPr sz="1200">
+                <a:spcPts val="500"/>
+              </a:spcAft>
+            </a:pPr>
+            <a:r>
+              <a:rPr sz="1400">
                 <a:solidFill>
                   <a:srgbClr val="333333"/>
                 </a:solidFill>
@@ -5316,11 +5316,11 @@
           <a:p>
             <a:pPr>
               <a:spcAft>
-                <a:spcPts val="300"/>
-              </a:spcAft>
-            </a:pPr>
-            <a:r>
-              <a:rPr sz="1200">
+                <a:spcPts val="500"/>
+              </a:spcAft>
+            </a:pPr>
+            <a:r>
+              <a:rPr sz="1400">
                 <a:solidFill>
                   <a:srgbClr val="333333"/>
                 </a:solidFill>
@@ -5332,11 +5332,11 @@
           <a:p>
             <a:pPr>
               <a:spcAft>
-                <a:spcPts val="300"/>
-              </a:spcAft>
-            </a:pPr>
-            <a:r>
-              <a:rPr sz="1200">
+                <a:spcPts val="500"/>
+              </a:spcAft>
+            </a:pPr>
+            <a:r>
+              <a:rPr sz="1400">
                 <a:solidFill>
                   <a:srgbClr val="333333"/>
                 </a:solidFill>
@@ -5348,11 +5348,11 @@
           <a:p>
             <a:pPr>
               <a:spcAft>
-                <a:spcPts val="300"/>
-              </a:spcAft>
-            </a:pPr>
-            <a:r>
-              <a:rPr sz="1200">
+                <a:spcPts val="500"/>
+              </a:spcAft>
+            </a:pPr>
+            <a:r>
+              <a:rPr sz="1400">
                 <a:solidFill>
                   <a:srgbClr val="333333"/>
                 </a:solidFill>
@@ -5455,8 +5455,8 @@
         </p:nvSpPr>
         <p:spPr>
           <a:xfrm>
-            <a:off x="365760" y="182880"/>
-            <a:ext cx="11430000" cy="640080"/>
+            <a:off x="365760" y="365760"/>
+            <a:ext cx="11430000" cy="594360"/>
           </a:xfrm>
           <a:prstGeom prst="rect">
             <a:avLst/>
@@ -5470,7 +5470,7 @@
           <a:lstStyle/>
           <a:p>
             <a:r>
-              <a:rPr sz="2000" b="1">
+              <a:rPr sz="2100" b="1">
                 <a:solidFill>
                   <a:srgbClr val="1F3B6E"/>
                 </a:solidFill>
@@ -5488,8 +5488,8 @@
         </p:nvSpPr>
         <p:spPr>
           <a:xfrm>
-            <a:off x="365760" y="960120"/>
-            <a:ext cx="5852160" cy="5669280"/>
+            <a:off x="365760" y="1051560"/>
+            <a:ext cx="5943600" cy="5623560"/>
           </a:xfrm>
           <a:prstGeom prst="rect">
             <a:avLst/>
@@ -5510,7 +5510,7 @@
               </a:spcAft>
             </a:pPr>
             <a:r>
-              <a:rPr sz="1200">
+              <a:rPr sz="1400">
                 <a:solidFill>
                   <a:srgbClr val="202020"/>
                 </a:solidFill>
@@ -5528,8 +5528,8 @@
         </p:nvSpPr>
         <p:spPr>
           <a:xfrm>
-            <a:off x="6400800" y="960120"/>
-            <a:ext cx="5440680" cy="5669280"/>
+            <a:off x="6446520" y="1051560"/>
+            <a:ext cx="5349240" cy="5623560"/>
           </a:xfrm>
           <a:prstGeom prst="rect">
             <a:avLst/>
@@ -5546,11 +5546,11 @@
           <a:p>
             <a:pPr>
               <a:spcAft>
-                <a:spcPts val="300"/>
-              </a:spcAft>
-            </a:pPr>
-            <a:r>
-              <a:rPr sz="1200">
+                <a:spcPts val="500"/>
+              </a:spcAft>
+            </a:pPr>
+            <a:r>
+              <a:rPr sz="1400">
                 <a:solidFill>
                   <a:srgbClr val="333333"/>
                 </a:solidFill>
@@ -5653,8 +5653,8 @@
         </p:nvSpPr>
         <p:spPr>
           <a:xfrm>
-            <a:off x="365760" y="182880"/>
-            <a:ext cx="11430000" cy="640080"/>
+            <a:off x="365760" y="365760"/>
+            <a:ext cx="11430000" cy="594360"/>
           </a:xfrm>
           <a:prstGeom prst="rect">
             <a:avLst/>
@@ -5668,7 +5668,7 @@
           <a:lstStyle/>
           <a:p>
             <a:r>
-              <a:rPr sz="2000" b="1">
+              <a:rPr sz="2100" b="1">
                 <a:solidFill>
                   <a:srgbClr val="1F3B6E"/>
                 </a:solidFill>
@@ -5686,8 +5686,8 @@
         </p:nvSpPr>
         <p:spPr>
           <a:xfrm>
-            <a:off x="365760" y="960120"/>
-            <a:ext cx="5852160" cy="5669280"/>
+            <a:off x="365760" y="1051560"/>
+            <a:ext cx="5943600" cy="5623560"/>
           </a:xfrm>
           <a:prstGeom prst="rect">
             <a:avLst/>
@@ -5708,7 +5708,7 @@
               </a:spcAft>
             </a:pPr>
             <a:r>
-              <a:rPr sz="1200">
+              <a:rPr sz="1400">
                 <a:solidFill>
                   <a:srgbClr val="202020"/>
                 </a:solidFill>
@@ -5726,8 +5726,8 @@
         </p:nvSpPr>
         <p:spPr>
           <a:xfrm>
-            <a:off x="6400800" y="960120"/>
-            <a:ext cx="5440680" cy="5669280"/>
+            <a:off x="6446520" y="1051560"/>
+            <a:ext cx="5349240" cy="5623560"/>
           </a:xfrm>
           <a:prstGeom prst="rect">
             <a:avLst/>
@@ -5744,11 +5744,11 @@
           <a:p>
             <a:pPr>
               <a:spcAft>
-                <a:spcPts val="300"/>
-              </a:spcAft>
-            </a:pPr>
-            <a:r>
-              <a:rPr sz="1200">
+                <a:spcPts val="500"/>
+              </a:spcAft>
+            </a:pPr>
+            <a:r>
+              <a:rPr sz="1400">
                 <a:solidFill>
                   <a:srgbClr val="333333"/>
                 </a:solidFill>
@@ -5851,8 +5851,8 @@
         </p:nvSpPr>
         <p:spPr>
           <a:xfrm>
-            <a:off x="365760" y="182880"/>
-            <a:ext cx="11430000" cy="640080"/>
+            <a:off x="365760" y="365760"/>
+            <a:ext cx="11430000" cy="594360"/>
           </a:xfrm>
           <a:prstGeom prst="rect">
             <a:avLst/>
@@ -5866,7 +5866,7 @@
           <a:lstStyle/>
           <a:p>
             <a:r>
-              <a:rPr sz="2000" b="1">
+              <a:rPr sz="2100" b="1">
                 <a:solidFill>
                   <a:srgbClr val="1F3B6E"/>
                 </a:solidFill>
@@ -5884,8 +5884,8 @@
         </p:nvSpPr>
         <p:spPr>
           <a:xfrm>
-            <a:off x="365760" y="960120"/>
-            <a:ext cx="5852160" cy="5669280"/>
+            <a:off x="365760" y="1051560"/>
+            <a:ext cx="5943600" cy="5623560"/>
           </a:xfrm>
           <a:prstGeom prst="rect">
             <a:avLst/>
@@ -5906,7 +5906,7 @@
               </a:spcAft>
             </a:pPr>
             <a:r>
-              <a:rPr sz="1200">
+              <a:rPr sz="1400">
                 <a:solidFill>
                   <a:srgbClr val="202020"/>
                 </a:solidFill>
@@ -5921,7 +5921,7 @@
               </a:spcAft>
             </a:pPr>
             <a:r>
-              <a:rPr sz="1200">
+              <a:rPr sz="1400">
                 <a:solidFill>
                   <a:srgbClr val="202020"/>
                 </a:solidFill>
@@ -5936,7 +5936,7 @@
               </a:spcAft>
             </a:pPr>
             <a:r>
-              <a:rPr sz="1200">
+              <a:rPr sz="1400">
                 <a:solidFill>
                   <a:srgbClr val="202020"/>
                 </a:solidFill>
@@ -5954,8 +5954,8 @@
         </p:nvSpPr>
         <p:spPr>
           <a:xfrm>
-            <a:off x="6400800" y="960120"/>
-            <a:ext cx="5440680" cy="5669280"/>
+            <a:off x="6446520" y="1051560"/>
+            <a:ext cx="5349240" cy="5623560"/>
           </a:xfrm>
           <a:prstGeom prst="rect">
             <a:avLst/>
@@ -5972,11 +5972,11 @@
           <a:p>
             <a:pPr>
               <a:spcAft>
-                <a:spcPts val="300"/>
-              </a:spcAft>
-            </a:pPr>
-            <a:r>
-              <a:rPr sz="1200">
+                <a:spcPts val="500"/>
+              </a:spcAft>
+            </a:pPr>
+            <a:r>
+              <a:rPr sz="1400">
                 <a:solidFill>
                   <a:srgbClr val="333333"/>
                 </a:solidFill>
@@ -5988,11 +5988,11 @@
           <a:p>
             <a:pPr>
               <a:spcAft>
-                <a:spcPts val="300"/>
-              </a:spcAft>
-            </a:pPr>
-            <a:r>
-              <a:rPr sz="1200">
+                <a:spcPts val="500"/>
+              </a:spcAft>
+            </a:pPr>
+            <a:r>
+              <a:rPr sz="1400">
                 <a:solidFill>
                   <a:srgbClr val="333333"/>
                 </a:solidFill>
@@ -6004,11 +6004,11 @@
           <a:p>
             <a:pPr>
               <a:spcAft>
-                <a:spcPts val="300"/>
-              </a:spcAft>
-            </a:pPr>
-            <a:r>
-              <a:rPr sz="1200">
+                <a:spcPts val="500"/>
+              </a:spcAft>
+            </a:pPr>
+            <a:r>
+              <a:rPr sz="1400">
                 <a:solidFill>
                   <a:srgbClr val="333333"/>
                 </a:solidFill>
@@ -6020,11 +6020,11 @@
           <a:p>
             <a:pPr>
               <a:spcAft>
-                <a:spcPts val="300"/>
-              </a:spcAft>
-            </a:pPr>
-            <a:r>
-              <a:rPr sz="1200">
+                <a:spcPts val="500"/>
+              </a:spcAft>
+            </a:pPr>
+            <a:r>
+              <a:rPr sz="1400">
                 <a:solidFill>
                   <a:srgbClr val="333333"/>
                 </a:solidFill>
@@ -6127,8 +6127,8 @@
         </p:nvSpPr>
         <p:spPr>
           <a:xfrm>
-            <a:off x="365760" y="182880"/>
-            <a:ext cx="11430000" cy="640080"/>
+            <a:off x="365760" y="365760"/>
+            <a:ext cx="11430000" cy="594360"/>
           </a:xfrm>
           <a:prstGeom prst="rect">
             <a:avLst/>
@@ -6142,7 +6142,7 @@
           <a:lstStyle/>
           <a:p>
             <a:r>
-              <a:rPr sz="2000" b="1">
+              <a:rPr sz="2100" b="1">
                 <a:solidFill>
                   <a:srgbClr val="1F3B6E"/>
                 </a:solidFill>
@@ -6160,8 +6160,8 @@
         </p:nvSpPr>
         <p:spPr>
           <a:xfrm>
-            <a:off x="365760" y="960120"/>
-            <a:ext cx="5852160" cy="5669280"/>
+            <a:off x="365760" y="1051560"/>
+            <a:ext cx="5943600" cy="5623560"/>
           </a:xfrm>
           <a:prstGeom prst="rect">
             <a:avLst/>
@@ -6182,7 +6182,7 @@
               </a:spcAft>
             </a:pPr>
             <a:r>
-              <a:rPr sz="1200">
+              <a:rPr sz="1400">
                 <a:solidFill>
                   <a:srgbClr val="202020"/>
                 </a:solidFill>
@@ -6197,7 +6197,7 @@
               </a:spcAft>
             </a:pPr>
             <a:r>
-              <a:rPr sz="1200">
+              <a:rPr sz="1400">
                 <a:solidFill>
                   <a:srgbClr val="202020"/>
                 </a:solidFill>
@@ -6212,7 +6212,7 @@
               </a:spcAft>
             </a:pPr>
             <a:r>
-              <a:rPr sz="1200">
+              <a:rPr sz="1400">
                 <a:solidFill>
                   <a:srgbClr val="202020"/>
                 </a:solidFill>
@@ -6227,7 +6227,7 @@
               </a:spcAft>
             </a:pPr>
             <a:r>
-              <a:rPr sz="1200">
+              <a:rPr sz="1400">
                 <a:solidFill>
                   <a:srgbClr val="202020"/>
                 </a:solidFill>
@@ -6245,8 +6245,8 @@
         </p:nvSpPr>
         <p:spPr>
           <a:xfrm>
-            <a:off x="6400800" y="960120"/>
-            <a:ext cx="5440680" cy="5669280"/>
+            <a:off x="6446520" y="1051560"/>
+            <a:ext cx="5349240" cy="5623560"/>
           </a:xfrm>
           <a:prstGeom prst="rect">
             <a:avLst/>
@@ -6263,11 +6263,11 @@
           <a:p>
             <a:pPr>
               <a:spcAft>
-                <a:spcPts val="300"/>
-              </a:spcAft>
-            </a:pPr>
-            <a:r>
-              <a:rPr sz="1200">
+                <a:spcPts val="500"/>
+              </a:spcAft>
+            </a:pPr>
+            <a:r>
+              <a:rPr sz="1400">
                 <a:solidFill>
                   <a:srgbClr val="333333"/>
                 </a:solidFill>
@@ -6279,11 +6279,11 @@
           <a:p>
             <a:pPr>
               <a:spcAft>
-                <a:spcPts val="300"/>
-              </a:spcAft>
-            </a:pPr>
-            <a:r>
-              <a:rPr sz="1200">
+                <a:spcPts val="500"/>
+              </a:spcAft>
+            </a:pPr>
+            <a:r>
+              <a:rPr sz="1400">
                 <a:solidFill>
                   <a:srgbClr val="333333"/>
                 </a:solidFill>
@@ -6295,11 +6295,11 @@
           <a:p>
             <a:pPr>
               <a:spcAft>
-                <a:spcPts val="300"/>
-              </a:spcAft>
-            </a:pPr>
-            <a:r>
-              <a:rPr sz="1200">
+                <a:spcPts val="500"/>
+              </a:spcAft>
+            </a:pPr>
+            <a:r>
+              <a:rPr sz="1400">
                 <a:solidFill>
                   <a:srgbClr val="333333"/>
                 </a:solidFill>
@@ -6311,11 +6311,11 @@
           <a:p>
             <a:pPr>
               <a:spcAft>
-                <a:spcPts val="300"/>
-              </a:spcAft>
-            </a:pPr>
-            <a:r>
-              <a:rPr sz="1200">
+                <a:spcPts val="500"/>
+              </a:spcAft>
+            </a:pPr>
+            <a:r>
+              <a:rPr sz="1400">
                 <a:solidFill>
                   <a:srgbClr val="333333"/>
                 </a:solidFill>
@@ -6327,11 +6327,11 @@
           <a:p>
             <a:pPr>
               <a:spcAft>
-                <a:spcPts val="300"/>
-              </a:spcAft>
-            </a:pPr>
-            <a:r>
-              <a:rPr sz="1200">
+                <a:spcPts val="500"/>
+              </a:spcAft>
+            </a:pPr>
+            <a:r>
+              <a:rPr sz="1400">
                 <a:solidFill>
                   <a:srgbClr val="333333"/>
                 </a:solidFill>
@@ -6434,8 +6434,8 @@
         </p:nvSpPr>
         <p:spPr>
           <a:xfrm>
-            <a:off x="365760" y="182880"/>
-            <a:ext cx="11430000" cy="640080"/>
+            <a:off x="365760" y="365760"/>
+            <a:ext cx="11430000" cy="594360"/>
           </a:xfrm>
           <a:prstGeom prst="rect">
             <a:avLst/>
@@ -6449,7 +6449,7 @@
           <a:lstStyle/>
           <a:p>
             <a:r>
-              <a:rPr sz="2000" b="1">
+              <a:rPr sz="2100" b="1">
                 <a:solidFill>
                   <a:srgbClr val="1F3B6E"/>
                 </a:solidFill>
@@ -6467,8 +6467,8 @@
         </p:nvSpPr>
         <p:spPr>
           <a:xfrm>
-            <a:off x="365760" y="960120"/>
-            <a:ext cx="5852160" cy="5669280"/>
+            <a:off x="365760" y="1051560"/>
+            <a:ext cx="5943600" cy="5623560"/>
           </a:xfrm>
           <a:prstGeom prst="rect">
             <a:avLst/>
@@ -6489,7 +6489,7 @@
               </a:spcAft>
             </a:pPr>
             <a:r>
-              <a:rPr sz="1200">
+              <a:rPr sz="1400">
                 <a:solidFill>
                   <a:srgbClr val="202020"/>
                 </a:solidFill>
@@ -6504,7 +6504,7 @@
               </a:spcAft>
             </a:pPr>
             <a:r>
-              <a:rPr sz="1200">
+              <a:rPr sz="1400">
                 <a:solidFill>
                   <a:srgbClr val="202020"/>
                 </a:solidFill>
@@ -6519,7 +6519,7 @@
               </a:spcAft>
             </a:pPr>
             <a:r>
-              <a:rPr sz="1200">
+              <a:rPr sz="1400">
                 <a:solidFill>
                   <a:srgbClr val="202020"/>
                 </a:solidFill>
@@ -6534,7 +6534,7 @@
               </a:spcAft>
             </a:pPr>
             <a:r>
-              <a:rPr sz="1200">
+              <a:rPr sz="1400">
                 <a:solidFill>
                   <a:srgbClr val="202020"/>
                 </a:solidFill>
@@ -6556,7 +6556,7 @@
               </a:spcAft>
             </a:pPr>
             <a:r>
-              <a:rPr sz="1200">
+              <a:rPr sz="1400">
                 <a:solidFill>
                   <a:srgbClr val="202020"/>
                 </a:solidFill>
@@ -6571,7 +6571,7 @@
               </a:spcAft>
             </a:pPr>
             <a:r>
-              <a:rPr sz="1200">
+              <a:rPr sz="1400">
                 <a:solidFill>
                   <a:srgbClr val="202020"/>
                 </a:solidFill>
@@ -6586,7 +6586,7 @@
               </a:spcAft>
             </a:pPr>
             <a:r>
-              <a:rPr sz="1200">
+              <a:rPr sz="1400">
                 <a:solidFill>
                   <a:srgbClr val="202020"/>
                 </a:solidFill>
@@ -6601,7 +6601,7 @@
               </a:spcAft>
             </a:pPr>
             <a:r>
-              <a:rPr sz="1200">
+              <a:rPr sz="1400">
                 <a:solidFill>
                   <a:srgbClr val="202020"/>
                 </a:solidFill>
@@ -6616,7 +6616,7 @@
               </a:spcAft>
             </a:pPr>
             <a:r>
-              <a:rPr sz="1200">
+              <a:rPr sz="1400">
                 <a:solidFill>
                   <a:srgbClr val="202020"/>
                 </a:solidFill>
@@ -6631,7 +6631,7 @@
               </a:spcAft>
             </a:pPr>
             <a:r>
-              <a:rPr sz="1200">
+              <a:rPr sz="1400">
                 <a:solidFill>
                   <a:srgbClr val="202020"/>
                 </a:solidFill>
@@ -6646,7 +6646,7 @@
               </a:spcAft>
             </a:pPr>
             <a:r>
-              <a:rPr sz="1200">
+              <a:rPr sz="1400">
                 <a:solidFill>
                   <a:srgbClr val="202020"/>
                 </a:solidFill>
@@ -6664,8 +6664,8 @@
         </p:nvSpPr>
         <p:spPr>
           <a:xfrm>
-            <a:off x="6400800" y="960120"/>
-            <a:ext cx="5440680" cy="5669280"/>
+            <a:off x="6446520" y="1051560"/>
+            <a:ext cx="5349240" cy="5623560"/>
           </a:xfrm>
           <a:prstGeom prst="rect">
             <a:avLst/>
@@ -6682,11 +6682,11 @@
           <a:p>
             <a:pPr>
               <a:spcAft>
-                <a:spcPts val="300"/>
-              </a:spcAft>
-            </a:pPr>
-            <a:r>
-              <a:rPr sz="1200">
+                <a:spcPts val="500"/>
+              </a:spcAft>
+            </a:pPr>
+            <a:r>
+              <a:rPr sz="1400">
                 <a:solidFill>
                   <a:srgbClr val="333333"/>
                 </a:solidFill>
@@ -6698,11 +6698,11 @@
           <a:p>
             <a:pPr>
               <a:spcAft>
-                <a:spcPts val="300"/>
-              </a:spcAft>
-            </a:pPr>
-            <a:r>
-              <a:rPr sz="1200">
+                <a:spcPts val="500"/>
+              </a:spcAft>
+            </a:pPr>
+            <a:r>
+              <a:rPr sz="1400">
                 <a:solidFill>
                   <a:srgbClr val="333333"/>
                 </a:solidFill>
@@ -6714,11 +6714,11 @@
           <a:p>
             <a:pPr>
               <a:spcAft>
-                <a:spcPts val="300"/>
-              </a:spcAft>
-            </a:pPr>
-            <a:r>
-              <a:rPr sz="1200">
+                <a:spcPts val="500"/>
+              </a:spcAft>
+            </a:pPr>
+            <a:r>
+              <a:rPr sz="1400">
                 <a:solidFill>
                   <a:srgbClr val="333333"/>
                 </a:solidFill>
@@ -6821,8 +6821,8 @@
         </p:nvSpPr>
         <p:spPr>
           <a:xfrm>
-            <a:off x="365760" y="182880"/>
-            <a:ext cx="11430000" cy="640080"/>
+            <a:off x="365760" y="365760"/>
+            <a:ext cx="11430000" cy="594360"/>
           </a:xfrm>
           <a:prstGeom prst="rect">
             <a:avLst/>
@@ -6836,7 +6836,7 @@
           <a:lstStyle/>
           <a:p>
             <a:r>
-              <a:rPr sz="2000" b="1">
+              <a:rPr sz="2100" b="1">
                 <a:solidFill>
                   <a:srgbClr val="1F3B6E"/>
                 </a:solidFill>
@@ -6854,8 +6854,8 @@
         </p:nvSpPr>
         <p:spPr>
           <a:xfrm>
-            <a:off x="365760" y="960120"/>
-            <a:ext cx="5852160" cy="5669280"/>
+            <a:off x="365760" y="1051560"/>
+            <a:ext cx="5943600" cy="5623560"/>
           </a:xfrm>
           <a:prstGeom prst="rect">
             <a:avLst/>
@@ -6876,7 +6876,7 @@
               </a:spcAft>
             </a:pPr>
             <a:r>
-              <a:rPr sz="1200">
+              <a:rPr sz="1400">
                 <a:solidFill>
                   <a:srgbClr val="202020"/>
                 </a:solidFill>
@@ -6891,7 +6891,7 @@
               </a:spcAft>
             </a:pPr>
             <a:r>
-              <a:rPr sz="1200">
+              <a:rPr sz="1400">
                 <a:solidFill>
                   <a:srgbClr val="202020"/>
                 </a:solidFill>
@@ -6906,7 +6906,7 @@
               </a:spcAft>
             </a:pPr>
             <a:r>
-              <a:rPr sz="1200">
+              <a:rPr sz="1400">
                 <a:solidFill>
                   <a:srgbClr val="202020"/>
                 </a:solidFill>
@@ -6921,7 +6921,7 @@
               </a:spcAft>
             </a:pPr>
             <a:r>
-              <a:rPr sz="1200">
+              <a:rPr sz="1400">
                 <a:solidFill>
                   <a:srgbClr val="202020"/>
                 </a:solidFill>
@@ -6939,8 +6939,8 @@
         </p:nvSpPr>
         <p:spPr>
           <a:xfrm>
-            <a:off x="6400800" y="960120"/>
-            <a:ext cx="5440680" cy="5669280"/>
+            <a:off x="6446520" y="1051560"/>
+            <a:ext cx="5349240" cy="5623560"/>
           </a:xfrm>
           <a:prstGeom prst="rect">
             <a:avLst/>
@@ -6957,11 +6957,11 @@
           <a:p>
             <a:pPr>
               <a:spcAft>
-                <a:spcPts val="300"/>
-              </a:spcAft>
-            </a:pPr>
-            <a:r>
-              <a:rPr sz="1200">
+                <a:spcPts val="500"/>
+              </a:spcAft>
+            </a:pPr>
+            <a:r>
+              <a:rPr sz="1400">
                 <a:solidFill>
                   <a:srgbClr val="333333"/>
                 </a:solidFill>
@@ -6973,11 +6973,11 @@
           <a:p>
             <a:pPr>
               <a:spcAft>
-                <a:spcPts val="300"/>
-              </a:spcAft>
-            </a:pPr>
-            <a:r>
-              <a:rPr sz="1200">
+                <a:spcPts val="500"/>
+              </a:spcAft>
+            </a:pPr>
+            <a:r>
+              <a:rPr sz="1400">
                 <a:solidFill>
                   <a:srgbClr val="333333"/>
                 </a:solidFill>
@@ -6989,11 +6989,11 @@
           <a:p>
             <a:pPr>
               <a:spcAft>
-                <a:spcPts val="300"/>
-              </a:spcAft>
-            </a:pPr>
-            <a:r>
-              <a:rPr sz="1200">
+                <a:spcPts val="500"/>
+              </a:spcAft>
+            </a:pPr>
+            <a:r>
+              <a:rPr sz="1400">
                 <a:solidFill>
                   <a:srgbClr val="333333"/>
                 </a:solidFill>
@@ -7005,11 +7005,11 @@
           <a:p>
             <a:pPr>
               <a:spcAft>
-                <a:spcPts val="300"/>
-              </a:spcAft>
-            </a:pPr>
-            <a:r>
-              <a:rPr sz="1200">
+                <a:spcPts val="500"/>
+              </a:spcAft>
+            </a:pPr>
+            <a:r>
+              <a:rPr sz="1400">
                 <a:solidFill>
                   <a:srgbClr val="333333"/>
                 </a:solidFill>
@@ -7112,8 +7112,8 @@
         </p:nvSpPr>
         <p:spPr>
           <a:xfrm>
-            <a:off x="365760" y="182880"/>
-            <a:ext cx="11430000" cy="640080"/>
+            <a:off x="365760" y="365760"/>
+            <a:ext cx="11430000" cy="594360"/>
           </a:xfrm>
           <a:prstGeom prst="rect">
             <a:avLst/>
@@ -7127,7 +7127,7 @@
           <a:lstStyle/>
           <a:p>
             <a:r>
-              <a:rPr sz="2000" b="1">
+              <a:rPr sz="2100" b="1">
                 <a:solidFill>
                   <a:srgbClr val="1F3B6E"/>
                 </a:solidFill>
@@ -7145,8 +7145,8 @@
         </p:nvSpPr>
         <p:spPr>
           <a:xfrm>
-            <a:off x="365760" y="960120"/>
-            <a:ext cx="5852160" cy="5669280"/>
+            <a:off x="365760" y="1051560"/>
+            <a:ext cx="5943600" cy="5623560"/>
           </a:xfrm>
           <a:prstGeom prst="rect">
             <a:avLst/>
@@ -7167,7 +7167,7 @@
               </a:spcAft>
             </a:pPr>
             <a:r>
-              <a:rPr sz="1200">
+              <a:rPr sz="1400">
                 <a:solidFill>
                   <a:srgbClr val="202020"/>
                 </a:solidFill>
@@ -7182,7 +7182,7 @@
               </a:spcAft>
             </a:pPr>
             <a:r>
-              <a:rPr sz="1200">
+              <a:rPr sz="1400">
                 <a:solidFill>
                   <a:srgbClr val="202020"/>
                 </a:solidFill>
@@ -7197,7 +7197,7 @@
               </a:spcAft>
             </a:pPr>
             <a:r>
-              <a:rPr sz="1200">
+              <a:rPr sz="1400">
                 <a:solidFill>
                   <a:srgbClr val="202020"/>
                 </a:solidFill>
@@ -7212,7 +7212,7 @@
               </a:spcAft>
             </a:pPr>
             <a:r>
-              <a:rPr sz="1200">
+              <a:rPr sz="1400">
                 <a:solidFill>
                   <a:srgbClr val="202020"/>
                 </a:solidFill>
@@ -7230,8 +7230,8 @@
         </p:nvSpPr>
         <p:spPr>
           <a:xfrm>
-            <a:off x="6400800" y="960120"/>
-            <a:ext cx="5440680" cy="5669280"/>
+            <a:off x="6446520" y="1051560"/>
+            <a:ext cx="5349240" cy="5623560"/>
           </a:xfrm>
           <a:prstGeom prst="rect">
             <a:avLst/>
@@ -7248,11 +7248,11 @@
           <a:p>
             <a:pPr>
               <a:spcAft>
-                <a:spcPts val="300"/>
-              </a:spcAft>
-            </a:pPr>
-            <a:r>
-              <a:rPr sz="1200">
+                <a:spcPts val="500"/>
+              </a:spcAft>
+            </a:pPr>
+            <a:r>
+              <a:rPr sz="1400">
                 <a:solidFill>
                   <a:srgbClr val="333333"/>
                 </a:solidFill>
@@ -7264,11 +7264,11 @@
           <a:p>
             <a:pPr>
               <a:spcAft>
-                <a:spcPts val="300"/>
-              </a:spcAft>
-            </a:pPr>
-            <a:r>
-              <a:rPr sz="1200">
+                <a:spcPts val="500"/>
+              </a:spcAft>
+            </a:pPr>
+            <a:r>
+              <a:rPr sz="1400">
                 <a:solidFill>
                   <a:srgbClr val="333333"/>
                 </a:solidFill>
@@ -7280,11 +7280,11 @@
           <a:p>
             <a:pPr>
               <a:spcAft>
-                <a:spcPts val="300"/>
-              </a:spcAft>
-            </a:pPr>
-            <a:r>
-              <a:rPr sz="1200">
+                <a:spcPts val="500"/>
+              </a:spcAft>
+            </a:pPr>
+            <a:r>
+              <a:rPr sz="1400">
                 <a:solidFill>
                   <a:srgbClr val="333333"/>
                 </a:solidFill>
@@ -7296,11 +7296,11 @@
           <a:p>
             <a:pPr>
               <a:spcAft>
-                <a:spcPts val="300"/>
-              </a:spcAft>
-            </a:pPr>
-            <a:r>
-              <a:rPr sz="1200">
+                <a:spcPts val="500"/>
+              </a:spcAft>
+            </a:pPr>
+            <a:r>
+              <a:rPr sz="1400">
                 <a:solidFill>
                   <a:srgbClr val="333333"/>
                 </a:solidFill>
@@ -7312,11 +7312,11 @@
           <a:p>
             <a:pPr>
               <a:spcAft>
-                <a:spcPts val="300"/>
-              </a:spcAft>
-            </a:pPr>
-            <a:r>
-              <a:rPr sz="1200">
+                <a:spcPts val="500"/>
+              </a:spcAft>
+            </a:pPr>
+            <a:r>
+              <a:rPr sz="1400">
                 <a:solidFill>
                   <a:srgbClr val="333333"/>
                 </a:solidFill>
@@ -7419,8 +7419,8 @@
         </p:nvSpPr>
         <p:spPr>
           <a:xfrm>
-            <a:off x="365760" y="182880"/>
-            <a:ext cx="11430000" cy="640080"/>
+            <a:off x="365760" y="365760"/>
+            <a:ext cx="11430000" cy="594360"/>
           </a:xfrm>
           <a:prstGeom prst="rect">
             <a:avLst/>
@@ -7434,7 +7434,7 @@
           <a:lstStyle/>
           <a:p>
             <a:r>
-              <a:rPr sz="2000" b="1">
+              <a:rPr sz="2100" b="1">
                 <a:solidFill>
                   <a:srgbClr val="1F3B6E"/>
                 </a:solidFill>
@@ -7452,8 +7452,8 @@
         </p:nvSpPr>
         <p:spPr>
           <a:xfrm>
-            <a:off x="365760" y="960120"/>
-            <a:ext cx="5852160" cy="5669280"/>
+            <a:off x="365760" y="1051560"/>
+            <a:ext cx="5943600" cy="5623560"/>
           </a:xfrm>
           <a:prstGeom prst="rect">
             <a:avLst/>
@@ -7474,7 +7474,7 @@
               </a:spcAft>
             </a:pPr>
             <a:r>
-              <a:rPr sz="1200">
+              <a:rPr sz="1400">
                 <a:solidFill>
                   <a:srgbClr val="202020"/>
                 </a:solidFill>
@@ -7489,7 +7489,7 @@
               </a:spcAft>
             </a:pPr>
             <a:r>
-              <a:rPr sz="1200">
+              <a:rPr sz="1400">
                 <a:solidFill>
                   <a:srgbClr val="202020"/>
                 </a:solidFill>
@@ -7504,7 +7504,7 @@
               </a:spcAft>
             </a:pPr>
             <a:r>
-              <a:rPr sz="1200">
+              <a:rPr sz="1400">
                 <a:solidFill>
                   <a:srgbClr val="202020"/>
                 </a:solidFill>
@@ -7522,8 +7522,8 @@
         </p:nvSpPr>
         <p:spPr>
           <a:xfrm>
-            <a:off x="6400800" y="960120"/>
-            <a:ext cx="5440680" cy="5669280"/>
+            <a:off x="6446520" y="1051560"/>
+            <a:ext cx="5349240" cy="5623560"/>
           </a:xfrm>
           <a:prstGeom prst="rect">
             <a:avLst/>
@@ -7540,11 +7540,11 @@
           <a:p>
             <a:pPr>
               <a:spcAft>
-                <a:spcPts val="300"/>
-              </a:spcAft>
-            </a:pPr>
-            <a:r>
-              <a:rPr sz="1200">
+                <a:spcPts val="500"/>
+              </a:spcAft>
+            </a:pPr>
+            <a:r>
+              <a:rPr sz="1400">
                 <a:solidFill>
                   <a:srgbClr val="333333"/>
                 </a:solidFill>
@@ -7556,11 +7556,11 @@
           <a:p>
             <a:pPr>
               <a:spcAft>
-                <a:spcPts val="300"/>
-              </a:spcAft>
-            </a:pPr>
-            <a:r>
-              <a:rPr sz="1200">
+                <a:spcPts val="500"/>
+              </a:spcAft>
+            </a:pPr>
+            <a:r>
+              <a:rPr sz="1400">
                 <a:solidFill>
                   <a:srgbClr val="333333"/>
                 </a:solidFill>
@@ -7572,11 +7572,11 @@
           <a:p>
             <a:pPr>
               <a:spcAft>
-                <a:spcPts val="300"/>
-              </a:spcAft>
-            </a:pPr>
-            <a:r>
-              <a:rPr sz="1200">
+                <a:spcPts val="500"/>
+              </a:spcAft>
+            </a:pPr>
+            <a:r>
+              <a:rPr sz="1400">
                 <a:solidFill>
                   <a:srgbClr val="333333"/>
                 </a:solidFill>
@@ -7588,11 +7588,11 @@
           <a:p>
             <a:pPr>
               <a:spcAft>
-                <a:spcPts val="300"/>
-              </a:spcAft>
-            </a:pPr>
-            <a:r>
-              <a:rPr sz="1200">
+                <a:spcPts val="500"/>
+              </a:spcAft>
+            </a:pPr>
+            <a:r>
+              <a:rPr sz="1400">
                 <a:solidFill>
                   <a:srgbClr val="333333"/>
                 </a:solidFill>
@@ -7695,8 +7695,8 @@
         </p:nvSpPr>
         <p:spPr>
           <a:xfrm>
-            <a:off x="365760" y="182880"/>
-            <a:ext cx="11430000" cy="640080"/>
+            <a:off x="365760" y="365760"/>
+            <a:ext cx="11430000" cy="594360"/>
           </a:xfrm>
           <a:prstGeom prst="rect">
             <a:avLst/>
@@ -7710,7 +7710,7 @@
           <a:lstStyle/>
           <a:p>
             <a:r>
-              <a:rPr sz="2000" b="1">
+              <a:rPr sz="2100" b="1">
                 <a:solidFill>
                   <a:srgbClr val="1F3B6E"/>
                 </a:solidFill>
@@ -7728,8 +7728,8 @@
         </p:nvSpPr>
         <p:spPr>
           <a:xfrm>
-            <a:off x="365760" y="960120"/>
-            <a:ext cx="5852160" cy="5669280"/>
+            <a:off x="365760" y="1051560"/>
+            <a:ext cx="5943600" cy="5623560"/>
           </a:xfrm>
           <a:prstGeom prst="rect">
             <a:avLst/>
@@ -7750,7 +7750,7 @@
               </a:spcAft>
             </a:pPr>
             <a:r>
-              <a:rPr sz="1200">
+              <a:rPr sz="1400">
                 <a:solidFill>
                   <a:srgbClr val="202020"/>
                 </a:solidFill>
@@ -7765,7 +7765,7 @@
               </a:spcAft>
             </a:pPr>
             <a:r>
-              <a:rPr sz="1200">
+              <a:rPr sz="1400">
                 <a:solidFill>
                   <a:srgbClr val="202020"/>
                 </a:solidFill>
@@ -7780,7 +7780,7 @@
               </a:spcAft>
             </a:pPr>
             <a:r>
-              <a:rPr sz="1200">
+              <a:rPr sz="1400">
                 <a:solidFill>
                   <a:srgbClr val="202020"/>
                 </a:solidFill>
@@ -7795,7 +7795,7 @@
               </a:spcAft>
             </a:pPr>
             <a:r>
-              <a:rPr sz="1200">
+              <a:rPr sz="1400">
                 <a:solidFill>
                   <a:srgbClr val="202020"/>
                 </a:solidFill>
@@ -7813,8 +7813,8 @@
         </p:nvSpPr>
         <p:spPr>
           <a:xfrm>
-            <a:off x="6400800" y="960120"/>
-            <a:ext cx="5440680" cy="5669280"/>
+            <a:off x="6446520" y="1051560"/>
+            <a:ext cx="5349240" cy="5623560"/>
           </a:xfrm>
           <a:prstGeom prst="rect">
             <a:avLst/>
@@ -7831,11 +7831,11 @@
           <a:p>
             <a:pPr>
               <a:spcAft>
-                <a:spcPts val="300"/>
-              </a:spcAft>
-            </a:pPr>
-            <a:r>
-              <a:rPr sz="1200">
+                <a:spcPts val="500"/>
+              </a:spcAft>
+            </a:pPr>
+            <a:r>
+              <a:rPr sz="1400">
                 <a:solidFill>
                   <a:srgbClr val="333333"/>
                 </a:solidFill>
@@ -7847,11 +7847,11 @@
           <a:p>
             <a:pPr>
               <a:spcAft>
-                <a:spcPts val="300"/>
-              </a:spcAft>
-            </a:pPr>
-            <a:r>
-              <a:rPr sz="1200">
+                <a:spcPts val="500"/>
+              </a:spcAft>
+            </a:pPr>
+            <a:r>
+              <a:rPr sz="1400">
                 <a:solidFill>
                   <a:srgbClr val="333333"/>
                 </a:solidFill>
@@ -7863,11 +7863,11 @@
           <a:p>
             <a:pPr>
               <a:spcAft>
-                <a:spcPts val="300"/>
-              </a:spcAft>
-            </a:pPr>
-            <a:r>
-              <a:rPr sz="1200">
+                <a:spcPts val="500"/>
+              </a:spcAft>
+            </a:pPr>
+            <a:r>
+              <a:rPr sz="1400">
                 <a:solidFill>
                   <a:srgbClr val="333333"/>
                 </a:solidFill>
@@ -7879,11 +7879,11 @@
           <a:p>
             <a:pPr>
               <a:spcAft>
-                <a:spcPts val="300"/>
-              </a:spcAft>
-            </a:pPr>
-            <a:r>
-              <a:rPr sz="1200">
+                <a:spcPts val="500"/>
+              </a:spcAft>
+            </a:pPr>
+            <a:r>
+              <a:rPr sz="1400">
                 <a:solidFill>
                   <a:srgbClr val="333333"/>
                 </a:solidFill>
@@ -7895,11 +7895,11 @@
           <a:p>
             <a:pPr>
               <a:spcAft>
-                <a:spcPts val="300"/>
-              </a:spcAft>
-            </a:pPr>
-            <a:r>
-              <a:rPr sz="1200">
+                <a:spcPts val="500"/>
+              </a:spcAft>
+            </a:pPr>
+            <a:r>
+              <a:rPr sz="1400">
                 <a:solidFill>
                   <a:srgbClr val="333333"/>
                 </a:solidFill>
@@ -8002,8 +8002,8 @@
         </p:nvSpPr>
         <p:spPr>
           <a:xfrm>
-            <a:off x="365760" y="182880"/>
-            <a:ext cx="11430000" cy="640080"/>
+            <a:off x="365760" y="365760"/>
+            <a:ext cx="11430000" cy="594360"/>
           </a:xfrm>
           <a:prstGeom prst="rect">
             <a:avLst/>
@@ -8017,7 +8017,7 @@
           <a:lstStyle/>
           <a:p>
             <a:r>
-              <a:rPr sz="2000" b="1">
+              <a:rPr sz="2100" b="1">
                 <a:solidFill>
                   <a:srgbClr val="1F3B6E"/>
                 </a:solidFill>
@@ -8035,8 +8035,8 @@
         </p:nvSpPr>
         <p:spPr>
           <a:xfrm>
-            <a:off x="365760" y="960120"/>
-            <a:ext cx="5852160" cy="5669280"/>
+            <a:off x="365760" y="1051560"/>
+            <a:ext cx="5943600" cy="5623560"/>
           </a:xfrm>
           <a:prstGeom prst="rect">
             <a:avLst/>
@@ -8057,7 +8057,7 @@
               </a:spcAft>
             </a:pPr>
             <a:r>
-              <a:rPr sz="1200">
+              <a:rPr sz="1400">
                 <a:solidFill>
                   <a:srgbClr val="202020"/>
                 </a:solidFill>
@@ -8075,8 +8075,8 @@
         </p:nvSpPr>
         <p:spPr>
           <a:xfrm>
-            <a:off x="6400800" y="960120"/>
-            <a:ext cx="5440680" cy="5669280"/>
+            <a:off x="6446520" y="1051560"/>
+            <a:ext cx="5349240" cy="5623560"/>
           </a:xfrm>
           <a:prstGeom prst="rect">
             <a:avLst/>
@@ -8093,11 +8093,11 @@
           <a:p>
             <a:pPr>
               <a:spcAft>
-                <a:spcPts val="300"/>
-              </a:spcAft>
-            </a:pPr>
-            <a:r>
-              <a:rPr sz="1200">
+                <a:spcPts val="500"/>
+              </a:spcAft>
+            </a:pPr>
+            <a:r>
+              <a:rPr sz="1400">
                 <a:solidFill>
                   <a:srgbClr val="333333"/>
                 </a:solidFill>
@@ -8109,11 +8109,11 @@
           <a:p>
             <a:pPr>
               <a:spcAft>
-                <a:spcPts val="300"/>
-              </a:spcAft>
-            </a:pPr>
-            <a:r>
-              <a:rPr sz="1200">
+                <a:spcPts val="500"/>
+              </a:spcAft>
+            </a:pPr>
+            <a:r>
+              <a:rPr sz="1400">
                 <a:solidFill>
                   <a:srgbClr val="333333"/>
                 </a:solidFill>
@@ -8216,8 +8216,8 @@
         </p:nvSpPr>
         <p:spPr>
           <a:xfrm>
-            <a:off x="365760" y="182880"/>
-            <a:ext cx="11430000" cy="640080"/>
+            <a:off x="365760" y="365760"/>
+            <a:ext cx="11430000" cy="594360"/>
           </a:xfrm>
           <a:prstGeom prst="rect">
             <a:avLst/>
@@ -8231,7 +8231,7 @@
           <a:lstStyle/>
           <a:p>
             <a:r>
-              <a:rPr sz="2000" b="1">
+              <a:rPr sz="2100" b="1">
                 <a:solidFill>
                   <a:srgbClr val="1F3B6E"/>
                 </a:solidFill>
@@ -8249,8 +8249,8 @@
         </p:nvSpPr>
         <p:spPr>
           <a:xfrm>
-            <a:off x="365760" y="960120"/>
-            <a:ext cx="5852160" cy="5669280"/>
+            <a:off x="365760" y="1051560"/>
+            <a:ext cx="5943600" cy="5623560"/>
           </a:xfrm>
           <a:prstGeom prst="rect">
             <a:avLst/>
@@ -8271,7 +8271,7 @@
               </a:spcAft>
             </a:pPr>
             <a:r>
-              <a:rPr sz="1200">
+              <a:rPr sz="1400">
                 <a:solidFill>
                   <a:srgbClr val="202020"/>
                 </a:solidFill>
@@ -8286,7 +8286,7 @@
               </a:spcAft>
             </a:pPr>
             <a:r>
-              <a:rPr sz="1200">
+              <a:rPr sz="1400">
                 <a:solidFill>
                   <a:srgbClr val="202020"/>
                 </a:solidFill>
@@ -8301,7 +8301,7 @@
               </a:spcAft>
             </a:pPr>
             <a:r>
-              <a:rPr sz="1200">
+              <a:rPr sz="1400">
                 <a:solidFill>
                   <a:srgbClr val="202020"/>
                 </a:solidFill>
@@ -8316,7 +8316,7 @@
               </a:spcAft>
             </a:pPr>
             <a:r>
-              <a:rPr sz="1200">
+              <a:rPr sz="1400">
                 <a:solidFill>
                   <a:srgbClr val="202020"/>
                 </a:solidFill>
@@ -8334,8 +8334,8 @@
         </p:nvSpPr>
         <p:spPr>
           <a:xfrm>
-            <a:off x="6400800" y="960120"/>
-            <a:ext cx="5440680" cy="5669280"/>
+            <a:off x="6446520" y="1051560"/>
+            <a:ext cx="5349240" cy="5623560"/>
           </a:xfrm>
           <a:prstGeom prst="rect">
             <a:avLst/>
@@ -8352,11 +8352,11 @@
           <a:p>
             <a:pPr>
               <a:spcAft>
-                <a:spcPts val="300"/>
-              </a:spcAft>
-            </a:pPr>
-            <a:r>
-              <a:rPr sz="1200">
+                <a:spcPts val="500"/>
+              </a:spcAft>
+            </a:pPr>
+            <a:r>
+              <a:rPr sz="1400">
                 <a:solidFill>
                   <a:srgbClr val="333333"/>
                 </a:solidFill>
@@ -8368,11 +8368,11 @@
           <a:p>
             <a:pPr>
               <a:spcAft>
-                <a:spcPts val="300"/>
-              </a:spcAft>
-            </a:pPr>
-            <a:r>
-              <a:rPr sz="1200">
+                <a:spcPts val="500"/>
+              </a:spcAft>
+            </a:pPr>
+            <a:r>
+              <a:rPr sz="1400">
                 <a:solidFill>
                   <a:srgbClr val="333333"/>
                 </a:solidFill>
@@ -8384,11 +8384,11 @@
           <a:p>
             <a:pPr>
               <a:spcAft>
-                <a:spcPts val="300"/>
-              </a:spcAft>
-            </a:pPr>
-            <a:r>
-              <a:rPr sz="1200">
+                <a:spcPts val="500"/>
+              </a:spcAft>
+            </a:pPr>
+            <a:r>
+              <a:rPr sz="1400">
                 <a:solidFill>
                   <a:srgbClr val="333333"/>
                 </a:solidFill>
@@ -8400,11 +8400,11 @@
           <a:p>
             <a:pPr>
               <a:spcAft>
-                <a:spcPts val="300"/>
-              </a:spcAft>
-            </a:pPr>
-            <a:r>
-              <a:rPr sz="1200">
+                <a:spcPts val="500"/>
+              </a:spcAft>
+            </a:pPr>
+            <a:r>
+              <a:rPr sz="1400">
                 <a:solidFill>
                   <a:srgbClr val="333333"/>
                 </a:solidFill>
@@ -8416,11 +8416,11 @@
           <a:p>
             <a:pPr>
               <a:spcAft>
-                <a:spcPts val="300"/>
-              </a:spcAft>
-            </a:pPr>
-            <a:r>
-              <a:rPr sz="1200">
+                <a:spcPts val="500"/>
+              </a:spcAft>
+            </a:pPr>
+            <a:r>
+              <a:rPr sz="1400">
                 <a:solidFill>
                   <a:srgbClr val="333333"/>
                 </a:solidFill>
@@ -8523,8 +8523,8 @@
         </p:nvSpPr>
         <p:spPr>
           <a:xfrm>
-            <a:off x="365760" y="182880"/>
-            <a:ext cx="11430000" cy="640080"/>
+            <a:off x="365760" y="365760"/>
+            <a:ext cx="11430000" cy="594360"/>
           </a:xfrm>
           <a:prstGeom prst="rect">
             <a:avLst/>
@@ -8538,7 +8538,7 @@
           <a:lstStyle/>
           <a:p>
             <a:r>
-              <a:rPr sz="2000" b="1">
+              <a:rPr sz="2100" b="1">
                 <a:solidFill>
                   <a:srgbClr val="1F3B6E"/>
                 </a:solidFill>
@@ -8556,8 +8556,8 @@
         </p:nvSpPr>
         <p:spPr>
           <a:xfrm>
-            <a:off x="365760" y="960120"/>
-            <a:ext cx="5852160" cy="5669280"/>
+            <a:off x="365760" y="1051560"/>
+            <a:ext cx="5943600" cy="5623560"/>
           </a:xfrm>
           <a:prstGeom prst="rect">
             <a:avLst/>
@@ -8578,7 +8578,7 @@
               </a:spcAft>
             </a:pPr>
             <a:r>
-              <a:rPr sz="1200">
+              <a:rPr sz="1400">
                 <a:solidFill>
                   <a:srgbClr val="202020"/>
                 </a:solidFill>
@@ -8593,7 +8593,7 @@
               </a:spcAft>
             </a:pPr>
             <a:r>
-              <a:rPr sz="1200">
+              <a:rPr sz="1400">
                 <a:solidFill>
                   <a:srgbClr val="202020"/>
                 </a:solidFill>
@@ -8608,7 +8608,7 @@
               </a:spcAft>
             </a:pPr>
             <a:r>
-              <a:rPr sz="1200">
+              <a:rPr sz="1400">
                 <a:solidFill>
                   <a:srgbClr val="202020"/>
                 </a:solidFill>
@@ -8623,7 +8623,7 @@
               </a:spcAft>
             </a:pPr>
             <a:r>
-              <a:rPr sz="1200">
+              <a:rPr sz="1400">
                 <a:solidFill>
                   <a:srgbClr val="202020"/>
                 </a:solidFill>
@@ -8638,7 +8638,7 @@
               </a:spcAft>
             </a:pPr>
             <a:r>
-              <a:rPr sz="1200">
+              <a:rPr sz="1400">
                 <a:solidFill>
                   <a:srgbClr val="202020"/>
                 </a:solidFill>
@@ -8653,7 +8653,7 @@
               </a:spcAft>
             </a:pPr>
             <a:r>
-              <a:rPr sz="1200">
+              <a:rPr sz="1400">
                 <a:solidFill>
                   <a:srgbClr val="202020"/>
                 </a:solidFill>
@@ -8671,8 +8671,8 @@
         </p:nvSpPr>
         <p:spPr>
           <a:xfrm>
-            <a:off x="6400800" y="960120"/>
-            <a:ext cx="5440680" cy="5669280"/>
+            <a:off x="6446520" y="1051560"/>
+            <a:ext cx="5349240" cy="5623560"/>
           </a:xfrm>
           <a:prstGeom prst="rect">
             <a:avLst/>
@@ -8689,11 +8689,11 @@
           <a:p>
             <a:pPr>
               <a:spcAft>
-                <a:spcPts val="300"/>
-              </a:spcAft>
-            </a:pPr>
-            <a:r>
-              <a:rPr sz="1200">
+                <a:spcPts val="500"/>
+              </a:spcAft>
+            </a:pPr>
+            <a:r>
+              <a:rPr sz="1400">
                 <a:solidFill>
                   <a:srgbClr val="333333"/>
                 </a:solidFill>
@@ -8705,11 +8705,11 @@
           <a:p>
             <a:pPr>
               <a:spcAft>
-                <a:spcPts val="300"/>
-              </a:spcAft>
-            </a:pPr>
-            <a:r>
-              <a:rPr sz="1200">
+                <a:spcPts val="500"/>
+              </a:spcAft>
+            </a:pPr>
+            <a:r>
+              <a:rPr sz="1400">
                 <a:solidFill>
                   <a:srgbClr val="333333"/>
                 </a:solidFill>
@@ -8721,11 +8721,11 @@
           <a:p>
             <a:pPr>
               <a:spcAft>
-                <a:spcPts val="300"/>
-              </a:spcAft>
-            </a:pPr>
-            <a:r>
-              <a:rPr sz="1200">
+                <a:spcPts val="500"/>
+              </a:spcAft>
+            </a:pPr>
+            <a:r>
+              <a:rPr sz="1400">
                 <a:solidFill>
                   <a:srgbClr val="333333"/>
                 </a:solidFill>
@@ -8737,11 +8737,11 @@
           <a:p>
             <a:pPr>
               <a:spcAft>
-                <a:spcPts val="300"/>
-              </a:spcAft>
-            </a:pPr>
-            <a:r>
-              <a:rPr sz="1200">
+                <a:spcPts val="500"/>
+              </a:spcAft>
+            </a:pPr>
+            <a:r>
+              <a:rPr sz="1400">
                 <a:solidFill>
                   <a:srgbClr val="333333"/>
                 </a:solidFill>
@@ -8753,11 +8753,11 @@
           <a:p>
             <a:pPr>
               <a:spcAft>
-                <a:spcPts val="300"/>
-              </a:spcAft>
-            </a:pPr>
-            <a:r>
-              <a:rPr sz="1200">
+                <a:spcPts val="500"/>
+              </a:spcAft>
+            </a:pPr>
+            <a:r>
+              <a:rPr sz="1400">
                 <a:solidFill>
                   <a:srgbClr val="333333"/>
                 </a:solidFill>
@@ -8860,8 +8860,8 @@
         </p:nvSpPr>
         <p:spPr>
           <a:xfrm>
-            <a:off x="365760" y="182880"/>
-            <a:ext cx="11430000" cy="640080"/>
+            <a:off x="365760" y="365760"/>
+            <a:ext cx="11430000" cy="594360"/>
           </a:xfrm>
           <a:prstGeom prst="rect">
             <a:avLst/>
@@ -8875,7 +8875,7 @@
           <a:lstStyle/>
           <a:p>
             <a:r>
-              <a:rPr sz="2000" b="1">
+              <a:rPr sz="2100" b="1">
                 <a:solidFill>
                   <a:srgbClr val="1F3B6E"/>
                 </a:solidFill>
@@ -8893,8 +8893,8 @@
         </p:nvSpPr>
         <p:spPr>
           <a:xfrm>
-            <a:off x="365760" y="960120"/>
-            <a:ext cx="5852160" cy="5669280"/>
+            <a:off x="365760" y="1051560"/>
+            <a:ext cx="5943600" cy="5623560"/>
           </a:xfrm>
           <a:prstGeom prst="rect">
             <a:avLst/>
@@ -8915,7 +8915,7 @@
               </a:spcAft>
             </a:pPr>
             <a:r>
-              <a:rPr sz="1200">
+              <a:rPr sz="1400">
                 <a:solidFill>
                   <a:srgbClr val="202020"/>
                 </a:solidFill>
@@ -8937,7 +8937,7 @@
               </a:spcAft>
             </a:pPr>
             <a:r>
-              <a:rPr sz="1200">
+              <a:rPr sz="1400">
                 <a:solidFill>
                   <a:srgbClr val="202020"/>
                 </a:solidFill>
@@ -8952,7 +8952,7 @@
               </a:spcAft>
             </a:pPr>
             <a:r>
-              <a:rPr sz="1200">
+              <a:rPr sz="1400">
                 <a:solidFill>
                   <a:srgbClr val="202020"/>
                 </a:solidFill>
@@ -8970,8 +8970,8 @@
         </p:nvSpPr>
         <p:spPr>
           <a:xfrm>
-            <a:off x="6400800" y="960120"/>
-            <a:ext cx="5440680" cy="5669280"/>
+            <a:off x="6446520" y="1051560"/>
+            <a:ext cx="5349240" cy="5623560"/>
           </a:xfrm>
           <a:prstGeom prst="rect">
             <a:avLst/>
@@ -8988,11 +8988,11 @@
           <a:p>
             <a:pPr>
               <a:spcAft>
-                <a:spcPts val="300"/>
-              </a:spcAft>
-            </a:pPr>
-            <a:r>
-              <a:rPr sz="1200">
+                <a:spcPts val="500"/>
+              </a:spcAft>
+            </a:pPr>
+            <a:r>
+              <a:rPr sz="1400">
                 <a:solidFill>
                   <a:srgbClr val="333333"/>
                 </a:solidFill>
@@ -9004,11 +9004,11 @@
           <a:p>
             <a:pPr>
               <a:spcAft>
-                <a:spcPts val="300"/>
-              </a:spcAft>
-            </a:pPr>
-            <a:r>
-              <a:rPr sz="1200">
+                <a:spcPts val="500"/>
+              </a:spcAft>
+            </a:pPr>
+            <a:r>
+              <a:rPr sz="1400">
                 <a:solidFill>
                   <a:srgbClr val="333333"/>
                 </a:solidFill>
@@ -9020,11 +9020,11 @@
           <a:p>
             <a:pPr>
               <a:spcAft>
-                <a:spcPts val="300"/>
-              </a:spcAft>
-            </a:pPr>
-            <a:r>
-              <a:rPr sz="1200">
+                <a:spcPts val="500"/>
+              </a:spcAft>
+            </a:pPr>
+            <a:r>
+              <a:rPr sz="1400">
                 <a:solidFill>
                   <a:srgbClr val="333333"/>
                 </a:solidFill>
@@ -9127,8 +9127,8 @@
         </p:nvSpPr>
         <p:spPr>
           <a:xfrm>
-            <a:off x="365760" y="182880"/>
-            <a:ext cx="11430000" cy="640080"/>
+            <a:off x="365760" y="365760"/>
+            <a:ext cx="11430000" cy="594360"/>
           </a:xfrm>
           <a:prstGeom prst="rect">
             <a:avLst/>
@@ -9142,7 +9142,7 @@
           <a:lstStyle/>
           <a:p>
             <a:r>
-              <a:rPr sz="2000" b="1">
+              <a:rPr sz="2100" b="1">
                 <a:solidFill>
                   <a:srgbClr val="1F3B6E"/>
                 </a:solidFill>
@@ -9160,8 +9160,8 @@
         </p:nvSpPr>
         <p:spPr>
           <a:xfrm>
-            <a:off x="365760" y="960120"/>
-            <a:ext cx="5852160" cy="5669280"/>
+            <a:off x="365760" y="1051560"/>
+            <a:ext cx="5943600" cy="5623560"/>
           </a:xfrm>
           <a:prstGeom prst="rect">
             <a:avLst/>
@@ -9182,7 +9182,7 @@
               </a:spcAft>
             </a:pPr>
             <a:r>
-              <a:rPr sz="1200">
+              <a:rPr sz="1400">
                 <a:solidFill>
                   <a:srgbClr val="202020"/>
                 </a:solidFill>
@@ -9200,8 +9200,8 @@
         </p:nvSpPr>
         <p:spPr>
           <a:xfrm>
-            <a:off x="6400800" y="960120"/>
-            <a:ext cx="5440680" cy="5669280"/>
+            <a:off x="6446520" y="1051560"/>
+            <a:ext cx="5349240" cy="5623560"/>
           </a:xfrm>
           <a:prstGeom prst="rect">
             <a:avLst/>
@@ -9218,11 +9218,11 @@
           <a:p>
             <a:pPr>
               <a:spcAft>
-                <a:spcPts val="300"/>
-              </a:spcAft>
-            </a:pPr>
-            <a:r>
-              <a:rPr sz="1200">
+                <a:spcPts val="500"/>
+              </a:spcAft>
+            </a:pPr>
+            <a:r>
+              <a:rPr sz="1400">
                 <a:solidFill>
                   <a:srgbClr val="333333"/>
                 </a:solidFill>
@@ -9234,11 +9234,11 @@
           <a:p>
             <a:pPr>
               <a:spcAft>
-                <a:spcPts val="300"/>
-              </a:spcAft>
-            </a:pPr>
-            <a:r>
-              <a:rPr sz="1200">
+                <a:spcPts val="500"/>
+              </a:spcAft>
+            </a:pPr>
+            <a:r>
+              <a:rPr sz="1400">
                 <a:solidFill>
                   <a:srgbClr val="333333"/>
                 </a:solidFill>
@@ -9341,8 +9341,8 @@
         </p:nvSpPr>
         <p:spPr>
           <a:xfrm>
-            <a:off x="365760" y="182880"/>
-            <a:ext cx="11430000" cy="640080"/>
+            <a:off x="365760" y="365760"/>
+            <a:ext cx="11430000" cy="594360"/>
           </a:xfrm>
           <a:prstGeom prst="rect">
             <a:avLst/>
@@ -9356,7 +9356,7 @@
           <a:lstStyle/>
           <a:p>
             <a:r>
-              <a:rPr sz="2000" b="1">
+              <a:rPr sz="2100" b="1">
                 <a:solidFill>
                   <a:srgbClr val="1F3B6E"/>
                 </a:solidFill>
@@ -9374,8 +9374,8 @@
         </p:nvSpPr>
         <p:spPr>
           <a:xfrm>
-            <a:off x="365760" y="960120"/>
-            <a:ext cx="5852160" cy="5669280"/>
+            <a:off x="365760" y="1051560"/>
+            <a:ext cx="5943600" cy="5623560"/>
           </a:xfrm>
           <a:prstGeom prst="rect">
             <a:avLst/>
@@ -9396,7 +9396,7 @@
               </a:spcAft>
             </a:pPr>
             <a:r>
-              <a:rPr sz="1200">
+              <a:rPr sz="1400">
                 <a:solidFill>
                   <a:srgbClr val="202020"/>
                 </a:solidFill>
@@ -9411,7 +9411,7 @@
               </a:spcAft>
             </a:pPr>
             <a:r>
-              <a:rPr sz="1200">
+              <a:rPr sz="1400">
                 <a:solidFill>
                   <a:srgbClr val="202020"/>
                 </a:solidFill>
@@ -9426,7 +9426,7 @@
               </a:spcAft>
             </a:pPr>
             <a:r>
-              <a:rPr sz="1200">
+              <a:rPr sz="1400">
                 <a:solidFill>
                   <a:srgbClr val="202020"/>
                 </a:solidFill>
@@ -9441,7 +9441,7 @@
               </a:spcAft>
             </a:pPr>
             <a:r>
-              <a:rPr sz="1200">
+              <a:rPr sz="1400">
                 <a:solidFill>
                   <a:srgbClr val="202020"/>
                 </a:solidFill>
@@ -9456,7 +9456,7 @@
               </a:spcAft>
             </a:pPr>
             <a:r>
-              <a:rPr sz="1200">
+              <a:rPr sz="1400">
                 <a:solidFill>
                   <a:srgbClr val="202020"/>
                 </a:solidFill>
@@ -9474,8 +9474,8 @@
         </p:nvSpPr>
         <p:spPr>
           <a:xfrm>
-            <a:off x="6400800" y="960120"/>
-            <a:ext cx="5440680" cy="5669280"/>
+            <a:off x="6446520" y="1051560"/>
+            <a:ext cx="5349240" cy="5623560"/>
           </a:xfrm>
           <a:prstGeom prst="rect">
             <a:avLst/>
@@ -9492,11 +9492,11 @@
           <a:p>
             <a:pPr>
               <a:spcAft>
-                <a:spcPts val="300"/>
-              </a:spcAft>
-            </a:pPr>
-            <a:r>
-              <a:rPr sz="1200">
+                <a:spcPts val="500"/>
+              </a:spcAft>
+            </a:pPr>
+            <a:r>
+              <a:rPr sz="1400">
                 <a:solidFill>
                   <a:srgbClr val="333333"/>
                 </a:solidFill>
@@ -9508,11 +9508,11 @@
           <a:p>
             <a:pPr>
               <a:spcAft>
-                <a:spcPts val="300"/>
-              </a:spcAft>
-            </a:pPr>
-            <a:r>
-              <a:rPr sz="1200">
+                <a:spcPts val="500"/>
+              </a:spcAft>
+            </a:pPr>
+            <a:r>
+              <a:rPr sz="1400">
                 <a:solidFill>
                   <a:srgbClr val="333333"/>
                 </a:solidFill>
@@ -9524,11 +9524,11 @@
           <a:p>
             <a:pPr>
               <a:spcAft>
-                <a:spcPts val="300"/>
-              </a:spcAft>
-            </a:pPr>
-            <a:r>
-              <a:rPr sz="1200">
+                <a:spcPts val="500"/>
+              </a:spcAft>
+            </a:pPr>
+            <a:r>
+              <a:rPr sz="1400">
                 <a:solidFill>
                   <a:srgbClr val="333333"/>
                 </a:solidFill>
@@ -9540,11 +9540,11 @@
           <a:p>
             <a:pPr>
               <a:spcAft>
-                <a:spcPts val="300"/>
-              </a:spcAft>
-            </a:pPr>
-            <a:r>
-              <a:rPr sz="1200">
+                <a:spcPts val="500"/>
+              </a:spcAft>
+            </a:pPr>
+            <a:r>
+              <a:rPr sz="1400">
                 <a:solidFill>
                   <a:srgbClr val="333333"/>
                 </a:solidFill>
@@ -9556,11 +9556,11 @@
           <a:p>
             <a:pPr>
               <a:spcAft>
-                <a:spcPts val="300"/>
-              </a:spcAft>
-            </a:pPr>
-            <a:r>
-              <a:rPr sz="1200">
+                <a:spcPts val="500"/>
+              </a:spcAft>
+            </a:pPr>
+            <a:r>
+              <a:rPr sz="1400">
                 <a:solidFill>
                   <a:srgbClr val="333333"/>
                 </a:solidFill>
@@ -9572,11 +9572,11 @@
           <a:p>
             <a:pPr>
               <a:spcAft>
-                <a:spcPts val="300"/>
-              </a:spcAft>
-            </a:pPr>
-            <a:r>
-              <a:rPr sz="1200">
+                <a:spcPts val="500"/>
+              </a:spcAft>
+            </a:pPr>
+            <a:r>
+              <a:rPr sz="1400">
                 <a:solidFill>
                   <a:srgbClr val="333333"/>
                 </a:solidFill>
@@ -9679,8 +9679,8 @@
         </p:nvSpPr>
         <p:spPr>
           <a:xfrm>
-            <a:off x="365760" y="182880"/>
-            <a:ext cx="11430000" cy="640080"/>
+            <a:off x="365760" y="365760"/>
+            <a:ext cx="11430000" cy="594360"/>
           </a:xfrm>
           <a:prstGeom prst="rect">
             <a:avLst/>
@@ -9694,7 +9694,7 @@
           <a:lstStyle/>
           <a:p>
             <a:r>
-              <a:rPr sz="2000" b="1">
+              <a:rPr sz="2100" b="1">
                 <a:solidFill>
                   <a:srgbClr val="1F3B6E"/>
                 </a:solidFill>
@@ -9712,8 +9712,8 @@
         </p:nvSpPr>
         <p:spPr>
           <a:xfrm>
-            <a:off x="365760" y="960120"/>
-            <a:ext cx="5852160" cy="5669280"/>
+            <a:off x="365760" y="1051560"/>
+            <a:ext cx="5943600" cy="5623560"/>
           </a:xfrm>
           <a:prstGeom prst="rect">
             <a:avLst/>
@@ -9734,7 +9734,7 @@
               </a:spcAft>
             </a:pPr>
             <a:r>
-              <a:rPr sz="1200">
+              <a:rPr sz="1400">
                 <a:solidFill>
                   <a:srgbClr val="202020"/>
                 </a:solidFill>
@@ -9749,7 +9749,7 @@
               </a:spcAft>
             </a:pPr>
             <a:r>
-              <a:rPr sz="1200">
+              <a:rPr sz="1400">
                 <a:solidFill>
                   <a:srgbClr val="202020"/>
                 </a:solidFill>
@@ -9764,7 +9764,7 @@
               </a:spcAft>
             </a:pPr>
             <a:r>
-              <a:rPr sz="1200">
+              <a:rPr sz="1400">
                 <a:solidFill>
                   <a:srgbClr val="202020"/>
                 </a:solidFill>
@@ -9779,7 +9779,7 @@
               </a:spcAft>
             </a:pPr>
             <a:r>
-              <a:rPr sz="1200">
+              <a:rPr sz="1400">
                 <a:solidFill>
                   <a:srgbClr val="202020"/>
                 </a:solidFill>
@@ -9797,8 +9797,8 @@
         </p:nvSpPr>
         <p:spPr>
           <a:xfrm>
-            <a:off x="6400800" y="960120"/>
-            <a:ext cx="5440680" cy="5669280"/>
+            <a:off x="6446520" y="1051560"/>
+            <a:ext cx="5349240" cy="5623560"/>
           </a:xfrm>
           <a:prstGeom prst="rect">
             <a:avLst/>
@@ -9815,11 +9815,11 @@
           <a:p>
             <a:pPr>
               <a:spcAft>
-                <a:spcPts val="300"/>
-              </a:spcAft>
-            </a:pPr>
-            <a:r>
-              <a:rPr sz="1200">
+                <a:spcPts val="500"/>
+              </a:spcAft>
+            </a:pPr>
+            <a:r>
+              <a:rPr sz="1400">
                 <a:solidFill>
                   <a:srgbClr val="333333"/>
                 </a:solidFill>
@@ -9831,11 +9831,11 @@
           <a:p>
             <a:pPr>
               <a:spcAft>
-                <a:spcPts val="300"/>
-              </a:spcAft>
-            </a:pPr>
-            <a:r>
-              <a:rPr sz="1200">
+                <a:spcPts val="500"/>
+              </a:spcAft>
+            </a:pPr>
+            <a:r>
+              <a:rPr sz="1400">
                 <a:solidFill>
                   <a:srgbClr val="333333"/>
                 </a:solidFill>
@@ -9847,11 +9847,11 @@
           <a:p>
             <a:pPr>
               <a:spcAft>
-                <a:spcPts val="300"/>
-              </a:spcAft>
-            </a:pPr>
-            <a:r>
-              <a:rPr sz="1200">
+                <a:spcPts val="500"/>
+              </a:spcAft>
+            </a:pPr>
+            <a:r>
+              <a:rPr sz="1400">
                 <a:solidFill>
                   <a:srgbClr val="333333"/>
                 </a:solidFill>
@@ -9863,11 +9863,11 @@
           <a:p>
             <a:pPr>
               <a:spcAft>
-                <a:spcPts val="300"/>
-              </a:spcAft>
-            </a:pPr>
-            <a:r>
-              <a:rPr sz="1200">
+                <a:spcPts val="500"/>
+              </a:spcAft>
+            </a:pPr>
+            <a:r>
+              <a:rPr sz="1400">
                 <a:solidFill>
                   <a:srgbClr val="333333"/>
                 </a:solidFill>
@@ -9879,11 +9879,11 @@
           <a:p>
             <a:pPr>
               <a:spcAft>
-                <a:spcPts val="300"/>
-              </a:spcAft>
-            </a:pPr>
-            <a:r>
-              <a:rPr sz="1200">
+                <a:spcPts val="500"/>
+              </a:spcAft>
+            </a:pPr>
+            <a:r>
+              <a:rPr sz="1400">
                 <a:solidFill>
                   <a:srgbClr val="333333"/>
                 </a:solidFill>
@@ -9986,8 +9986,8 @@
         </p:nvSpPr>
         <p:spPr>
           <a:xfrm>
-            <a:off x="365760" y="182880"/>
-            <a:ext cx="11430000" cy="640080"/>
+            <a:off x="365760" y="365760"/>
+            <a:ext cx="11430000" cy="594360"/>
           </a:xfrm>
           <a:prstGeom prst="rect">
             <a:avLst/>
@@ -10001,7 +10001,7 @@
           <a:lstStyle/>
           <a:p>
             <a:r>
-              <a:rPr sz="2000" b="1">
+              <a:rPr sz="2100" b="1">
                 <a:solidFill>
                   <a:srgbClr val="1F3B6E"/>
                 </a:solidFill>
@@ -10019,8 +10019,8 @@
         </p:nvSpPr>
         <p:spPr>
           <a:xfrm>
-            <a:off x="365760" y="960120"/>
-            <a:ext cx="5852160" cy="5669280"/>
+            <a:off x="365760" y="1051560"/>
+            <a:ext cx="5943600" cy="5623560"/>
           </a:xfrm>
           <a:prstGeom prst="rect">
             <a:avLst/>
@@ -10041,7 +10041,7 @@
               </a:spcAft>
             </a:pPr>
             <a:r>
-              <a:rPr sz="1200">
+              <a:rPr sz="1400">
                 <a:solidFill>
                   <a:srgbClr val="202020"/>
                 </a:solidFill>
@@ -10056,7 +10056,7 @@
               </a:spcAft>
             </a:pPr>
             <a:r>
-              <a:rPr sz="1200">
+              <a:rPr sz="1400">
                 <a:solidFill>
                   <a:srgbClr val="202020"/>
                 </a:solidFill>
@@ -10071,7 +10071,7 @@
               </a:spcAft>
             </a:pPr>
             <a:r>
-              <a:rPr sz="1200">
+              <a:rPr sz="1400">
                 <a:solidFill>
                   <a:srgbClr val="202020"/>
                 </a:solidFill>
@@ -10086,7 +10086,7 @@
               </a:spcAft>
             </a:pPr>
             <a:r>
-              <a:rPr sz="1200">
+              <a:rPr sz="1400">
                 <a:solidFill>
                   <a:srgbClr val="202020"/>
                 </a:solidFill>
@@ -10101,7 +10101,7 @@
               </a:spcAft>
             </a:pPr>
             <a:r>
-              <a:rPr sz="1200">
+              <a:rPr sz="1400">
                 <a:solidFill>
                   <a:srgbClr val="202020"/>
                 </a:solidFill>
@@ -10119,8 +10119,8 @@
         </p:nvSpPr>
         <p:spPr>
           <a:xfrm>
-            <a:off x="6400800" y="960120"/>
-            <a:ext cx="5440680" cy="5669280"/>
+            <a:off x="6446520" y="1051560"/>
+            <a:ext cx="5349240" cy="5623560"/>
           </a:xfrm>
           <a:prstGeom prst="rect">
             <a:avLst/>
@@ -10137,11 +10137,11 @@
           <a:p>
             <a:pPr>
               <a:spcAft>
-                <a:spcPts val="300"/>
-              </a:spcAft>
-            </a:pPr>
-            <a:r>
-              <a:rPr sz="1200">
+                <a:spcPts val="500"/>
+              </a:spcAft>
+            </a:pPr>
+            <a:r>
+              <a:rPr sz="1400">
                 <a:solidFill>
                   <a:srgbClr val="333333"/>
                 </a:solidFill>
@@ -10153,11 +10153,11 @@
           <a:p>
             <a:pPr>
               <a:spcAft>
-                <a:spcPts val="300"/>
-              </a:spcAft>
-            </a:pPr>
-            <a:r>
-              <a:rPr sz="1200">
+                <a:spcPts val="500"/>
+              </a:spcAft>
+            </a:pPr>
+            <a:r>
+              <a:rPr sz="1400">
                 <a:solidFill>
                   <a:srgbClr val="333333"/>
                 </a:solidFill>
@@ -10169,11 +10169,11 @@
           <a:p>
             <a:pPr>
               <a:spcAft>
-                <a:spcPts val="300"/>
-              </a:spcAft>
-            </a:pPr>
-            <a:r>
-              <a:rPr sz="1200">
+                <a:spcPts val="500"/>
+              </a:spcAft>
+            </a:pPr>
+            <a:r>
+              <a:rPr sz="1400">
                 <a:solidFill>
                   <a:srgbClr val="333333"/>
                 </a:solidFill>
@@ -10185,11 +10185,11 @@
           <a:p>
             <a:pPr>
               <a:spcAft>
-                <a:spcPts val="300"/>
-              </a:spcAft>
-            </a:pPr>
-            <a:r>
-              <a:rPr sz="1200">
+                <a:spcPts val="500"/>
+              </a:spcAft>
+            </a:pPr>
+            <a:r>
+              <a:rPr sz="1400">
                 <a:solidFill>
                   <a:srgbClr val="333333"/>
                 </a:solidFill>
@@ -10201,11 +10201,11 @@
           <a:p>
             <a:pPr>
               <a:spcAft>
-                <a:spcPts val="300"/>
-              </a:spcAft>
-            </a:pPr>
-            <a:r>
-              <a:rPr sz="1200">
+                <a:spcPts val="500"/>
+              </a:spcAft>
+            </a:pPr>
+            <a:r>
+              <a:rPr sz="1400">
                 <a:solidFill>
                   <a:srgbClr val="333333"/>
                 </a:solidFill>
@@ -10308,8 +10308,8 @@
         </p:nvSpPr>
         <p:spPr>
           <a:xfrm>
-            <a:off x="365760" y="182880"/>
-            <a:ext cx="11430000" cy="640080"/>
+            <a:off x="365760" y="365760"/>
+            <a:ext cx="11430000" cy="594360"/>
           </a:xfrm>
           <a:prstGeom prst="rect">
             <a:avLst/>
@@ -10323,7 +10323,7 @@
           <a:lstStyle/>
           <a:p>
             <a:r>
-              <a:rPr sz="2000" b="1">
+              <a:rPr sz="2100" b="1">
                 <a:solidFill>
                   <a:srgbClr val="1F3B6E"/>
                 </a:solidFill>
@@ -10341,8 +10341,8 @@
         </p:nvSpPr>
         <p:spPr>
           <a:xfrm>
-            <a:off x="365760" y="960120"/>
-            <a:ext cx="5852160" cy="5669280"/>
+            <a:off x="365760" y="1051560"/>
+            <a:ext cx="5943600" cy="5623560"/>
           </a:xfrm>
           <a:prstGeom prst="rect">
             <a:avLst/>
@@ -10363,7 +10363,7 @@
               </a:spcAft>
             </a:pPr>
             <a:r>
-              <a:rPr sz="1200">
+              <a:rPr sz="1400">
                 <a:solidFill>
                   <a:srgbClr val="202020"/>
                 </a:solidFill>
@@ -10378,7 +10378,7 @@
               </a:spcAft>
             </a:pPr>
             <a:r>
-              <a:rPr sz="1200">
+              <a:rPr sz="1400">
                 <a:solidFill>
                   <a:srgbClr val="202020"/>
                 </a:solidFill>
@@ -10393,7 +10393,7 @@
               </a:spcAft>
             </a:pPr>
             <a:r>
-              <a:rPr sz="1200">
+              <a:rPr sz="1400">
                 <a:solidFill>
                   <a:srgbClr val="202020"/>
                 </a:solidFill>
@@ -10408,7 +10408,7 @@
               </a:spcAft>
             </a:pPr>
             <a:r>
-              <a:rPr sz="1200">
+              <a:rPr sz="1400">
                 <a:solidFill>
                   <a:srgbClr val="202020"/>
                 </a:solidFill>
@@ -10426,8 +10426,8 @@
         </p:nvSpPr>
         <p:spPr>
           <a:xfrm>
-            <a:off x="6400800" y="960120"/>
-            <a:ext cx="5440680" cy="5669280"/>
+            <a:off x="6446520" y="1051560"/>
+            <a:ext cx="5349240" cy="5623560"/>
           </a:xfrm>
           <a:prstGeom prst="rect">
             <a:avLst/>
@@ -10444,11 +10444,11 @@
           <a:p>
             <a:pPr>
               <a:spcAft>
-                <a:spcPts val="300"/>
-              </a:spcAft>
-            </a:pPr>
-            <a:r>
-              <a:rPr sz="1200">
+                <a:spcPts val="500"/>
+              </a:spcAft>
+            </a:pPr>
+            <a:r>
+              <a:rPr sz="1400">
                 <a:solidFill>
                   <a:srgbClr val="333333"/>
                 </a:solidFill>
@@ -10460,11 +10460,11 @@
           <a:p>
             <a:pPr>
               <a:spcAft>
-                <a:spcPts val="300"/>
-              </a:spcAft>
-            </a:pPr>
-            <a:r>
-              <a:rPr sz="1200">
+                <a:spcPts val="500"/>
+              </a:spcAft>
+            </a:pPr>
+            <a:r>
+              <a:rPr sz="1400">
                 <a:solidFill>
                   <a:srgbClr val="333333"/>
                 </a:solidFill>
@@ -10476,11 +10476,11 @@
           <a:p>
             <a:pPr>
               <a:spcAft>
-                <a:spcPts val="300"/>
-              </a:spcAft>
-            </a:pPr>
-            <a:r>
-              <a:rPr sz="1200">
+                <a:spcPts val="500"/>
+              </a:spcAft>
+            </a:pPr>
+            <a:r>
+              <a:rPr sz="1400">
                 <a:solidFill>
                   <a:srgbClr val="333333"/>
                 </a:solidFill>
@@ -10492,11 +10492,11 @@
           <a:p>
             <a:pPr>
               <a:spcAft>
-                <a:spcPts val="300"/>
-              </a:spcAft>
-            </a:pPr>
-            <a:r>
-              <a:rPr sz="1200">
+                <a:spcPts val="500"/>
+              </a:spcAft>
+            </a:pPr>
+            <a:r>
+              <a:rPr sz="1400">
                 <a:solidFill>
                   <a:srgbClr val="333333"/>
                 </a:solidFill>
@@ -10508,11 +10508,11 @@
           <a:p>
             <a:pPr>
               <a:spcAft>
-                <a:spcPts val="300"/>
-              </a:spcAft>
-            </a:pPr>
-            <a:r>
-              <a:rPr sz="1200">
+                <a:spcPts val="500"/>
+              </a:spcAft>
+            </a:pPr>
+            <a:r>
+              <a:rPr sz="1400">
                 <a:solidFill>
                   <a:srgbClr val="333333"/>
                 </a:solidFill>
@@ -10615,8 +10615,8 @@
         </p:nvSpPr>
         <p:spPr>
           <a:xfrm>
-            <a:off x="365760" y="182880"/>
-            <a:ext cx="11430000" cy="640080"/>
+            <a:off x="365760" y="365760"/>
+            <a:ext cx="11430000" cy="594360"/>
           </a:xfrm>
           <a:prstGeom prst="rect">
             <a:avLst/>
@@ -10630,7 +10630,7 @@
           <a:lstStyle/>
           <a:p>
             <a:r>
-              <a:rPr sz="2000" b="1">
+              <a:rPr sz="2100" b="1">
                 <a:solidFill>
                   <a:srgbClr val="1F3B6E"/>
                 </a:solidFill>
@@ -10648,8 +10648,8 @@
         </p:nvSpPr>
         <p:spPr>
           <a:xfrm>
-            <a:off x="365760" y="960120"/>
-            <a:ext cx="5852160" cy="5669280"/>
+            <a:off x="365760" y="1051560"/>
+            <a:ext cx="5943600" cy="5623560"/>
           </a:xfrm>
           <a:prstGeom prst="rect">
             <a:avLst/>
@@ -10670,7 +10670,7 @@
               </a:spcAft>
             </a:pPr>
             <a:r>
-              <a:rPr sz="1200">
+              <a:rPr sz="1400">
                 <a:solidFill>
                   <a:srgbClr val="202020"/>
                 </a:solidFill>
@@ -10685,7 +10685,7 @@
               </a:spcAft>
             </a:pPr>
             <a:r>
-              <a:rPr sz="1200">
+              <a:rPr sz="1400">
                 <a:solidFill>
                   <a:srgbClr val="202020"/>
                 </a:solidFill>
@@ -10700,7 +10700,7 @@
               </a:spcAft>
             </a:pPr>
             <a:r>
-              <a:rPr sz="1200">
+              <a:rPr sz="1400">
                 <a:solidFill>
                   <a:srgbClr val="202020"/>
                 </a:solidFill>
@@ -10715,7 +10715,7 @@
               </a:spcAft>
             </a:pPr>
             <a:r>
-              <a:rPr sz="1200">
+              <a:rPr sz="1400">
                 <a:solidFill>
                   <a:srgbClr val="202020"/>
                 </a:solidFill>
@@ -10733,8 +10733,8 @@
         </p:nvSpPr>
         <p:spPr>
           <a:xfrm>
-            <a:off x="6400800" y="960120"/>
-            <a:ext cx="5440680" cy="5669280"/>
+            <a:off x="6446520" y="1051560"/>
+            <a:ext cx="5349240" cy="5623560"/>
           </a:xfrm>
           <a:prstGeom prst="rect">
             <a:avLst/>
@@ -10751,11 +10751,11 @@
           <a:p>
             <a:pPr>
               <a:spcAft>
-                <a:spcPts val="300"/>
-              </a:spcAft>
-            </a:pPr>
-            <a:r>
-              <a:rPr sz="1200">
+                <a:spcPts val="500"/>
+              </a:spcAft>
+            </a:pPr>
+            <a:r>
+              <a:rPr sz="1400">
                 <a:solidFill>
                   <a:srgbClr val="333333"/>
                 </a:solidFill>
@@ -10767,11 +10767,11 @@
           <a:p>
             <a:pPr>
               <a:spcAft>
-                <a:spcPts val="300"/>
-              </a:spcAft>
-            </a:pPr>
-            <a:r>
-              <a:rPr sz="1200">
+                <a:spcPts val="500"/>
+              </a:spcAft>
+            </a:pPr>
+            <a:r>
+              <a:rPr sz="1400">
                 <a:solidFill>
                   <a:srgbClr val="333333"/>
                 </a:solidFill>
@@ -10783,11 +10783,11 @@
           <a:p>
             <a:pPr>
               <a:spcAft>
-                <a:spcPts val="300"/>
-              </a:spcAft>
-            </a:pPr>
-            <a:r>
-              <a:rPr sz="1200">
+                <a:spcPts val="500"/>
+              </a:spcAft>
+            </a:pPr>
+            <a:r>
+              <a:rPr sz="1400">
                 <a:solidFill>
                   <a:srgbClr val="333333"/>
                 </a:solidFill>
@@ -10799,11 +10799,11 @@
           <a:p>
             <a:pPr>
               <a:spcAft>
-                <a:spcPts val="300"/>
-              </a:spcAft>
-            </a:pPr>
-            <a:r>
-              <a:rPr sz="1200">
+                <a:spcPts val="500"/>
+              </a:spcAft>
+            </a:pPr>
+            <a:r>
+              <a:rPr sz="1400">
                 <a:solidFill>
                   <a:srgbClr val="333333"/>
                 </a:solidFill>
@@ -10906,8 +10906,8 @@
         </p:nvSpPr>
         <p:spPr>
           <a:xfrm>
-            <a:off x="365760" y="182880"/>
-            <a:ext cx="11430000" cy="640080"/>
+            <a:off x="365760" y="365760"/>
+            <a:ext cx="11430000" cy="594360"/>
           </a:xfrm>
           <a:prstGeom prst="rect">
             <a:avLst/>
@@ -10921,7 +10921,7 @@
           <a:lstStyle/>
           <a:p>
             <a:r>
-              <a:rPr sz="2000" b="1">
+              <a:rPr sz="2100" b="1">
                 <a:solidFill>
                   <a:srgbClr val="1F3B6E"/>
                 </a:solidFill>
@@ -10939,8 +10939,8 @@
         </p:nvSpPr>
         <p:spPr>
           <a:xfrm>
-            <a:off x="365760" y="960120"/>
-            <a:ext cx="5852160" cy="5669280"/>
+            <a:off x="365760" y="1051560"/>
+            <a:ext cx="5943600" cy="5623560"/>
           </a:xfrm>
           <a:prstGeom prst="rect">
             <a:avLst/>
@@ -10961,7 +10961,7 @@
               </a:spcAft>
             </a:pPr>
             <a:r>
-              <a:rPr sz="1200">
+              <a:rPr sz="1400">
                 <a:solidFill>
                   <a:srgbClr val="202020"/>
                 </a:solidFill>
@@ -10983,7 +10983,7 @@
               </a:spcAft>
             </a:pPr>
             <a:r>
-              <a:rPr sz="1200">
+              <a:rPr sz="1400">
                 <a:solidFill>
                   <a:srgbClr val="202020"/>
                 </a:solidFill>
@@ -10998,7 +10998,7 @@
               </a:spcAft>
             </a:pPr>
             <a:r>
-              <a:rPr sz="1200">
+              <a:rPr sz="1400">
                 <a:solidFill>
                   <a:srgbClr val="202020"/>
                 </a:solidFill>
@@ -11016,8 +11016,8 @@
         </p:nvSpPr>
         <p:spPr>
           <a:xfrm>
-            <a:off x="6400800" y="960120"/>
-            <a:ext cx="5440680" cy="5669280"/>
+            <a:off x="6446520" y="1051560"/>
+            <a:ext cx="5349240" cy="5623560"/>
           </a:xfrm>
           <a:prstGeom prst="rect">
             <a:avLst/>
@@ -11034,11 +11034,11 @@
           <a:p>
             <a:pPr>
               <a:spcAft>
-                <a:spcPts val="300"/>
-              </a:spcAft>
-            </a:pPr>
-            <a:r>
-              <a:rPr sz="1200">
+                <a:spcPts val="500"/>
+              </a:spcAft>
+            </a:pPr>
+            <a:r>
+              <a:rPr sz="1400">
                 <a:solidFill>
                   <a:srgbClr val="333333"/>
                 </a:solidFill>
@@ -11050,11 +11050,11 @@
           <a:p>
             <a:pPr>
               <a:spcAft>
-                <a:spcPts val="300"/>
-              </a:spcAft>
-            </a:pPr>
-            <a:r>
-              <a:rPr sz="1200">
+                <a:spcPts val="500"/>
+              </a:spcAft>
+            </a:pPr>
+            <a:r>
+              <a:rPr sz="1400">
                 <a:solidFill>
                   <a:srgbClr val="333333"/>
                 </a:solidFill>
@@ -11066,11 +11066,11 @@
           <a:p>
             <a:pPr>
               <a:spcAft>
-                <a:spcPts val="300"/>
-              </a:spcAft>
-            </a:pPr>
-            <a:r>
-              <a:rPr sz="1200">
+                <a:spcPts val="500"/>
+              </a:spcAft>
+            </a:pPr>
+            <a:r>
+              <a:rPr sz="1400">
                 <a:solidFill>
                   <a:srgbClr val="333333"/>
                 </a:solidFill>
@@ -11173,8 +11173,8 @@
         </p:nvSpPr>
         <p:spPr>
           <a:xfrm>
-            <a:off x="365760" y="182880"/>
-            <a:ext cx="11430000" cy="640080"/>
+            <a:off x="365760" y="365760"/>
+            <a:ext cx="11430000" cy="594360"/>
           </a:xfrm>
           <a:prstGeom prst="rect">
             <a:avLst/>
@@ -11188,7 +11188,7 @@
           <a:lstStyle/>
           <a:p>
             <a:r>
-              <a:rPr sz="2000" b="1">
+              <a:rPr sz="2100" b="1">
                 <a:solidFill>
                   <a:srgbClr val="1F3B6E"/>
                 </a:solidFill>
@@ -11206,8 +11206,8 @@
         </p:nvSpPr>
         <p:spPr>
           <a:xfrm>
-            <a:off x="365760" y="960120"/>
-            <a:ext cx="5852160" cy="5669280"/>
+            <a:off x="365760" y="1051560"/>
+            <a:ext cx="5943600" cy="5623560"/>
           </a:xfrm>
           <a:prstGeom prst="rect">
             <a:avLst/>
@@ -11228,7 +11228,7 @@
               </a:spcAft>
             </a:pPr>
             <a:r>
-              <a:rPr sz="1200">
+              <a:rPr sz="1400">
                 <a:solidFill>
                   <a:srgbClr val="202020"/>
                 </a:solidFill>
@@ -11246,8 +11246,8 @@
         </p:nvSpPr>
         <p:spPr>
           <a:xfrm>
-            <a:off x="6400800" y="960120"/>
-            <a:ext cx="5440680" cy="5669280"/>
+            <a:off x="6446520" y="1051560"/>
+            <a:ext cx="5349240" cy="5623560"/>
           </a:xfrm>
           <a:prstGeom prst="rect">
             <a:avLst/>
@@ -11264,11 +11264,11 @@
           <a:p>
             <a:pPr>
               <a:spcAft>
-                <a:spcPts val="300"/>
-              </a:spcAft>
-            </a:pPr>
-            <a:r>
-              <a:rPr sz="1200">
+                <a:spcPts val="500"/>
+              </a:spcAft>
+            </a:pPr>
+            <a:r>
+              <a:rPr sz="1400">
                 <a:solidFill>
                   <a:srgbClr val="333333"/>
                 </a:solidFill>
@@ -11280,11 +11280,11 @@
           <a:p>
             <a:pPr>
               <a:spcAft>
-                <a:spcPts val="300"/>
-              </a:spcAft>
-            </a:pPr>
-            <a:r>
-              <a:rPr sz="1200">
+                <a:spcPts val="500"/>
+              </a:spcAft>
+            </a:pPr>
+            <a:r>
+              <a:rPr sz="1400">
                 <a:solidFill>
                   <a:srgbClr val="333333"/>
                 </a:solidFill>
@@ -11387,8 +11387,8 @@
         </p:nvSpPr>
         <p:spPr>
           <a:xfrm>
-            <a:off x="365760" y="182880"/>
-            <a:ext cx="11430000" cy="640080"/>
+            <a:off x="365760" y="365760"/>
+            <a:ext cx="11430000" cy="594360"/>
           </a:xfrm>
           <a:prstGeom prst="rect">
             <a:avLst/>
@@ -11402,7 +11402,7 @@
           <a:lstStyle/>
           <a:p>
             <a:r>
-              <a:rPr sz="2000" b="1">
+              <a:rPr sz="2100" b="1">
                 <a:solidFill>
                   <a:srgbClr val="1F3B6E"/>
                 </a:solidFill>
@@ -11420,8 +11420,8 @@
         </p:nvSpPr>
         <p:spPr>
           <a:xfrm>
-            <a:off x="365760" y="960120"/>
-            <a:ext cx="5852160" cy="5669280"/>
+            <a:off x="365760" y="1051560"/>
+            <a:ext cx="5943600" cy="5623560"/>
           </a:xfrm>
           <a:prstGeom prst="rect">
             <a:avLst/>
@@ -11442,7 +11442,7 @@
               </a:spcAft>
             </a:pPr>
             <a:r>
-              <a:rPr sz="1200">
+              <a:rPr sz="1400">
                 <a:solidFill>
                   <a:srgbClr val="202020"/>
                 </a:solidFill>
@@ -11457,7 +11457,7 @@
               </a:spcAft>
             </a:pPr>
             <a:r>
-              <a:rPr sz="1200">
+              <a:rPr sz="1400">
                 <a:solidFill>
                   <a:srgbClr val="202020"/>
                 </a:solidFill>
@@ -11472,7 +11472,7 @@
               </a:spcAft>
             </a:pPr>
             <a:r>
-              <a:rPr sz="1200">
+              <a:rPr sz="1400">
                 <a:solidFill>
                   <a:srgbClr val="202020"/>
                 </a:solidFill>
@@ -11487,7 +11487,7 @@
               </a:spcAft>
             </a:pPr>
             <a:r>
-              <a:rPr sz="1200">
+              <a:rPr sz="1400">
                 <a:solidFill>
                   <a:srgbClr val="202020"/>
                 </a:solidFill>
@@ -11502,7 +11502,7 @@
               </a:spcAft>
             </a:pPr>
             <a:r>
-              <a:rPr sz="1200">
+              <a:rPr sz="1400">
                 <a:solidFill>
                   <a:srgbClr val="202020"/>
                 </a:solidFill>
@@ -11517,7 +11517,7 @@
               </a:spcAft>
             </a:pPr>
             <a:r>
-              <a:rPr sz="1200">
+              <a:rPr sz="1400">
                 <a:solidFill>
                   <a:srgbClr val="202020"/>
                 </a:solidFill>
@@ -11539,7 +11539,7 @@
               </a:spcAft>
             </a:pPr>
             <a:r>
-              <a:rPr sz="1200">
+              <a:rPr sz="1400">
                 <a:solidFill>
                   <a:srgbClr val="202020"/>
                 </a:solidFill>
@@ -11557,8 +11557,8 @@
         </p:nvSpPr>
         <p:spPr>
           <a:xfrm>
-            <a:off x="6400800" y="960120"/>
-            <a:ext cx="5440680" cy="5669280"/>
+            <a:off x="6446520" y="1051560"/>
+            <a:ext cx="5349240" cy="5623560"/>
           </a:xfrm>
           <a:prstGeom prst="rect">
             <a:avLst/>
@@ -11575,11 +11575,11 @@
           <a:p>
             <a:pPr>
               <a:spcAft>
-                <a:spcPts val="300"/>
-              </a:spcAft>
-            </a:pPr>
-            <a:r>
-              <a:rPr sz="1200">
+                <a:spcPts val="500"/>
+              </a:spcAft>
+            </a:pPr>
+            <a:r>
+              <a:rPr sz="1400">
                 <a:solidFill>
                   <a:srgbClr val="333333"/>
                 </a:solidFill>
@@ -11591,11 +11591,11 @@
           <a:p>
             <a:pPr>
               <a:spcAft>
-                <a:spcPts val="300"/>
-              </a:spcAft>
-            </a:pPr>
-            <a:r>
-              <a:rPr sz="1200">
+                <a:spcPts val="500"/>
+              </a:spcAft>
+            </a:pPr>
+            <a:r>
+              <a:rPr sz="1400">
                 <a:solidFill>
                   <a:srgbClr val="333333"/>
                 </a:solidFill>
@@ -11607,11 +11607,11 @@
           <a:p>
             <a:pPr>
               <a:spcAft>
-                <a:spcPts val="300"/>
-              </a:spcAft>
-            </a:pPr>
-            <a:r>
-              <a:rPr sz="1200">
+                <a:spcPts val="500"/>
+              </a:spcAft>
+            </a:pPr>
+            <a:r>
+              <a:rPr sz="1400">
                 <a:solidFill>
                   <a:srgbClr val="333333"/>
                 </a:solidFill>
@@ -11623,11 +11623,11 @@
           <a:p>
             <a:pPr>
               <a:spcAft>
-                <a:spcPts val="300"/>
-              </a:spcAft>
-            </a:pPr>
-            <a:r>
-              <a:rPr sz="1200">
+                <a:spcPts val="500"/>
+              </a:spcAft>
+            </a:pPr>
+            <a:r>
+              <a:rPr sz="1400">
                 <a:solidFill>
                   <a:srgbClr val="333333"/>
                 </a:solidFill>
@@ -11639,11 +11639,11 @@
           <a:p>
             <a:pPr>
               <a:spcAft>
-                <a:spcPts val="300"/>
-              </a:spcAft>
-            </a:pPr>
-            <a:r>
-              <a:rPr sz="1200">
+                <a:spcPts val="500"/>
+              </a:spcAft>
+            </a:pPr>
+            <a:r>
+              <a:rPr sz="1400">
                 <a:solidFill>
                   <a:srgbClr val="333333"/>
                 </a:solidFill>
@@ -11655,11 +11655,11 @@
           <a:p>
             <a:pPr>
               <a:spcAft>
-                <a:spcPts val="300"/>
-              </a:spcAft>
-            </a:pPr>
-            <a:r>
-              <a:rPr sz="1200">
+                <a:spcPts val="500"/>
+              </a:spcAft>
+            </a:pPr>
+            <a:r>
+              <a:rPr sz="1400">
                 <a:solidFill>
                   <a:srgbClr val="333333"/>
                 </a:solidFill>
@@ -11762,8 +11762,8 @@
         </p:nvSpPr>
         <p:spPr>
           <a:xfrm>
-            <a:off x="365760" y="182880"/>
-            <a:ext cx="11430000" cy="640080"/>
+            <a:off x="365760" y="365760"/>
+            <a:ext cx="11430000" cy="594360"/>
           </a:xfrm>
           <a:prstGeom prst="rect">
             <a:avLst/>
@@ -11777,7 +11777,7 @@
           <a:lstStyle/>
           <a:p>
             <a:r>
-              <a:rPr sz="2000" b="1">
+              <a:rPr sz="2100" b="1">
                 <a:solidFill>
                   <a:srgbClr val="1F3B6E"/>
                 </a:solidFill>
@@ -11795,8 +11795,8 @@
         </p:nvSpPr>
         <p:spPr>
           <a:xfrm>
-            <a:off x="365760" y="960120"/>
-            <a:ext cx="5852160" cy="5669280"/>
+            <a:off x="365760" y="1051560"/>
+            <a:ext cx="5943600" cy="5623560"/>
           </a:xfrm>
           <a:prstGeom prst="rect">
             <a:avLst/>
@@ -11817,7 +11817,7 @@
               </a:spcAft>
             </a:pPr>
             <a:r>
-              <a:rPr sz="1200">
+              <a:rPr sz="1400">
                 <a:solidFill>
                   <a:srgbClr val="202020"/>
                 </a:solidFill>
@@ -11832,7 +11832,7 @@
               </a:spcAft>
             </a:pPr>
             <a:r>
-              <a:rPr sz="1200">
+              <a:rPr sz="1400">
                 <a:solidFill>
                   <a:srgbClr val="202020"/>
                 </a:solidFill>
@@ -11847,7 +11847,7 @@
               </a:spcAft>
             </a:pPr>
             <a:r>
-              <a:rPr sz="1200">
+              <a:rPr sz="1400">
                 <a:solidFill>
                   <a:srgbClr val="202020"/>
                 </a:solidFill>
@@ -11862,7 +11862,7 @@
               </a:spcAft>
             </a:pPr>
             <a:r>
-              <a:rPr sz="1200">
+              <a:rPr sz="1400">
                 <a:solidFill>
                   <a:srgbClr val="202020"/>
                 </a:solidFill>
@@ -11877,7 +11877,7 @@
               </a:spcAft>
             </a:pPr>
             <a:r>
-              <a:rPr sz="1200">
+              <a:rPr sz="1400">
                 <a:solidFill>
                   <a:srgbClr val="202020"/>
                 </a:solidFill>
@@ -11892,7 +11892,7 @@
               </a:spcAft>
             </a:pPr>
             <a:r>
-              <a:rPr sz="1200">
+              <a:rPr sz="1400">
                 <a:solidFill>
                   <a:srgbClr val="202020"/>
                 </a:solidFill>
@@ -11907,7 +11907,7 @@
               </a:spcAft>
             </a:pPr>
             <a:r>
-              <a:rPr sz="1200">
+              <a:rPr sz="1400">
                 <a:solidFill>
                   <a:srgbClr val="202020"/>
                 </a:solidFill>
@@ -11922,7 +11922,7 @@
               </a:spcAft>
             </a:pPr>
             <a:r>
-              <a:rPr sz="1200">
+              <a:rPr sz="1400">
                 <a:solidFill>
                   <a:srgbClr val="202020"/>
                 </a:solidFill>
@@ -11940,8 +11940,8 @@
         </p:nvSpPr>
         <p:spPr>
           <a:xfrm>
-            <a:off x="6400800" y="960120"/>
-            <a:ext cx="5440680" cy="5669280"/>
+            <a:off x="6446520" y="1051560"/>
+            <a:ext cx="5349240" cy="5623560"/>
           </a:xfrm>
           <a:prstGeom prst="rect">
             <a:avLst/>
@@ -11958,11 +11958,11 @@
           <a:p>
             <a:pPr>
               <a:spcAft>
-                <a:spcPts val="300"/>
-              </a:spcAft>
-            </a:pPr>
-            <a:r>
-              <a:rPr sz="1200">
+                <a:spcPts val="500"/>
+              </a:spcAft>
+            </a:pPr>
+            <a:r>
+              <a:rPr sz="1400">
                 <a:solidFill>
                   <a:srgbClr val="333333"/>
                 </a:solidFill>
@@ -11974,11 +11974,11 @@
           <a:p>
             <a:pPr>
               <a:spcAft>
-                <a:spcPts val="300"/>
-              </a:spcAft>
-            </a:pPr>
-            <a:r>
-              <a:rPr sz="1200">
+                <a:spcPts val="500"/>
+              </a:spcAft>
+            </a:pPr>
+            <a:r>
+              <a:rPr sz="1400">
                 <a:solidFill>
                   <a:srgbClr val="333333"/>
                 </a:solidFill>
@@ -11990,11 +11990,11 @@
           <a:p>
             <a:pPr>
               <a:spcAft>
-                <a:spcPts val="300"/>
-              </a:spcAft>
-            </a:pPr>
-            <a:r>
-              <a:rPr sz="1200">
+                <a:spcPts val="500"/>
+              </a:spcAft>
+            </a:pPr>
+            <a:r>
+              <a:rPr sz="1400">
                 <a:solidFill>
                   <a:srgbClr val="333333"/>
                 </a:solidFill>
@@ -12006,11 +12006,11 @@
           <a:p>
             <a:pPr>
               <a:spcAft>
-                <a:spcPts val="300"/>
-              </a:spcAft>
-            </a:pPr>
-            <a:r>
-              <a:rPr sz="1200">
+                <a:spcPts val="500"/>
+              </a:spcAft>
+            </a:pPr>
+            <a:r>
+              <a:rPr sz="1400">
                 <a:solidFill>
                   <a:srgbClr val="333333"/>
                 </a:solidFill>
@@ -12022,11 +12022,11 @@
           <a:p>
             <a:pPr>
               <a:spcAft>
-                <a:spcPts val="300"/>
-              </a:spcAft>
-            </a:pPr>
-            <a:r>
-              <a:rPr sz="1200">
+                <a:spcPts val="500"/>
+              </a:spcAft>
+            </a:pPr>
+            <a:r>
+              <a:rPr sz="1400">
                 <a:solidFill>
                   <a:srgbClr val="333333"/>
                 </a:solidFill>
@@ -12038,11 +12038,11 @@
           <a:p>
             <a:pPr>
               <a:spcAft>
-                <a:spcPts val="300"/>
-              </a:spcAft>
-            </a:pPr>
-            <a:r>
-              <a:rPr sz="1200">
+                <a:spcPts val="500"/>
+              </a:spcAft>
+            </a:pPr>
+            <a:r>
+              <a:rPr sz="1400">
                 <a:solidFill>
                   <a:srgbClr val="333333"/>
                 </a:solidFill>
@@ -12054,11 +12054,11 @@
           <a:p>
             <a:pPr>
               <a:spcAft>
-                <a:spcPts val="300"/>
-              </a:spcAft>
-            </a:pPr>
-            <a:r>
-              <a:rPr sz="1200">
+                <a:spcPts val="500"/>
+              </a:spcAft>
+            </a:pPr>
+            <a:r>
+              <a:rPr sz="1400">
                 <a:solidFill>
                   <a:srgbClr val="333333"/>
                 </a:solidFill>
@@ -12070,11 +12070,11 @@
           <a:p>
             <a:pPr>
               <a:spcAft>
-                <a:spcPts val="300"/>
-              </a:spcAft>
-            </a:pPr>
-            <a:r>
-              <a:rPr sz="1200">
+                <a:spcPts val="500"/>
+              </a:spcAft>
+            </a:pPr>
+            <a:r>
+              <a:rPr sz="1400">
                 <a:solidFill>
                   <a:srgbClr val="333333"/>
                 </a:solidFill>
@@ -12086,11 +12086,11 @@
           <a:p>
             <a:pPr>
               <a:spcAft>
-                <a:spcPts val="300"/>
-              </a:spcAft>
-            </a:pPr>
-            <a:r>
-              <a:rPr sz="1200">
+                <a:spcPts val="500"/>
+              </a:spcAft>
+            </a:pPr>
+            <a:r>
+              <a:rPr sz="1400">
                 <a:solidFill>
                   <a:srgbClr val="333333"/>
                 </a:solidFill>
@@ -12193,8 +12193,8 @@
         </p:nvSpPr>
         <p:spPr>
           <a:xfrm>
-            <a:off x="365760" y="182880"/>
-            <a:ext cx="11430000" cy="640080"/>
+            <a:off x="365760" y="365760"/>
+            <a:ext cx="11430000" cy="594360"/>
           </a:xfrm>
           <a:prstGeom prst="rect">
             <a:avLst/>
@@ -12208,7 +12208,7 @@
           <a:lstStyle/>
           <a:p>
             <a:r>
-              <a:rPr sz="2000" b="1">
+              <a:rPr sz="2100" b="1">
                 <a:solidFill>
                   <a:srgbClr val="1F3B6E"/>
                 </a:solidFill>
@@ -12226,8 +12226,8 @@
         </p:nvSpPr>
         <p:spPr>
           <a:xfrm>
-            <a:off x="365760" y="960120"/>
-            <a:ext cx="5852160" cy="5669280"/>
+            <a:off x="365760" y="1051560"/>
+            <a:ext cx="5943600" cy="5623560"/>
           </a:xfrm>
           <a:prstGeom prst="rect">
             <a:avLst/>
@@ -12248,7 +12248,7 @@
               </a:spcAft>
             </a:pPr>
             <a:r>
-              <a:rPr sz="1200">
+              <a:rPr sz="1400">
                 <a:solidFill>
                   <a:srgbClr val="202020"/>
                 </a:solidFill>
@@ -12263,7 +12263,7 @@
               </a:spcAft>
             </a:pPr>
             <a:r>
-              <a:rPr sz="1200">
+              <a:rPr sz="1400">
                 <a:solidFill>
                   <a:srgbClr val="202020"/>
                 </a:solidFill>
@@ -12278,7 +12278,7 @@
               </a:spcAft>
             </a:pPr>
             <a:r>
-              <a:rPr sz="1200">
+              <a:rPr sz="1400">
                 <a:solidFill>
                   <a:srgbClr val="202020"/>
                 </a:solidFill>
@@ -12293,7 +12293,7 @@
               </a:spcAft>
             </a:pPr>
             <a:r>
-              <a:rPr sz="1200">
+              <a:rPr sz="1400">
                 <a:solidFill>
                   <a:srgbClr val="202020"/>
                 </a:solidFill>
@@ -12311,8 +12311,8 @@
         </p:nvSpPr>
         <p:spPr>
           <a:xfrm>
-            <a:off x="6400800" y="960120"/>
-            <a:ext cx="5440680" cy="5669280"/>
+            <a:off x="6446520" y="1051560"/>
+            <a:ext cx="5349240" cy="5623560"/>
           </a:xfrm>
           <a:prstGeom prst="rect">
             <a:avLst/>
@@ -12329,11 +12329,11 @@
           <a:p>
             <a:pPr>
               <a:spcAft>
-                <a:spcPts val="300"/>
-              </a:spcAft>
-            </a:pPr>
-            <a:r>
-              <a:rPr sz="1200">
+                <a:spcPts val="500"/>
+              </a:spcAft>
+            </a:pPr>
+            <a:r>
+              <a:rPr sz="1400">
                 <a:solidFill>
                   <a:srgbClr val="333333"/>
                 </a:solidFill>
@@ -12345,11 +12345,11 @@
           <a:p>
             <a:pPr>
               <a:spcAft>
-                <a:spcPts val="300"/>
-              </a:spcAft>
-            </a:pPr>
-            <a:r>
-              <a:rPr sz="1200">
+                <a:spcPts val="500"/>
+              </a:spcAft>
+            </a:pPr>
+            <a:r>
+              <a:rPr sz="1400">
                 <a:solidFill>
                   <a:srgbClr val="333333"/>
                 </a:solidFill>
@@ -12361,11 +12361,11 @@
           <a:p>
             <a:pPr>
               <a:spcAft>
-                <a:spcPts val="300"/>
-              </a:spcAft>
-            </a:pPr>
-            <a:r>
-              <a:rPr sz="1200">
+                <a:spcPts val="500"/>
+              </a:spcAft>
+            </a:pPr>
+            <a:r>
+              <a:rPr sz="1400">
                 <a:solidFill>
                   <a:srgbClr val="333333"/>
                 </a:solidFill>
@@ -12377,11 +12377,11 @@
           <a:p>
             <a:pPr>
               <a:spcAft>
-                <a:spcPts val="300"/>
-              </a:spcAft>
-            </a:pPr>
-            <a:r>
-              <a:rPr sz="1200">
+                <a:spcPts val="500"/>
+              </a:spcAft>
+            </a:pPr>
+            <a:r>
+              <a:rPr sz="1400">
                 <a:solidFill>
                   <a:srgbClr val="333333"/>
                 </a:solidFill>
@@ -12393,11 +12393,11 @@
           <a:p>
             <a:pPr>
               <a:spcAft>
-                <a:spcPts val="300"/>
-              </a:spcAft>
-            </a:pPr>
-            <a:r>
-              <a:rPr sz="1200">
+                <a:spcPts val="500"/>
+              </a:spcAft>
+            </a:pPr>
+            <a:r>
+              <a:rPr sz="1400">
                 <a:solidFill>
                   <a:srgbClr val="333333"/>
                 </a:solidFill>
@@ -12500,8 +12500,8 @@
         </p:nvSpPr>
         <p:spPr>
           <a:xfrm>
-            <a:off x="365760" y="182880"/>
-            <a:ext cx="11430000" cy="640080"/>
+            <a:off x="365760" y="365760"/>
+            <a:ext cx="11430000" cy="594360"/>
           </a:xfrm>
           <a:prstGeom prst="rect">
             <a:avLst/>
@@ -12515,7 +12515,7 @@
           <a:lstStyle/>
           <a:p>
             <a:r>
-              <a:rPr sz="2000" b="1">
+              <a:rPr sz="2100" b="1">
                 <a:solidFill>
                   <a:srgbClr val="1F3B6E"/>
                 </a:solidFill>
@@ -12533,8 +12533,8 @@
         </p:nvSpPr>
         <p:spPr>
           <a:xfrm>
-            <a:off x="365760" y="960120"/>
-            <a:ext cx="5852160" cy="5669280"/>
+            <a:off x="365760" y="1051560"/>
+            <a:ext cx="5943600" cy="5623560"/>
           </a:xfrm>
           <a:prstGeom prst="rect">
             <a:avLst/>
@@ -12555,7 +12555,7 @@
               </a:spcAft>
             </a:pPr>
             <a:r>
-              <a:rPr sz="1200">
+              <a:rPr sz="1400">
                 <a:solidFill>
                   <a:srgbClr val="202020"/>
                 </a:solidFill>
@@ -12570,7 +12570,7 @@
               </a:spcAft>
             </a:pPr>
             <a:r>
-              <a:rPr sz="1200">
+              <a:rPr sz="1400">
                 <a:solidFill>
                   <a:srgbClr val="202020"/>
                 </a:solidFill>
@@ -12585,7 +12585,7 @@
               </a:spcAft>
             </a:pPr>
             <a:r>
-              <a:rPr sz="1200">
+              <a:rPr sz="1400">
                 <a:solidFill>
                   <a:srgbClr val="202020"/>
                 </a:solidFill>
@@ -12600,7 +12600,7 @@
               </a:spcAft>
             </a:pPr>
             <a:r>
-              <a:rPr sz="1200">
+              <a:rPr sz="1400">
                 <a:solidFill>
                   <a:srgbClr val="202020"/>
                 </a:solidFill>
@@ -12615,7 +12615,7 @@
               </a:spcAft>
             </a:pPr>
             <a:r>
-              <a:rPr sz="1200">
+              <a:rPr sz="1400">
                 <a:solidFill>
                   <a:srgbClr val="202020"/>
                 </a:solidFill>
@@ -12630,7 +12630,7 @@
               </a:spcAft>
             </a:pPr>
             <a:r>
-              <a:rPr sz="1200">
+              <a:rPr sz="1400">
                 <a:solidFill>
                   <a:srgbClr val="202020"/>
                 </a:solidFill>
@@ -12648,8 +12648,8 @@
         </p:nvSpPr>
         <p:spPr>
           <a:xfrm>
-            <a:off x="6400800" y="960120"/>
-            <a:ext cx="5440680" cy="5669280"/>
+            <a:off x="6446520" y="1051560"/>
+            <a:ext cx="5349240" cy="5623560"/>
           </a:xfrm>
           <a:prstGeom prst="rect">
             <a:avLst/>
@@ -12666,11 +12666,11 @@
           <a:p>
             <a:pPr>
               <a:spcAft>
-                <a:spcPts val="300"/>
-              </a:spcAft>
-            </a:pPr>
-            <a:r>
-              <a:rPr sz="1200">
+                <a:spcPts val="500"/>
+              </a:spcAft>
+            </a:pPr>
+            <a:r>
+              <a:rPr sz="1400">
                 <a:solidFill>
                   <a:srgbClr val="333333"/>
                 </a:solidFill>
@@ -12682,11 +12682,11 @@
           <a:p>
             <a:pPr>
               <a:spcAft>
-                <a:spcPts val="300"/>
-              </a:spcAft>
-            </a:pPr>
-            <a:r>
-              <a:rPr sz="1200">
+                <a:spcPts val="500"/>
+              </a:spcAft>
+            </a:pPr>
+            <a:r>
+              <a:rPr sz="1400">
                 <a:solidFill>
                   <a:srgbClr val="333333"/>
                 </a:solidFill>
@@ -12698,11 +12698,11 @@
           <a:p>
             <a:pPr>
               <a:spcAft>
-                <a:spcPts val="300"/>
-              </a:spcAft>
-            </a:pPr>
-            <a:r>
-              <a:rPr sz="1200">
+                <a:spcPts val="500"/>
+              </a:spcAft>
+            </a:pPr>
+            <a:r>
+              <a:rPr sz="1400">
                 <a:solidFill>
                   <a:srgbClr val="333333"/>
                 </a:solidFill>
@@ -12714,11 +12714,11 @@
           <a:p>
             <a:pPr>
               <a:spcAft>
-                <a:spcPts val="300"/>
-              </a:spcAft>
-            </a:pPr>
-            <a:r>
-              <a:rPr sz="1200">
+                <a:spcPts val="500"/>
+              </a:spcAft>
+            </a:pPr>
+            <a:r>
+              <a:rPr sz="1400">
                 <a:solidFill>
                   <a:srgbClr val="333333"/>
                 </a:solidFill>
@@ -12730,11 +12730,11 @@
           <a:p>
             <a:pPr>
               <a:spcAft>
-                <a:spcPts val="300"/>
-              </a:spcAft>
-            </a:pPr>
-            <a:r>
-              <a:rPr sz="1200">
+                <a:spcPts val="500"/>
+              </a:spcAft>
+            </a:pPr>
+            <a:r>
+              <a:rPr sz="1400">
                 <a:solidFill>
                   <a:srgbClr val="333333"/>
                 </a:solidFill>
@@ -12746,11 +12746,11 @@
           <a:p>
             <a:pPr>
               <a:spcAft>
-                <a:spcPts val="300"/>
-              </a:spcAft>
-            </a:pPr>
-            <a:r>
-              <a:rPr sz="1200">
+                <a:spcPts val="500"/>
+              </a:spcAft>
+            </a:pPr>
+            <a:r>
+              <a:rPr sz="1400">
                 <a:solidFill>
                   <a:srgbClr val="333333"/>
                 </a:solidFill>
@@ -12762,11 +12762,11 @@
           <a:p>
             <a:pPr>
               <a:spcAft>
-                <a:spcPts val="300"/>
-              </a:spcAft>
-            </a:pPr>
-            <a:r>
-              <a:rPr sz="1200">
+                <a:spcPts val="500"/>
+              </a:spcAft>
+            </a:pPr>
+            <a:r>
+              <a:rPr sz="1400">
                 <a:solidFill>
                   <a:srgbClr val="333333"/>
                 </a:solidFill>
@@ -12869,8 +12869,8 @@
         </p:nvSpPr>
         <p:spPr>
           <a:xfrm>
-            <a:off x="365760" y="182880"/>
-            <a:ext cx="11430000" cy="640080"/>
+            <a:off x="365760" y="365760"/>
+            <a:ext cx="11430000" cy="594360"/>
           </a:xfrm>
           <a:prstGeom prst="rect">
             <a:avLst/>
@@ -12884,7 +12884,7 @@
           <a:lstStyle/>
           <a:p>
             <a:r>
-              <a:rPr sz="2000" b="1">
+              <a:rPr sz="2100" b="1">
                 <a:solidFill>
                   <a:srgbClr val="1F3B6E"/>
                 </a:solidFill>
@@ -12902,8 +12902,8 @@
         </p:nvSpPr>
         <p:spPr>
           <a:xfrm>
-            <a:off x="365760" y="960120"/>
-            <a:ext cx="5852160" cy="5669280"/>
+            <a:off x="365760" y="1051560"/>
+            <a:ext cx="5943600" cy="5623560"/>
           </a:xfrm>
           <a:prstGeom prst="rect">
             <a:avLst/>
@@ -12924,7 +12924,7 @@
               </a:spcAft>
             </a:pPr>
             <a:r>
-              <a:rPr sz="1200">
+              <a:rPr sz="1400">
                 <a:solidFill>
                   <a:srgbClr val="202020"/>
                 </a:solidFill>
@@ -12939,7 +12939,7 @@
               </a:spcAft>
             </a:pPr>
             <a:r>
-              <a:rPr sz="1200">
+              <a:rPr sz="1400">
                 <a:solidFill>
                   <a:srgbClr val="202020"/>
                 </a:solidFill>
@@ -12954,7 +12954,7 @@
               </a:spcAft>
             </a:pPr>
             <a:r>
-              <a:rPr sz="1200">
+              <a:rPr sz="1400">
                 <a:solidFill>
                   <a:srgbClr val="202020"/>
                 </a:solidFill>
@@ -12969,7 +12969,7 @@
               </a:spcAft>
             </a:pPr>
             <a:r>
-              <a:rPr sz="1200">
+              <a:rPr sz="1400">
                 <a:solidFill>
                   <a:srgbClr val="202020"/>
                 </a:solidFill>
@@ -12987,8 +12987,8 @@
         </p:nvSpPr>
         <p:spPr>
           <a:xfrm>
-            <a:off x="6400800" y="960120"/>
-            <a:ext cx="5440680" cy="5669280"/>
+            <a:off x="6446520" y="1051560"/>
+            <a:ext cx="5349240" cy="5623560"/>
           </a:xfrm>
           <a:prstGeom prst="rect">
             <a:avLst/>
@@ -13005,11 +13005,11 @@
           <a:p>
             <a:pPr>
               <a:spcAft>
-                <a:spcPts val="300"/>
-              </a:spcAft>
-            </a:pPr>
-            <a:r>
-              <a:rPr sz="1200">
+                <a:spcPts val="500"/>
+              </a:spcAft>
+            </a:pPr>
+            <a:r>
+              <a:rPr sz="1400">
                 <a:solidFill>
                   <a:srgbClr val="333333"/>
                 </a:solidFill>
@@ -13021,11 +13021,11 @@
           <a:p>
             <a:pPr>
               <a:spcAft>
-                <a:spcPts val="300"/>
-              </a:spcAft>
-            </a:pPr>
-            <a:r>
-              <a:rPr sz="1200">
+                <a:spcPts val="500"/>
+              </a:spcAft>
+            </a:pPr>
+            <a:r>
+              <a:rPr sz="1400">
                 <a:solidFill>
                   <a:srgbClr val="333333"/>
                 </a:solidFill>
@@ -13037,11 +13037,11 @@
           <a:p>
             <a:pPr>
               <a:spcAft>
-                <a:spcPts val="300"/>
-              </a:spcAft>
-            </a:pPr>
-            <a:r>
-              <a:rPr sz="1200">
+                <a:spcPts val="500"/>
+              </a:spcAft>
+            </a:pPr>
+            <a:r>
+              <a:rPr sz="1400">
                 <a:solidFill>
                   <a:srgbClr val="333333"/>
                 </a:solidFill>
@@ -13053,11 +13053,11 @@
           <a:p>
             <a:pPr>
               <a:spcAft>
-                <a:spcPts val="300"/>
-              </a:spcAft>
-            </a:pPr>
-            <a:r>
-              <a:rPr sz="1200">
+                <a:spcPts val="500"/>
+              </a:spcAft>
+            </a:pPr>
+            <a:r>
+              <a:rPr sz="1400">
                 <a:solidFill>
                   <a:srgbClr val="333333"/>
                 </a:solidFill>
@@ -13069,11 +13069,11 @@
           <a:p>
             <a:pPr>
               <a:spcAft>
-                <a:spcPts val="300"/>
-              </a:spcAft>
-            </a:pPr>
-            <a:r>
-              <a:rPr sz="1200">
+                <a:spcPts val="500"/>
+              </a:spcAft>
+            </a:pPr>
+            <a:r>
+              <a:rPr sz="1400">
                 <a:solidFill>
                   <a:srgbClr val="333333"/>
                 </a:solidFill>
@@ -13176,8 +13176,8 @@
         </p:nvSpPr>
         <p:spPr>
           <a:xfrm>
-            <a:off x="365760" y="182880"/>
-            <a:ext cx="11430000" cy="640080"/>
+            <a:off x="365760" y="365760"/>
+            <a:ext cx="11430000" cy="594360"/>
           </a:xfrm>
           <a:prstGeom prst="rect">
             <a:avLst/>
@@ -13191,7 +13191,7 @@
           <a:lstStyle/>
           <a:p>
             <a:r>
-              <a:rPr sz="2000" b="1">
+              <a:rPr sz="2100" b="1">
                 <a:solidFill>
                   <a:srgbClr val="1F3B6E"/>
                 </a:solidFill>
@@ -13209,8 +13209,8 @@
         </p:nvSpPr>
         <p:spPr>
           <a:xfrm>
-            <a:off x="365760" y="960120"/>
-            <a:ext cx="5852160" cy="5669280"/>
+            <a:off x="365760" y="1051560"/>
+            <a:ext cx="5943600" cy="5623560"/>
           </a:xfrm>
           <a:prstGeom prst="rect">
             <a:avLst/>
@@ -13231,7 +13231,7 @@
               </a:spcAft>
             </a:pPr>
             <a:r>
-              <a:rPr sz="1200">
+              <a:rPr sz="1400">
                 <a:solidFill>
                   <a:srgbClr val="202020"/>
                 </a:solidFill>
@@ -13253,7 +13253,7 @@
               </a:spcAft>
             </a:pPr>
             <a:r>
-              <a:rPr sz="1200">
+              <a:rPr sz="1400">
                 <a:solidFill>
                   <a:srgbClr val="202020"/>
                 </a:solidFill>
@@ -13268,7 +13268,7 @@
               </a:spcAft>
             </a:pPr>
             <a:r>
-              <a:rPr sz="1200">
+              <a:rPr sz="1400">
                 <a:solidFill>
                   <a:srgbClr val="202020"/>
                 </a:solidFill>
@@ -13286,8 +13286,8 @@
         </p:nvSpPr>
         <p:spPr>
           <a:xfrm>
-            <a:off x="6400800" y="960120"/>
-            <a:ext cx="5440680" cy="5669280"/>
+            <a:off x="6446520" y="1051560"/>
+            <a:ext cx="5349240" cy="5623560"/>
           </a:xfrm>
           <a:prstGeom prst="rect">
             <a:avLst/>
@@ -13304,11 +13304,11 @@
           <a:p>
             <a:pPr>
               <a:spcAft>
-                <a:spcPts val="300"/>
-              </a:spcAft>
-            </a:pPr>
-            <a:r>
-              <a:rPr sz="1200">
+                <a:spcPts val="500"/>
+              </a:spcAft>
+            </a:pPr>
+            <a:r>
+              <a:rPr sz="1400">
                 <a:solidFill>
                   <a:srgbClr val="333333"/>
                 </a:solidFill>
@@ -13320,11 +13320,11 @@
           <a:p>
             <a:pPr>
               <a:spcAft>
-                <a:spcPts val="300"/>
-              </a:spcAft>
-            </a:pPr>
-            <a:r>
-              <a:rPr sz="1200">
+                <a:spcPts val="500"/>
+              </a:spcAft>
+            </a:pPr>
+            <a:r>
+              <a:rPr sz="1400">
                 <a:solidFill>
                   <a:srgbClr val="333333"/>
                 </a:solidFill>
@@ -13336,11 +13336,11 @@
           <a:p>
             <a:pPr>
               <a:spcAft>
-                <a:spcPts val="300"/>
-              </a:spcAft>
-            </a:pPr>
-            <a:r>
-              <a:rPr sz="1200">
+                <a:spcPts val="500"/>
+              </a:spcAft>
+            </a:pPr>
+            <a:r>
+              <a:rPr sz="1400">
                 <a:solidFill>
                   <a:srgbClr val="333333"/>
                 </a:solidFill>
@@ -13443,8 +13443,8 @@
         </p:nvSpPr>
         <p:spPr>
           <a:xfrm>
-            <a:off x="365760" y="182880"/>
-            <a:ext cx="11430000" cy="640080"/>
+            <a:off x="365760" y="365760"/>
+            <a:ext cx="11430000" cy="594360"/>
           </a:xfrm>
           <a:prstGeom prst="rect">
             <a:avLst/>
@@ -13458,7 +13458,7 @@
           <a:lstStyle/>
           <a:p>
             <a:r>
-              <a:rPr sz="2000" b="1">
+              <a:rPr sz="2100" b="1">
                 <a:solidFill>
                   <a:srgbClr val="1F3B6E"/>
                 </a:solidFill>
@@ -13476,8 +13476,8 @@
         </p:nvSpPr>
         <p:spPr>
           <a:xfrm>
-            <a:off x="365760" y="960120"/>
-            <a:ext cx="5852160" cy="5669280"/>
+            <a:off x="365760" y="1051560"/>
+            <a:ext cx="5943600" cy="5623560"/>
           </a:xfrm>
           <a:prstGeom prst="rect">
             <a:avLst/>
@@ -13498,7 +13498,7 @@
               </a:spcAft>
             </a:pPr>
             <a:r>
-              <a:rPr sz="1200">
+              <a:rPr sz="1400">
                 <a:solidFill>
                   <a:srgbClr val="202020"/>
                 </a:solidFill>
@@ -13513,7 +13513,7 @@
               </a:spcAft>
             </a:pPr>
             <a:r>
-              <a:rPr sz="1200">
+              <a:rPr sz="1400">
                 <a:solidFill>
                   <a:srgbClr val="202020"/>
                 </a:solidFill>
@@ -13528,7 +13528,7 @@
               </a:spcAft>
             </a:pPr>
             <a:r>
-              <a:rPr sz="1200">
+              <a:rPr sz="1400">
                 <a:solidFill>
                   <a:srgbClr val="202020"/>
                 </a:solidFill>
@@ -13543,7 +13543,7 @@
               </a:spcAft>
             </a:pPr>
             <a:r>
-              <a:rPr sz="1200">
+              <a:rPr sz="1400">
                 <a:solidFill>
                   <a:srgbClr val="202020"/>
                 </a:solidFill>
@@ -13558,7 +13558,7 @@
               </a:spcAft>
             </a:pPr>
             <a:r>
-              <a:rPr sz="1200">
+              <a:rPr sz="1400">
                 <a:solidFill>
                   <a:srgbClr val="202020"/>
                 </a:solidFill>
@@ -13576,8 +13576,8 @@
         </p:nvSpPr>
         <p:spPr>
           <a:xfrm>
-            <a:off x="6400800" y="960120"/>
-            <a:ext cx="5440680" cy="5669280"/>
+            <a:off x="6446520" y="1051560"/>
+            <a:ext cx="5349240" cy="5623560"/>
           </a:xfrm>
           <a:prstGeom prst="rect">
             <a:avLst/>
@@ -13594,11 +13594,11 @@
           <a:p>
             <a:pPr>
               <a:spcAft>
-                <a:spcPts val="300"/>
-              </a:spcAft>
-            </a:pPr>
-            <a:r>
-              <a:rPr sz="1200">
+                <a:spcPts val="500"/>
+              </a:spcAft>
+            </a:pPr>
+            <a:r>
+              <a:rPr sz="1400">
                 <a:solidFill>
                   <a:srgbClr val="333333"/>
                 </a:solidFill>
@@ -13610,11 +13610,11 @@
           <a:p>
             <a:pPr>
               <a:spcAft>
-                <a:spcPts val="300"/>
-              </a:spcAft>
-            </a:pPr>
-            <a:r>
-              <a:rPr sz="1200">
+                <a:spcPts val="500"/>
+              </a:spcAft>
+            </a:pPr>
+            <a:r>
+              <a:rPr sz="1400">
                 <a:solidFill>
                   <a:srgbClr val="333333"/>
                 </a:solidFill>
@@ -13626,11 +13626,11 @@
           <a:p>
             <a:pPr>
               <a:spcAft>
-                <a:spcPts val="300"/>
-              </a:spcAft>
-            </a:pPr>
-            <a:r>
-              <a:rPr sz="1200">
+                <a:spcPts val="500"/>
+              </a:spcAft>
+            </a:pPr>
+            <a:r>
+              <a:rPr sz="1400">
                 <a:solidFill>
                   <a:srgbClr val="333333"/>
                 </a:solidFill>
@@ -13642,11 +13642,11 @@
           <a:p>
             <a:pPr>
               <a:spcAft>
-                <a:spcPts val="300"/>
-              </a:spcAft>
-            </a:pPr>
-            <a:r>
-              <a:rPr sz="1200">
+                <a:spcPts val="500"/>
+              </a:spcAft>
+            </a:pPr>
+            <a:r>
+              <a:rPr sz="1400">
                 <a:solidFill>
                   <a:srgbClr val="333333"/>
                 </a:solidFill>
@@ -13658,11 +13658,11 @@
           <a:p>
             <a:pPr>
               <a:spcAft>
-                <a:spcPts val="300"/>
-              </a:spcAft>
-            </a:pPr>
-            <a:r>
-              <a:rPr sz="1200">
+                <a:spcPts val="500"/>
+              </a:spcAft>
+            </a:pPr>
+            <a:r>
+              <a:rPr sz="1400">
                 <a:solidFill>
                   <a:srgbClr val="333333"/>
                 </a:solidFill>
@@ -13765,8 +13765,8 @@
         </p:nvSpPr>
         <p:spPr>
           <a:xfrm>
-            <a:off x="365760" y="182880"/>
-            <a:ext cx="11430000" cy="640080"/>
+            <a:off x="365760" y="365760"/>
+            <a:ext cx="11430000" cy="594360"/>
           </a:xfrm>
           <a:prstGeom prst="rect">
             <a:avLst/>
@@ -13780,7 +13780,7 @@
           <a:lstStyle/>
           <a:p>
             <a:r>
-              <a:rPr sz="2000" b="1">
+              <a:rPr sz="2100" b="1">
                 <a:solidFill>
                   <a:srgbClr val="1F3B6E"/>
                 </a:solidFill>
@@ -13798,8 +13798,8 @@
         </p:nvSpPr>
         <p:spPr>
           <a:xfrm>
-            <a:off x="365760" y="960120"/>
-            <a:ext cx="5852160" cy="5669280"/>
+            <a:off x="365760" y="1051560"/>
+            <a:ext cx="5943600" cy="5623560"/>
           </a:xfrm>
           <a:prstGeom prst="rect">
             <a:avLst/>
@@ -13820,7 +13820,7 @@
               </a:spcAft>
             </a:pPr>
             <a:r>
-              <a:rPr sz="1200">
+              <a:rPr sz="1400">
                 <a:solidFill>
                   <a:srgbClr val="202020"/>
                 </a:solidFill>
@@ -13835,7 +13835,7 @@
               </a:spcAft>
             </a:pPr>
             <a:r>
-              <a:rPr sz="1200">
+              <a:rPr sz="1400">
                 <a:solidFill>
                   <a:srgbClr val="202020"/>
                 </a:solidFill>
@@ -13853,8 +13853,8 @@
         </p:nvSpPr>
         <p:spPr>
           <a:xfrm>
-            <a:off x="6400800" y="960120"/>
-            <a:ext cx="5440680" cy="5669280"/>
+            <a:off x="6446520" y="1051560"/>
+            <a:ext cx="5349240" cy="5623560"/>
           </a:xfrm>
           <a:prstGeom prst="rect">
             <a:avLst/>
@@ -13871,11 +13871,11 @@
           <a:p>
             <a:pPr>
               <a:spcAft>
-                <a:spcPts val="300"/>
-              </a:spcAft>
-            </a:pPr>
-            <a:r>
-              <a:rPr sz="1200">
+                <a:spcPts val="500"/>
+              </a:spcAft>
+            </a:pPr>
+            <a:r>
+              <a:rPr sz="1400">
                 <a:solidFill>
                   <a:srgbClr val="333333"/>
                 </a:solidFill>
@@ -13887,11 +13887,11 @@
           <a:p>
             <a:pPr>
               <a:spcAft>
-                <a:spcPts val="300"/>
-              </a:spcAft>
-            </a:pPr>
-            <a:r>
-              <a:rPr sz="1200">
+                <a:spcPts val="500"/>
+              </a:spcAft>
+            </a:pPr>
+            <a:r>
+              <a:rPr sz="1400">
                 <a:solidFill>
                   <a:srgbClr val="333333"/>
                 </a:solidFill>
@@ -13903,11 +13903,11 @@
           <a:p>
             <a:pPr>
               <a:spcAft>
-                <a:spcPts val="300"/>
-              </a:spcAft>
-            </a:pPr>
-            <a:r>
-              <a:rPr sz="1200">
+                <a:spcPts val="500"/>
+              </a:spcAft>
+            </a:pPr>
+            <a:r>
+              <a:rPr sz="1400">
                 <a:solidFill>
                   <a:srgbClr val="333333"/>
                 </a:solidFill>
@@ -14010,8 +14010,8 @@
         </p:nvSpPr>
         <p:spPr>
           <a:xfrm>
-            <a:off x="365760" y="182880"/>
-            <a:ext cx="11430000" cy="640080"/>
+            <a:off x="365760" y="365760"/>
+            <a:ext cx="11430000" cy="594360"/>
           </a:xfrm>
           <a:prstGeom prst="rect">
             <a:avLst/>
@@ -14025,7 +14025,7 @@
           <a:lstStyle/>
           <a:p>
             <a:r>
-              <a:rPr sz="2000" b="1">
+              <a:rPr sz="2100" b="1">
                 <a:solidFill>
                   <a:srgbClr val="1F3B6E"/>
                 </a:solidFill>
@@ -14043,8 +14043,8 @@
         </p:nvSpPr>
         <p:spPr>
           <a:xfrm>
-            <a:off x="365760" y="960120"/>
-            <a:ext cx="5852160" cy="5669280"/>
+            <a:off x="365760" y="1051560"/>
+            <a:ext cx="5943600" cy="5623560"/>
           </a:xfrm>
           <a:prstGeom prst="rect">
             <a:avLst/>
@@ -14065,7 +14065,7 @@
               </a:spcAft>
             </a:pPr>
             <a:r>
-              <a:rPr sz="1200">
+              <a:rPr sz="1400">
                 <a:solidFill>
                   <a:srgbClr val="202020"/>
                 </a:solidFill>
@@ -14087,7 +14087,7 @@
               </a:spcAft>
             </a:pPr>
             <a:r>
-              <a:rPr sz="1200">
+              <a:rPr sz="1400">
                 <a:solidFill>
                   <a:srgbClr val="202020"/>
                 </a:solidFill>
@@ -14105,8 +14105,8 @@
         </p:nvSpPr>
         <p:spPr>
           <a:xfrm>
-            <a:off x="6400800" y="960120"/>
-            <a:ext cx="5440680" cy="5669280"/>
+            <a:off x="6446520" y="1051560"/>
+            <a:ext cx="5349240" cy="5623560"/>
           </a:xfrm>
           <a:prstGeom prst="rect">
             <a:avLst/>
@@ -14123,11 +14123,11 @@
           <a:p>
             <a:pPr>
               <a:spcAft>
-                <a:spcPts val="300"/>
-              </a:spcAft>
-            </a:pPr>
-            <a:r>
-              <a:rPr sz="1200">
+                <a:spcPts val="500"/>
+              </a:spcAft>
+            </a:pPr>
+            <a:r>
+              <a:rPr sz="1400">
                 <a:solidFill>
                   <a:srgbClr val="333333"/>
                 </a:solidFill>
@@ -14139,11 +14139,11 @@
           <a:p>
             <a:pPr>
               <a:spcAft>
-                <a:spcPts val="300"/>
-              </a:spcAft>
-            </a:pPr>
-            <a:r>
-              <a:rPr sz="1200">
+                <a:spcPts val="500"/>
+              </a:spcAft>
+            </a:pPr>
+            <a:r>
+              <a:rPr sz="1400">
                 <a:solidFill>
                   <a:srgbClr val="333333"/>
                 </a:solidFill>
@@ -14155,11 +14155,11 @@
           <a:p>
             <a:pPr>
               <a:spcAft>
-                <a:spcPts val="300"/>
-              </a:spcAft>
-            </a:pPr>
-            <a:r>
-              <a:rPr sz="1200">
+                <a:spcPts val="500"/>
+              </a:spcAft>
+            </a:pPr>
+            <a:r>
+              <a:rPr sz="1400">
                 <a:solidFill>
                   <a:srgbClr val="333333"/>
                 </a:solidFill>
@@ -14262,8 +14262,8 @@
         </p:nvSpPr>
         <p:spPr>
           <a:xfrm>
-            <a:off x="365760" y="182880"/>
-            <a:ext cx="11430000" cy="640080"/>
+            <a:off x="365760" y="365760"/>
+            <a:ext cx="11430000" cy="594360"/>
           </a:xfrm>
           <a:prstGeom prst="rect">
             <a:avLst/>
@@ -14277,7 +14277,7 @@
           <a:lstStyle/>
           <a:p>
             <a:r>
-              <a:rPr sz="2000" b="1">
+              <a:rPr sz="2100" b="1">
                 <a:solidFill>
                   <a:srgbClr val="1F3B6E"/>
                 </a:solidFill>
@@ -14295,8 +14295,8 @@
         </p:nvSpPr>
         <p:spPr>
           <a:xfrm>
-            <a:off x="365760" y="960120"/>
-            <a:ext cx="5852160" cy="5669280"/>
+            <a:off x="365760" y="1051560"/>
+            <a:ext cx="5943600" cy="5623560"/>
           </a:xfrm>
           <a:prstGeom prst="rect">
             <a:avLst/>
@@ -14317,7 +14317,7 @@
               </a:spcAft>
             </a:pPr>
             <a:r>
-              <a:rPr sz="1200">
+              <a:rPr sz="1400">
                 <a:solidFill>
                   <a:srgbClr val="202020"/>
                 </a:solidFill>
@@ -14332,7 +14332,7 @@
               </a:spcAft>
             </a:pPr>
             <a:r>
-              <a:rPr sz="1200">
+              <a:rPr sz="1400">
                 <a:solidFill>
                   <a:srgbClr val="202020"/>
                 </a:solidFill>
@@ -14347,7 +14347,7 @@
               </a:spcAft>
             </a:pPr>
             <a:r>
-              <a:rPr sz="1200">
+              <a:rPr sz="1400">
                 <a:solidFill>
                   <a:srgbClr val="202020"/>
                 </a:solidFill>
@@ -14362,7 +14362,7 @@
               </a:spcAft>
             </a:pPr>
             <a:r>
-              <a:rPr sz="1200">
+              <a:rPr sz="1400">
                 <a:solidFill>
                   <a:srgbClr val="202020"/>
                 </a:solidFill>
@@ -14377,7 +14377,7 @@
               </a:spcAft>
             </a:pPr>
             <a:r>
-              <a:rPr sz="1200">
+              <a:rPr sz="1400">
                 <a:solidFill>
                   <a:srgbClr val="202020"/>
                 </a:solidFill>
@@ -14392,7 +14392,7 @@
               </a:spcAft>
             </a:pPr>
             <a:r>
-              <a:rPr sz="1200">
+              <a:rPr sz="1400">
                 <a:solidFill>
                   <a:srgbClr val="202020"/>
                 </a:solidFill>
@@ -14407,7 +14407,7 @@
               </a:spcAft>
             </a:pPr>
             <a:r>
-              <a:rPr sz="1200">
+              <a:rPr sz="1400">
                 <a:solidFill>
                   <a:srgbClr val="202020"/>
                 </a:solidFill>
@@ -14425,8 +14425,8 @@
         </p:nvSpPr>
         <p:spPr>
           <a:xfrm>
-            <a:off x="6400800" y="960120"/>
-            <a:ext cx="5440680" cy="5669280"/>
+            <a:off x="6446520" y="1051560"/>
+            <a:ext cx="5349240" cy="5623560"/>
           </a:xfrm>
           <a:prstGeom prst="rect">
             <a:avLst/>
@@ -14443,11 +14443,11 @@
           <a:p>
             <a:pPr>
               <a:spcAft>
-                <a:spcPts val="300"/>
-              </a:spcAft>
-            </a:pPr>
-            <a:r>
-              <a:rPr sz="1200">
+                <a:spcPts val="500"/>
+              </a:spcAft>
+            </a:pPr>
+            <a:r>
+              <a:rPr sz="1400">
                 <a:solidFill>
                   <a:srgbClr val="333333"/>
                 </a:solidFill>
@@ -14459,11 +14459,11 @@
           <a:p>
             <a:pPr>
               <a:spcAft>
-                <a:spcPts val="300"/>
-              </a:spcAft>
-            </a:pPr>
-            <a:r>
-              <a:rPr sz="1200">
+                <a:spcPts val="500"/>
+              </a:spcAft>
+            </a:pPr>
+            <a:r>
+              <a:rPr sz="1400">
                 <a:solidFill>
                   <a:srgbClr val="333333"/>
                 </a:solidFill>
@@ -14475,11 +14475,11 @@
           <a:p>
             <a:pPr>
               <a:spcAft>
-                <a:spcPts val="300"/>
-              </a:spcAft>
-            </a:pPr>
-            <a:r>
-              <a:rPr sz="1200">
+                <a:spcPts val="500"/>
+              </a:spcAft>
+            </a:pPr>
+            <a:r>
+              <a:rPr sz="1400">
                 <a:solidFill>
                   <a:srgbClr val="333333"/>
                 </a:solidFill>
@@ -14491,11 +14491,11 @@
           <a:p>
             <a:pPr>
               <a:spcAft>
-                <a:spcPts val="300"/>
-              </a:spcAft>
-            </a:pPr>
-            <a:r>
-              <a:rPr sz="1200">
+                <a:spcPts val="500"/>
+              </a:spcAft>
+            </a:pPr>
+            <a:r>
+              <a:rPr sz="1400">
                 <a:solidFill>
                   <a:srgbClr val="333333"/>
                 </a:solidFill>
@@ -14507,11 +14507,11 @@
           <a:p>
             <a:pPr>
               <a:spcAft>
-                <a:spcPts val="300"/>
-              </a:spcAft>
-            </a:pPr>
-            <a:r>
-              <a:rPr sz="1200">
+                <a:spcPts val="500"/>
+              </a:spcAft>
+            </a:pPr>
+            <a:r>
+              <a:rPr sz="1400">
                 <a:solidFill>
                   <a:srgbClr val="333333"/>
                 </a:solidFill>
@@ -14523,11 +14523,11 @@
           <a:p>
             <a:pPr>
               <a:spcAft>
-                <a:spcPts val="300"/>
-              </a:spcAft>
-            </a:pPr>
-            <a:r>
-              <a:rPr sz="1200">
+                <a:spcPts val="500"/>
+              </a:spcAft>
+            </a:pPr>
+            <a:r>
+              <a:rPr sz="1400">
                 <a:solidFill>
                   <a:srgbClr val="333333"/>
                 </a:solidFill>
@@ -14539,11 +14539,11 @@
           <a:p>
             <a:pPr>
               <a:spcAft>
-                <a:spcPts val="300"/>
-              </a:spcAft>
-            </a:pPr>
-            <a:r>
-              <a:rPr sz="1200">
+                <a:spcPts val="500"/>
+              </a:spcAft>
+            </a:pPr>
+            <a:r>
+              <a:rPr sz="1400">
                 <a:solidFill>
                   <a:srgbClr val="333333"/>
                 </a:solidFill>
@@ -14646,8 +14646,8 @@
         </p:nvSpPr>
         <p:spPr>
           <a:xfrm>
-            <a:off x="365760" y="182880"/>
-            <a:ext cx="11430000" cy="640080"/>
+            <a:off x="365760" y="365760"/>
+            <a:ext cx="11430000" cy="594360"/>
           </a:xfrm>
           <a:prstGeom prst="rect">
             <a:avLst/>
@@ -14661,7 +14661,7 @@
           <a:lstStyle/>
           <a:p>
             <a:r>
-              <a:rPr sz="2000" b="1">
+              <a:rPr sz="2100" b="1">
                 <a:solidFill>
                   <a:srgbClr val="1F3B6E"/>
                 </a:solidFill>
@@ -14679,8 +14679,8 @@
         </p:nvSpPr>
         <p:spPr>
           <a:xfrm>
-            <a:off x="365760" y="960120"/>
-            <a:ext cx="5852160" cy="5669280"/>
+            <a:off x="365760" y="1051560"/>
+            <a:ext cx="5943600" cy="5623560"/>
           </a:xfrm>
           <a:prstGeom prst="rect">
             <a:avLst/>
@@ -14701,7 +14701,7 @@
               </a:spcAft>
             </a:pPr>
             <a:r>
-              <a:rPr sz="1200">
+              <a:rPr sz="1400">
                 <a:solidFill>
                   <a:srgbClr val="202020"/>
                 </a:solidFill>
@@ -14716,7 +14716,7 @@
               </a:spcAft>
             </a:pPr>
             <a:r>
-              <a:rPr sz="1200">
+              <a:rPr sz="1400">
                 <a:solidFill>
                   <a:srgbClr val="202020"/>
                 </a:solidFill>
@@ -14734,8 +14734,8 @@
         </p:nvSpPr>
         <p:spPr>
           <a:xfrm>
-            <a:off x="6400800" y="960120"/>
-            <a:ext cx="5440680" cy="5669280"/>
+            <a:off x="6446520" y="1051560"/>
+            <a:ext cx="5349240" cy="5623560"/>
           </a:xfrm>
           <a:prstGeom prst="rect">
             <a:avLst/>
@@ -14752,11 +14752,11 @@
           <a:p>
             <a:pPr>
               <a:spcAft>
-                <a:spcPts val="300"/>
-              </a:spcAft>
-            </a:pPr>
-            <a:r>
-              <a:rPr sz="1200">
+                <a:spcPts val="500"/>
+              </a:spcAft>
+            </a:pPr>
+            <a:r>
+              <a:rPr sz="1400">
                 <a:solidFill>
                   <a:srgbClr val="333333"/>
                 </a:solidFill>
@@ -14768,11 +14768,11 @@
           <a:p>
             <a:pPr>
               <a:spcAft>
-                <a:spcPts val="300"/>
-              </a:spcAft>
-            </a:pPr>
-            <a:r>
-              <a:rPr sz="1200">
+                <a:spcPts val="500"/>
+              </a:spcAft>
+            </a:pPr>
+            <a:r>
+              <a:rPr sz="1400">
                 <a:solidFill>
                   <a:srgbClr val="333333"/>
                 </a:solidFill>
@@ -14784,11 +14784,11 @@
           <a:p>
             <a:pPr>
               <a:spcAft>
-                <a:spcPts val="300"/>
-              </a:spcAft>
-            </a:pPr>
-            <a:r>
-              <a:rPr sz="1200">
+                <a:spcPts val="500"/>
+              </a:spcAft>
+            </a:pPr>
+            <a:r>
+              <a:rPr sz="1400">
                 <a:solidFill>
                   <a:srgbClr val="333333"/>
                 </a:solidFill>
@@ -14891,8 +14891,8 @@
         </p:nvSpPr>
         <p:spPr>
           <a:xfrm>
-            <a:off x="365760" y="182880"/>
-            <a:ext cx="11430000" cy="640080"/>
+            <a:off x="365760" y="365760"/>
+            <a:ext cx="11430000" cy="594360"/>
           </a:xfrm>
           <a:prstGeom prst="rect">
             <a:avLst/>
@@ -14906,7 +14906,7 @@
           <a:lstStyle/>
           <a:p>
             <a:r>
-              <a:rPr sz="2000" b="1">
+              <a:rPr sz="2100" b="1">
                 <a:solidFill>
                   <a:srgbClr val="1F3B6E"/>
                 </a:solidFill>
@@ -14924,8 +14924,8 @@
         </p:nvSpPr>
         <p:spPr>
           <a:xfrm>
-            <a:off x="365760" y="960120"/>
-            <a:ext cx="5852160" cy="5669280"/>
+            <a:off x="365760" y="1051560"/>
+            <a:ext cx="5943600" cy="5623560"/>
           </a:xfrm>
           <a:prstGeom prst="rect">
             <a:avLst/>
@@ -14946,7 +14946,7 @@
               </a:spcAft>
             </a:pPr>
             <a:r>
-              <a:rPr sz="1200">
+              <a:rPr sz="1400">
                 <a:solidFill>
                   <a:srgbClr val="202020"/>
                 </a:solidFill>
@@ -14964,8 +14964,8 @@
         </p:nvSpPr>
         <p:spPr>
           <a:xfrm>
-            <a:off x="6400800" y="960120"/>
-            <a:ext cx="5440680" cy="5669280"/>
+            <a:off x="6446520" y="1051560"/>
+            <a:ext cx="5349240" cy="5623560"/>
           </a:xfrm>
           <a:prstGeom prst="rect">
             <a:avLst/>
@@ -14982,11 +14982,11 @@
           <a:p>
             <a:pPr>
               <a:spcAft>
-                <a:spcPts val="300"/>
-              </a:spcAft>
-            </a:pPr>
-            <a:r>
-              <a:rPr sz="1200">
+                <a:spcPts val="500"/>
+              </a:spcAft>
+            </a:pPr>
+            <a:r>
+              <a:rPr sz="1400">
                 <a:solidFill>
                   <a:srgbClr val="333333"/>
                 </a:solidFill>
@@ -15089,8 +15089,8 @@
         </p:nvSpPr>
         <p:spPr>
           <a:xfrm>
-            <a:off x="365760" y="182880"/>
-            <a:ext cx="11430000" cy="640080"/>
+            <a:off x="365760" y="365760"/>
+            <a:ext cx="11430000" cy="594360"/>
           </a:xfrm>
           <a:prstGeom prst="rect">
             <a:avLst/>
@@ -15104,7 +15104,7 @@
           <a:lstStyle/>
           <a:p>
             <a:r>
-              <a:rPr sz="2000" b="1">
+              <a:rPr sz="2100" b="1">
                 <a:solidFill>
                   <a:srgbClr val="1F3B6E"/>
                 </a:solidFill>
@@ -15122,8 +15122,8 @@
         </p:nvSpPr>
         <p:spPr>
           <a:xfrm>
-            <a:off x="365760" y="960120"/>
-            <a:ext cx="5852160" cy="5669280"/>
+            <a:off x="365760" y="1051560"/>
+            <a:ext cx="5943600" cy="5623560"/>
           </a:xfrm>
           <a:prstGeom prst="rect">
             <a:avLst/>
@@ -15144,7 +15144,7 @@
               </a:spcAft>
             </a:pPr>
             <a:r>
-              <a:rPr sz="1200">
+              <a:rPr sz="1400">
                 <a:solidFill>
                   <a:srgbClr val="202020"/>
                 </a:solidFill>
@@ -15159,7 +15159,7 @@
               </a:spcAft>
             </a:pPr>
             <a:r>
-              <a:rPr sz="1200">
+              <a:rPr sz="1400">
                 <a:solidFill>
                   <a:srgbClr val="202020"/>
                 </a:solidFill>
@@ -15174,7 +15174,7 @@
               </a:spcAft>
             </a:pPr>
             <a:r>
-              <a:rPr sz="1200">
+              <a:rPr sz="1400">
                 <a:solidFill>
                   <a:srgbClr val="202020"/>
                 </a:solidFill>
@@ -15192,8 +15192,8 @@
         </p:nvSpPr>
         <p:spPr>
           <a:xfrm>
-            <a:off x="6400800" y="960120"/>
-            <a:ext cx="5440680" cy="5669280"/>
+            <a:off x="6446520" y="1051560"/>
+            <a:ext cx="5349240" cy="5623560"/>
           </a:xfrm>
           <a:prstGeom prst="rect">
             <a:avLst/>
@@ -15210,11 +15210,11 @@
           <a:p>
             <a:pPr>
               <a:spcAft>
-                <a:spcPts val="300"/>
-              </a:spcAft>
-            </a:pPr>
-            <a:r>
-              <a:rPr sz="1200">
+                <a:spcPts val="500"/>
+              </a:spcAft>
+            </a:pPr>
+            <a:r>
+              <a:rPr sz="1400">
                 <a:solidFill>
                   <a:srgbClr val="333333"/>
                 </a:solidFill>
@@ -15226,11 +15226,11 @@
           <a:p>
             <a:pPr>
               <a:spcAft>
-                <a:spcPts val="300"/>
-              </a:spcAft>
-            </a:pPr>
-            <a:r>
-              <a:rPr sz="1200">
+                <a:spcPts val="500"/>
+              </a:spcAft>
+            </a:pPr>
+            <a:r>
+              <a:rPr sz="1400">
                 <a:solidFill>
                   <a:srgbClr val="333333"/>
                 </a:solidFill>
@@ -15242,11 +15242,11 @@
           <a:p>
             <a:pPr>
               <a:spcAft>
-                <a:spcPts val="300"/>
-              </a:spcAft>
-            </a:pPr>
-            <a:r>
-              <a:rPr sz="1200">
+                <a:spcPts val="500"/>
+              </a:spcAft>
+            </a:pPr>
+            <a:r>
+              <a:rPr sz="1400">
                 <a:solidFill>
                   <a:srgbClr val="333333"/>
                 </a:solidFill>
@@ -15258,11 +15258,11 @@
           <a:p>
             <a:pPr>
               <a:spcAft>
-                <a:spcPts val="300"/>
-              </a:spcAft>
-            </a:pPr>
-            <a:r>
-              <a:rPr sz="1200">
+                <a:spcPts val="500"/>
+              </a:spcAft>
+            </a:pPr>
+            <a:r>
+              <a:rPr sz="1400">
                 <a:solidFill>
                   <a:srgbClr val="333333"/>
                 </a:solidFill>
@@ -15365,8 +15365,8 @@
         </p:nvSpPr>
         <p:spPr>
           <a:xfrm>
-            <a:off x="365760" y="182880"/>
-            <a:ext cx="11430000" cy="640080"/>
+            <a:off x="365760" y="365760"/>
+            <a:ext cx="11430000" cy="594360"/>
           </a:xfrm>
           <a:prstGeom prst="rect">
             <a:avLst/>
@@ -15380,7 +15380,7 @@
           <a:lstStyle/>
           <a:p>
             <a:r>
-              <a:rPr sz="2000" b="1">
+              <a:rPr sz="2100" b="1">
                 <a:solidFill>
                   <a:srgbClr val="1F3B6E"/>
                 </a:solidFill>
@@ -15398,8 +15398,8 @@
         </p:nvSpPr>
         <p:spPr>
           <a:xfrm>
-            <a:off x="365760" y="960120"/>
-            <a:ext cx="5852160" cy="5669280"/>
+            <a:off x="365760" y="1051560"/>
+            <a:ext cx="5943600" cy="5623560"/>
           </a:xfrm>
           <a:prstGeom prst="rect">
             <a:avLst/>
@@ -15420,7 +15420,7 @@
               </a:spcAft>
             </a:pPr>
             <a:r>
-              <a:rPr sz="1200">
+              <a:rPr sz="1400">
                 <a:solidFill>
                   <a:srgbClr val="202020"/>
                 </a:solidFill>
@@ -15435,7 +15435,7 @@
               </a:spcAft>
             </a:pPr>
             <a:r>
-              <a:rPr sz="1200">
+              <a:rPr sz="1400">
                 <a:solidFill>
                   <a:srgbClr val="202020"/>
                 </a:solidFill>
@@ -15453,8 +15453,8 @@
         </p:nvSpPr>
         <p:spPr>
           <a:xfrm>
-            <a:off x="6400800" y="960120"/>
-            <a:ext cx="5440680" cy="5669280"/>
+            <a:off x="6446520" y="1051560"/>
+            <a:ext cx="5349240" cy="5623560"/>
           </a:xfrm>
           <a:prstGeom prst="rect">
             <a:avLst/>
@@ -15471,11 +15471,11 @@
           <a:p>
             <a:pPr>
               <a:spcAft>
-                <a:spcPts val="300"/>
-              </a:spcAft>
-            </a:pPr>
-            <a:r>
-              <a:rPr sz="1200">
+                <a:spcPts val="500"/>
+              </a:spcAft>
+            </a:pPr>
+            <a:r>
+              <a:rPr sz="1400">
                 <a:solidFill>
                   <a:srgbClr val="333333"/>
                 </a:solidFill>
@@ -15487,11 +15487,11 @@
           <a:p>
             <a:pPr>
               <a:spcAft>
-                <a:spcPts val="300"/>
-              </a:spcAft>
-            </a:pPr>
-            <a:r>
-              <a:rPr sz="1200">
+                <a:spcPts val="500"/>
+              </a:spcAft>
+            </a:pPr>
+            <a:r>
+              <a:rPr sz="1400">
                 <a:solidFill>
                   <a:srgbClr val="333333"/>
                 </a:solidFill>
@@ -15594,8 +15594,8 @@
         </p:nvSpPr>
         <p:spPr>
           <a:xfrm>
-            <a:off x="365760" y="182880"/>
-            <a:ext cx="11430000" cy="640080"/>
+            <a:off x="365760" y="365760"/>
+            <a:ext cx="11430000" cy="594360"/>
           </a:xfrm>
           <a:prstGeom prst="rect">
             <a:avLst/>
@@ -15609,7 +15609,7 @@
           <a:lstStyle/>
           <a:p>
             <a:r>
-              <a:rPr sz="2000" b="1">
+              <a:rPr sz="2100" b="1">
                 <a:solidFill>
                   <a:srgbClr val="1F3B6E"/>
                 </a:solidFill>
@@ -15627,8 +15627,8 @@
         </p:nvSpPr>
         <p:spPr>
           <a:xfrm>
-            <a:off x="365760" y="960120"/>
-            <a:ext cx="5852160" cy="5669280"/>
+            <a:off x="365760" y="1051560"/>
+            <a:ext cx="5943600" cy="5623560"/>
           </a:xfrm>
           <a:prstGeom prst="rect">
             <a:avLst/>
@@ -15649,7 +15649,7 @@
               </a:spcAft>
             </a:pPr>
             <a:r>
-              <a:rPr sz="1200">
+              <a:rPr sz="1400">
                 <a:solidFill>
                   <a:srgbClr val="202020"/>
                 </a:solidFill>
@@ -15664,7 +15664,7 @@
               </a:spcAft>
             </a:pPr>
             <a:r>
-              <a:rPr sz="1200">
+              <a:rPr sz="1400">
                 <a:solidFill>
                   <a:srgbClr val="202020"/>
                 </a:solidFill>
@@ -15679,7 +15679,7 @@
               </a:spcAft>
             </a:pPr>
             <a:r>
-              <a:rPr sz="1200">
+              <a:rPr sz="1400">
                 <a:solidFill>
                   <a:srgbClr val="202020"/>
                 </a:solidFill>
@@ -15694,7 +15694,7 @@
               </a:spcAft>
             </a:pPr>
             <a:r>
-              <a:rPr sz="1200">
+              <a:rPr sz="1400">
                 <a:solidFill>
                   <a:srgbClr val="202020"/>
                 </a:solidFill>
@@ -15709,7 +15709,7 @@
               </a:spcAft>
             </a:pPr>
             <a:r>
-              <a:rPr sz="1200">
+              <a:rPr sz="1400">
                 <a:solidFill>
                   <a:srgbClr val="202020"/>
                 </a:solidFill>
@@ -15727,8 +15727,8 @@
         </p:nvSpPr>
         <p:spPr>
           <a:xfrm>
-            <a:off x="6400800" y="960120"/>
-            <a:ext cx="5440680" cy="5669280"/>
+            <a:off x="6446520" y="1051560"/>
+            <a:ext cx="5349240" cy="5623560"/>
           </a:xfrm>
           <a:prstGeom prst="rect">
             <a:avLst/>
@@ -15745,11 +15745,11 @@
           <a:p>
             <a:pPr>
               <a:spcAft>
-                <a:spcPts val="300"/>
-              </a:spcAft>
-            </a:pPr>
-            <a:r>
-              <a:rPr sz="1200">
+                <a:spcPts val="500"/>
+              </a:spcAft>
+            </a:pPr>
+            <a:r>
+              <a:rPr sz="1400">
                 <a:solidFill>
                   <a:srgbClr val="333333"/>
                 </a:solidFill>
@@ -15761,11 +15761,11 @@
           <a:p>
             <a:pPr>
               <a:spcAft>
-                <a:spcPts val="300"/>
-              </a:spcAft>
-            </a:pPr>
-            <a:r>
-              <a:rPr sz="1200">
+                <a:spcPts val="500"/>
+              </a:spcAft>
+            </a:pPr>
+            <a:r>
+              <a:rPr sz="1400">
                 <a:solidFill>
                   <a:srgbClr val="333333"/>
                 </a:solidFill>
@@ -15868,8 +15868,8 @@
         </p:nvSpPr>
         <p:spPr>
           <a:xfrm>
-            <a:off x="365760" y="182880"/>
-            <a:ext cx="11430000" cy="640080"/>
+            <a:off x="365760" y="365760"/>
+            <a:ext cx="11430000" cy="594360"/>
           </a:xfrm>
           <a:prstGeom prst="rect">
             <a:avLst/>
@@ -15883,7 +15883,7 @@
           <a:lstStyle/>
           <a:p>
             <a:r>
-              <a:rPr sz="2000" b="1">
+              <a:rPr sz="2100" b="1">
                 <a:solidFill>
                   <a:srgbClr val="1F3B6E"/>
                 </a:solidFill>
@@ -15901,8 +15901,8 @@
         </p:nvSpPr>
         <p:spPr>
           <a:xfrm>
-            <a:off x="365760" y="960120"/>
-            <a:ext cx="5852160" cy="5669280"/>
+            <a:off x="365760" y="1051560"/>
+            <a:ext cx="5943600" cy="5623560"/>
           </a:xfrm>
           <a:prstGeom prst="rect">
             <a:avLst/>
@@ -15923,7 +15923,7 @@
               </a:spcAft>
             </a:pPr>
             <a:r>
-              <a:rPr sz="1200">
+              <a:rPr sz="1400">
                 <a:solidFill>
                   <a:srgbClr val="202020"/>
                 </a:solidFill>
@@ -15941,8 +15941,8 @@
         </p:nvSpPr>
         <p:spPr>
           <a:xfrm>
-            <a:off x="6400800" y="960120"/>
-            <a:ext cx="5440680" cy="5669280"/>
+            <a:off x="6446520" y="1051560"/>
+            <a:ext cx="5349240" cy="5623560"/>
           </a:xfrm>
           <a:prstGeom prst="rect">
             <a:avLst/>
@@ -15959,11 +15959,11 @@
           <a:p>
             <a:pPr>
               <a:spcAft>
-                <a:spcPts val="300"/>
-              </a:spcAft>
-            </a:pPr>
-            <a:r>
-              <a:rPr sz="1200">
+                <a:spcPts val="500"/>
+              </a:spcAft>
+            </a:pPr>
+            <a:r>
+              <a:rPr sz="1400">
                 <a:solidFill>
                   <a:srgbClr val="333333"/>
                 </a:solidFill>
@@ -15975,11 +15975,11 @@
           <a:p>
             <a:pPr>
               <a:spcAft>
-                <a:spcPts val="300"/>
-              </a:spcAft>
-            </a:pPr>
-            <a:r>
-              <a:rPr sz="1200">
+                <a:spcPts val="500"/>
+              </a:spcAft>
+            </a:pPr>
+            <a:r>
+              <a:rPr sz="1400">
                 <a:solidFill>
                   <a:srgbClr val="333333"/>
                 </a:solidFill>
@@ -15991,11 +15991,11 @@
           <a:p>
             <a:pPr>
               <a:spcAft>
-                <a:spcPts val="300"/>
-              </a:spcAft>
-            </a:pPr>
-            <a:r>
-              <a:rPr sz="1200">
+                <a:spcPts val="500"/>
+              </a:spcAft>
+            </a:pPr>
+            <a:r>
+              <a:rPr sz="1400">
                 <a:solidFill>
                   <a:srgbClr val="333333"/>
                 </a:solidFill>
@@ -16007,11 +16007,11 @@
           <a:p>
             <a:pPr>
               <a:spcAft>
-                <a:spcPts val="300"/>
-              </a:spcAft>
-            </a:pPr>
-            <a:r>
-              <a:rPr sz="1200">
+                <a:spcPts val="500"/>
+              </a:spcAft>
+            </a:pPr>
+            <a:r>
+              <a:rPr sz="1400">
                 <a:solidFill>
                   <a:srgbClr val="333333"/>
                 </a:solidFill>
@@ -16023,11 +16023,11 @@
           <a:p>
             <a:pPr>
               <a:spcAft>
-                <a:spcPts val="300"/>
-              </a:spcAft>
-            </a:pPr>
-            <a:r>
-              <a:rPr sz="1200">
+                <a:spcPts val="500"/>
+              </a:spcAft>
+            </a:pPr>
+            <a:r>
+              <a:rPr sz="1400">
                 <a:solidFill>
                   <a:srgbClr val="333333"/>
                 </a:solidFill>
@@ -16130,8 +16130,8 @@
         </p:nvSpPr>
         <p:spPr>
           <a:xfrm>
-            <a:off x="365760" y="182880"/>
-            <a:ext cx="11430000" cy="640080"/>
+            <a:off x="365760" y="365760"/>
+            <a:ext cx="11430000" cy="594360"/>
           </a:xfrm>
           <a:prstGeom prst="rect">
             <a:avLst/>
@@ -16145,7 +16145,7 @@
           <a:lstStyle/>
           <a:p>
             <a:r>
-              <a:rPr sz="2000" b="1">
+              <a:rPr sz="2100" b="1">
                 <a:solidFill>
                   <a:srgbClr val="1F3B6E"/>
                 </a:solidFill>
@@ -16163,8 +16163,8 @@
         </p:nvSpPr>
         <p:spPr>
           <a:xfrm>
-            <a:off x="365760" y="960120"/>
-            <a:ext cx="5852160" cy="5669280"/>
+            <a:off x="365760" y="1051560"/>
+            <a:ext cx="5943600" cy="5623560"/>
           </a:xfrm>
           <a:prstGeom prst="rect">
             <a:avLst/>
@@ -16185,7 +16185,7 @@
               </a:spcAft>
             </a:pPr>
             <a:r>
-              <a:rPr sz="1200">
+              <a:rPr sz="1400">
                 <a:solidFill>
                   <a:srgbClr val="202020"/>
                 </a:solidFill>
@@ -16200,7 +16200,7 @@
               </a:spcAft>
             </a:pPr>
             <a:r>
-              <a:rPr sz="1200">
+              <a:rPr sz="1400">
                 <a:solidFill>
                   <a:srgbClr val="202020"/>
                 </a:solidFill>
@@ -16218,8 +16218,8 @@
         </p:nvSpPr>
         <p:spPr>
           <a:xfrm>
-            <a:off x="6400800" y="960120"/>
-            <a:ext cx="5440680" cy="5669280"/>
+            <a:off x="6446520" y="1051560"/>
+            <a:ext cx="5349240" cy="5623560"/>
           </a:xfrm>
           <a:prstGeom prst="rect">
             <a:avLst/>
@@ -16236,11 +16236,11 @@
           <a:p>
             <a:pPr>
               <a:spcAft>
-                <a:spcPts val="300"/>
-              </a:spcAft>
-            </a:pPr>
-            <a:r>
-              <a:rPr sz="1200">
+                <a:spcPts val="500"/>
+              </a:spcAft>
+            </a:pPr>
+            <a:r>
+              <a:rPr sz="1400">
                 <a:solidFill>
                   <a:srgbClr val="333333"/>
                 </a:solidFill>
@@ -16252,11 +16252,11 @@
           <a:p>
             <a:pPr>
               <a:spcAft>
-                <a:spcPts val="300"/>
-              </a:spcAft>
-            </a:pPr>
-            <a:r>
-              <a:rPr sz="1200">
+                <a:spcPts val="500"/>
+              </a:spcAft>
+            </a:pPr>
+            <a:r>
+              <a:rPr sz="1400">
                 <a:solidFill>
                   <a:srgbClr val="333333"/>
                 </a:solidFill>
@@ -16359,8 +16359,8 @@
         </p:nvSpPr>
         <p:spPr>
           <a:xfrm>
-            <a:off x="365760" y="182880"/>
-            <a:ext cx="11430000" cy="640080"/>
+            <a:off x="365760" y="365760"/>
+            <a:ext cx="11430000" cy="594360"/>
           </a:xfrm>
           <a:prstGeom prst="rect">
             <a:avLst/>
@@ -16374,7 +16374,7 @@
           <a:lstStyle/>
           <a:p>
             <a:r>
-              <a:rPr sz="2000" b="1">
+              <a:rPr sz="2100" b="1">
                 <a:solidFill>
                   <a:srgbClr val="1F3B6E"/>
                 </a:solidFill>
@@ -16392,8 +16392,8 @@
         </p:nvSpPr>
         <p:spPr>
           <a:xfrm>
-            <a:off x="365760" y="960120"/>
-            <a:ext cx="5852160" cy="5669280"/>
+            <a:off x="365760" y="1051560"/>
+            <a:ext cx="5943600" cy="5623560"/>
           </a:xfrm>
           <a:prstGeom prst="rect">
             <a:avLst/>
@@ -16414,7 +16414,7 @@
               </a:spcAft>
             </a:pPr>
             <a:r>
-              <a:rPr sz="1200">
+              <a:rPr sz="1400">
                 <a:solidFill>
                   <a:srgbClr val="202020"/>
                 </a:solidFill>
@@ -16432,8 +16432,8 @@
         </p:nvSpPr>
         <p:spPr>
           <a:xfrm>
-            <a:off x="6400800" y="960120"/>
-            <a:ext cx="5440680" cy="5669280"/>
+            <a:off x="6446520" y="1051560"/>
+            <a:ext cx="5349240" cy="5623560"/>
           </a:xfrm>
           <a:prstGeom prst="rect">
             <a:avLst/>
@@ -16450,11 +16450,11 @@
           <a:p>
             <a:pPr>
               <a:spcAft>
-                <a:spcPts val="300"/>
-              </a:spcAft>
-            </a:pPr>
-            <a:r>
-              <a:rPr sz="1200">
+                <a:spcPts val="500"/>
+              </a:spcAft>
+            </a:pPr>
+            <a:r>
+              <a:rPr sz="1400">
                 <a:solidFill>
                   <a:srgbClr val="333333"/>
                 </a:solidFill>
@@ -16466,11 +16466,11 @@
           <a:p>
             <a:pPr>
               <a:spcAft>
-                <a:spcPts val="300"/>
-              </a:spcAft>
-            </a:pPr>
-            <a:r>
-              <a:rPr sz="1200">
+                <a:spcPts val="500"/>
+              </a:spcAft>
+            </a:pPr>
+            <a:r>
+              <a:rPr sz="1400">
                 <a:solidFill>
                   <a:srgbClr val="333333"/>
                 </a:solidFill>
@@ -16482,11 +16482,11 @@
           <a:p>
             <a:pPr>
               <a:spcAft>
-                <a:spcPts val="300"/>
-              </a:spcAft>
-            </a:pPr>
-            <a:r>
-              <a:rPr sz="1200">
+                <a:spcPts val="500"/>
+              </a:spcAft>
+            </a:pPr>
+            <a:r>
+              <a:rPr sz="1400">
                 <a:solidFill>
                   <a:srgbClr val="333333"/>
                 </a:solidFill>
@@ -16498,11 +16498,11 @@
           <a:p>
             <a:pPr>
               <a:spcAft>
-                <a:spcPts val="300"/>
-              </a:spcAft>
-            </a:pPr>
-            <a:r>
-              <a:rPr sz="1200">
+                <a:spcPts val="500"/>
+              </a:spcAft>
+            </a:pPr>
+            <a:r>
+              <a:rPr sz="1400">
                 <a:solidFill>
                   <a:srgbClr val="333333"/>
                 </a:solidFill>
@@ -16605,8 +16605,8 @@
         </p:nvSpPr>
         <p:spPr>
           <a:xfrm>
-            <a:off x="365760" y="182880"/>
-            <a:ext cx="11430000" cy="640080"/>
+            <a:off x="365760" y="365760"/>
+            <a:ext cx="11430000" cy="594360"/>
           </a:xfrm>
           <a:prstGeom prst="rect">
             <a:avLst/>
@@ -16620,7 +16620,7 @@
           <a:lstStyle/>
           <a:p>
             <a:r>
-              <a:rPr sz="2000" b="1">
+              <a:rPr sz="2100" b="1">
                 <a:solidFill>
                   <a:srgbClr val="1F3B6E"/>
                 </a:solidFill>
@@ -16638,8 +16638,8 @@
         </p:nvSpPr>
         <p:spPr>
           <a:xfrm>
-            <a:off x="365760" y="960120"/>
-            <a:ext cx="5852160" cy="5669280"/>
+            <a:off x="365760" y="1051560"/>
+            <a:ext cx="5943600" cy="5623560"/>
           </a:xfrm>
           <a:prstGeom prst="rect">
             <a:avLst/>
@@ -16660,7 +16660,7 @@
               </a:spcAft>
             </a:pPr>
             <a:r>
-              <a:rPr sz="1200">
+              <a:rPr sz="1400">
                 <a:solidFill>
                   <a:srgbClr val="202020"/>
                 </a:solidFill>
@@ -16678,8 +16678,8 @@
         </p:nvSpPr>
         <p:spPr>
           <a:xfrm>
-            <a:off x="6400800" y="960120"/>
-            <a:ext cx="5440680" cy="5669280"/>
+            <a:off x="6446520" y="1051560"/>
+            <a:ext cx="5349240" cy="5623560"/>
           </a:xfrm>
           <a:prstGeom prst="rect">
             <a:avLst/>
@@ -16696,11 +16696,11 @@
           <a:p>
             <a:pPr>
               <a:spcAft>
-                <a:spcPts val="300"/>
-              </a:spcAft>
-            </a:pPr>
-            <a:r>
-              <a:rPr sz="1200">
+                <a:spcPts val="500"/>
+              </a:spcAft>
+            </a:pPr>
+            <a:r>
+              <a:rPr sz="1400">
                 <a:solidFill>
                   <a:srgbClr val="333333"/>
                 </a:solidFill>
@@ -16803,8 +16803,8 @@
         </p:nvSpPr>
         <p:spPr>
           <a:xfrm>
-            <a:off x="365760" y="182880"/>
-            <a:ext cx="11430000" cy="640080"/>
+            <a:off x="365760" y="365760"/>
+            <a:ext cx="11430000" cy="594360"/>
           </a:xfrm>
           <a:prstGeom prst="rect">
             <a:avLst/>
@@ -16818,7 +16818,7 @@
           <a:lstStyle/>
           <a:p>
             <a:r>
-              <a:rPr sz="2000" b="1">
+              <a:rPr sz="2100" b="1">
                 <a:solidFill>
                   <a:srgbClr val="1F3B6E"/>
                 </a:solidFill>
@@ -16836,8 +16836,8 @@
         </p:nvSpPr>
         <p:spPr>
           <a:xfrm>
-            <a:off x="365760" y="960120"/>
-            <a:ext cx="5852160" cy="5669280"/>
+            <a:off x="365760" y="1051560"/>
+            <a:ext cx="5943600" cy="5623560"/>
           </a:xfrm>
           <a:prstGeom prst="rect">
             <a:avLst/>
@@ -16858,7 +16858,7 @@
               </a:spcAft>
             </a:pPr>
             <a:r>
-              <a:rPr sz="1200">
+              <a:rPr sz="1400">
                 <a:solidFill>
                   <a:srgbClr val="202020"/>
                 </a:solidFill>
@@ -16876,8 +16876,8 @@
         </p:nvSpPr>
         <p:spPr>
           <a:xfrm>
-            <a:off x="6400800" y="960120"/>
-            <a:ext cx="5440680" cy="5669280"/>
+            <a:off x="6446520" y="1051560"/>
+            <a:ext cx="5349240" cy="5623560"/>
           </a:xfrm>
           <a:prstGeom prst="rect">
             <a:avLst/>
@@ -16894,11 +16894,11 @@
           <a:p>
             <a:pPr>
               <a:spcAft>
-                <a:spcPts val="300"/>
-              </a:spcAft>
-            </a:pPr>
-            <a:r>
-              <a:rPr sz="1200">
+                <a:spcPts val="500"/>
+              </a:spcAft>
+            </a:pPr>
+            <a:r>
+              <a:rPr sz="1400">
                 <a:solidFill>
                   <a:srgbClr val="333333"/>
                 </a:solidFill>
@@ -16910,11 +16910,11 @@
           <a:p>
             <a:pPr>
               <a:spcAft>
-                <a:spcPts val="300"/>
-              </a:spcAft>
-            </a:pPr>
-            <a:r>
-              <a:rPr sz="1200">
+                <a:spcPts val="500"/>
+              </a:spcAft>
+            </a:pPr>
+            <a:r>
+              <a:rPr sz="1400">
                 <a:solidFill>
                   <a:srgbClr val="333333"/>
                 </a:solidFill>
@@ -16926,11 +16926,11 @@
           <a:p>
             <a:pPr>
               <a:spcAft>
-                <a:spcPts val="300"/>
-              </a:spcAft>
-            </a:pPr>
-            <a:r>
-              <a:rPr sz="1200">
+                <a:spcPts val="500"/>
+              </a:spcAft>
+            </a:pPr>
+            <a:r>
+              <a:rPr sz="1400">
                 <a:solidFill>
                   <a:srgbClr val="333333"/>
                 </a:solidFill>
@@ -16942,11 +16942,11 @@
           <a:p>
             <a:pPr>
               <a:spcAft>
-                <a:spcPts val="300"/>
-              </a:spcAft>
-            </a:pPr>
-            <a:r>
-              <a:rPr sz="1200">
+                <a:spcPts val="500"/>
+              </a:spcAft>
+            </a:pPr>
+            <a:r>
+              <a:rPr sz="1400">
                 <a:solidFill>
                   <a:srgbClr val="333333"/>
                 </a:solidFill>
@@ -16958,11 +16958,11 @@
           <a:p>
             <a:pPr>
               <a:spcAft>
-                <a:spcPts val="300"/>
-              </a:spcAft>
-            </a:pPr>
-            <a:r>
-              <a:rPr sz="1200">
+                <a:spcPts val="500"/>
+              </a:spcAft>
+            </a:pPr>
+            <a:r>
+              <a:rPr sz="1400">
                 <a:solidFill>
                   <a:srgbClr val="333333"/>
                 </a:solidFill>
@@ -17065,8 +17065,8 @@
         </p:nvSpPr>
         <p:spPr>
           <a:xfrm>
-            <a:off x="365760" y="182880"/>
-            <a:ext cx="11430000" cy="640080"/>
+            <a:off x="365760" y="365760"/>
+            <a:ext cx="11430000" cy="594360"/>
           </a:xfrm>
           <a:prstGeom prst="rect">
             <a:avLst/>
@@ -17080,7 +17080,7 @@
           <a:lstStyle/>
           <a:p>
             <a:r>
-              <a:rPr sz="2000" b="1">
+              <a:rPr sz="2100" b="1">
                 <a:solidFill>
                   <a:srgbClr val="1F3B6E"/>
                 </a:solidFill>
@@ -17098,8 +17098,8 @@
         </p:nvSpPr>
         <p:spPr>
           <a:xfrm>
-            <a:off x="365760" y="960120"/>
-            <a:ext cx="5852160" cy="5669280"/>
+            <a:off x="365760" y="1051560"/>
+            <a:ext cx="5943600" cy="5623560"/>
           </a:xfrm>
           <a:prstGeom prst="rect">
             <a:avLst/>
@@ -17120,7 +17120,7 @@
               </a:spcAft>
             </a:pPr>
             <a:r>
-              <a:rPr sz="1200">
+              <a:rPr sz="1400">
                 <a:solidFill>
                   <a:srgbClr val="202020"/>
                 </a:solidFill>
@@ -17135,7 +17135,7 @@
               </a:spcAft>
             </a:pPr>
             <a:r>
-              <a:rPr sz="1200">
+              <a:rPr sz="1400">
                 <a:solidFill>
                   <a:srgbClr val="202020"/>
                 </a:solidFill>
@@ -17150,7 +17150,7 @@
               </a:spcAft>
             </a:pPr>
             <a:r>
-              <a:rPr sz="1200">
+              <a:rPr sz="1400">
                 <a:solidFill>
                   <a:srgbClr val="202020"/>
                 </a:solidFill>
@@ -17168,8 +17168,8 @@
         </p:nvSpPr>
         <p:spPr>
           <a:xfrm>
-            <a:off x="6400800" y="960120"/>
-            <a:ext cx="5440680" cy="5669280"/>
+            <a:off x="6446520" y="1051560"/>
+            <a:ext cx="5349240" cy="5623560"/>
           </a:xfrm>
           <a:prstGeom prst="rect">
             <a:avLst/>
@@ -17186,11 +17186,11 @@
           <a:p>
             <a:pPr>
               <a:spcAft>
-                <a:spcPts val="300"/>
-              </a:spcAft>
-            </a:pPr>
-            <a:r>
-              <a:rPr sz="1200">
+                <a:spcPts val="500"/>
+              </a:spcAft>
+            </a:pPr>
+            <a:r>
+              <a:rPr sz="1400">
                 <a:solidFill>
                   <a:srgbClr val="333333"/>
                 </a:solidFill>
@@ -17202,11 +17202,11 @@
           <a:p>
             <a:pPr>
               <a:spcAft>
-                <a:spcPts val="300"/>
-              </a:spcAft>
-            </a:pPr>
-            <a:r>
-              <a:rPr sz="1200">
+                <a:spcPts val="500"/>
+              </a:spcAft>
+            </a:pPr>
+            <a:r>
+              <a:rPr sz="1400">
                 <a:solidFill>
                   <a:srgbClr val="333333"/>
                 </a:solidFill>
@@ -17218,11 +17218,11 @@
           <a:p>
             <a:pPr>
               <a:spcAft>
-                <a:spcPts val="300"/>
-              </a:spcAft>
-            </a:pPr>
-            <a:r>
-              <a:rPr sz="1200">
+                <a:spcPts val="500"/>
+              </a:spcAft>
+            </a:pPr>
+            <a:r>
+              <a:rPr sz="1400">
                 <a:solidFill>
                   <a:srgbClr val="333333"/>
                 </a:solidFill>
@@ -17234,11 +17234,11 @@
           <a:p>
             <a:pPr>
               <a:spcAft>
-                <a:spcPts val="300"/>
-              </a:spcAft>
-            </a:pPr>
-            <a:r>
-              <a:rPr sz="1200">
+                <a:spcPts val="500"/>
+              </a:spcAft>
+            </a:pPr>
+            <a:r>
+              <a:rPr sz="1400">
                 <a:solidFill>
                   <a:srgbClr val="333333"/>
                 </a:solidFill>

--- a/LLP307_EAP_写作课_中英对照.pptx
+++ b/LLP307_EAP_写作课_中英对照.pptx
@@ -5444,66 +5444,6 @@
           <a:chExt cx="0" cy="0"/>
         </a:xfrm>
       </p:grpSpPr>
-      <p:pic>
-        <p:nvPicPr>
-          <p:cNvPr id="7" name="Picture 6" descr="A screenshot of a computer&#10;&#10;AI-generated content may be incorrect."/>
-          <p:cNvPicPr>
-            <a:picLocks noChangeAspect="1"/>
-          </p:cNvPicPr>
-          <p:nvPr/>
-        </p:nvPicPr>
-        <p:blipFill>
-          <a:blip r:embed="rId1">
-            <a:extLst>
-              <a:ext uri="{28A0092B-C50C-407E-A947-70E740481C1C}">
-                <a14:useLocalDpi xmlns:a14="http://schemas.microsoft.com/office/drawing/2010/main" val="0"/>
-              </a:ext>
-            </a:extLst>
-          </a:blip>
-          <a:stretch>
-            <a:fillRect/>
-          </a:stretch>
-        </p:blipFill>
-        <p:spPr>
-          <a:xfrm>
-            <a:off x="6605587" y="1339239"/>
-            <a:ext cx="5473865" cy="5244122"/>
-          </a:xfrm>
-          <a:prstGeom prst="rect">
-            <a:avLst/>
-          </a:prstGeom>
-        </p:spPr>
-      </p:pic>
-      <p:pic>
-        <p:nvPicPr>
-          <p:cNvPr id="5" name="Picture 4" descr="A screenshot of a computer&#10;&#10;AI-generated content may be incorrect."/>
-          <p:cNvPicPr>
-            <a:picLocks noChangeAspect="1"/>
-          </p:cNvPicPr>
-          <p:nvPr/>
-        </p:nvPicPr>
-        <p:blipFill>
-          <a:blip r:embed="rId2">
-            <a:extLst>
-              <a:ext uri="{28A0092B-C50C-407E-A947-70E740481C1C}">
-                <a14:useLocalDpi xmlns:a14="http://schemas.microsoft.com/office/drawing/2010/main" val="0"/>
-              </a:ext>
-            </a:extLst>
-          </a:blip>
-          <a:stretch>
-            <a:fillRect/>
-          </a:stretch>
-        </p:blipFill>
-        <p:spPr>
-          <a:xfrm>
-            <a:off x="609600" y="1417639"/>
-            <a:ext cx="4976813" cy="4611133"/>
-          </a:xfrm>
-          <a:prstGeom prst="rect">
-            <a:avLst/>
-          </a:prstGeom>
-        </p:spPr>
-      </p:pic>
       <p:sp>
         <p:nvSpPr>
           <p:cNvPr id="2" name="Title 1"/>
@@ -5625,9 +5565,57 @@
           </a:p>
         </p:txBody>
       </p:sp>
-      <p:sp>
-        <p:nvSpPr>
-          <p:cNvPr id="10" name="TextBox 9"/>
+      <p:pic>
+        <p:nvPicPr>
+          <p:cNvPr id="10" name="Picture 9" descr="s17_1.png"/>
+          <p:cNvPicPr>
+            <a:picLocks noChangeAspect="1"/>
+          </p:cNvPicPr>
+          <p:nvPr/>
+        </p:nvPicPr>
+        <p:blipFill>
+          <a:blip r:embed="rId2"/>
+          <a:stretch>
+            <a:fillRect/>
+          </a:stretch>
+        </p:blipFill>
+        <p:spPr>
+          <a:xfrm>
+            <a:off x="612648" y="1417320"/>
+            <a:ext cx="4974336" cy="4608576"/>
+          </a:xfrm>
+          <a:prstGeom prst="rect">
+            <a:avLst/>
+          </a:prstGeom>
+        </p:spPr>
+      </p:pic>
+      <p:pic>
+        <p:nvPicPr>
+          <p:cNvPr id="11" name="Picture 10" descr="s17_0.png"/>
+          <p:cNvPicPr>
+            <a:picLocks noChangeAspect="1"/>
+          </p:cNvPicPr>
+          <p:nvPr/>
+        </p:nvPicPr>
+        <p:blipFill>
+          <a:blip r:embed="rId3"/>
+          <a:stretch>
+            <a:fillRect/>
+          </a:stretch>
+        </p:blipFill>
+        <p:spPr>
+          <a:xfrm>
+            <a:off x="6601968" y="1335024"/>
+            <a:ext cx="5477256" cy="5248656"/>
+          </a:xfrm>
+          <a:prstGeom prst="rect">
+            <a:avLst/>
+          </a:prstGeom>
+        </p:spPr>
+      </p:pic>
+      <p:sp>
+        <p:nvSpPr>
+          <p:cNvPr id="12" name="TextBox 11"/>
           <p:cNvSpPr txBox="1"/>
           <p:nvPr/>
         </p:nvSpPr>
@@ -5739,28 +5727,22 @@
       </p:sp>
       <p:pic>
         <p:nvPicPr>
-          <p:cNvPr id="4" name="Picture 3" descr="A screenshot of a computer&#10;&#10;AI-generated content may be incorrect."/>
+          <p:cNvPr id="3" name="Picture 2" descr="s18_1.png"/>
           <p:cNvPicPr>
             <a:picLocks noChangeAspect="1"/>
           </p:cNvPicPr>
           <p:nvPr/>
         </p:nvPicPr>
         <p:blipFill>
-          <a:blip r:embed="rId1">
-            <a:extLst>
-              <a:ext uri="{28A0092B-C50C-407E-A947-70E740481C1C}">
-                <a14:useLocalDpi xmlns:a14="http://schemas.microsoft.com/office/drawing/2010/main" val="0"/>
-              </a:ext>
-            </a:extLst>
-          </a:blip>
+          <a:blip r:embed="rId2"/>
           <a:stretch>
             <a:fillRect/>
           </a:stretch>
         </p:blipFill>
         <p:spPr>
           <a:xfrm>
-            <a:off x="6009829" y="0"/>
-            <a:ext cx="6182171" cy="6858000"/>
+            <a:off x="6007608" y="0"/>
+            <a:ext cx="6181344" cy="6858000"/>
           </a:xfrm>
           <a:prstGeom prst="rect">
             <a:avLst/>
@@ -5769,7 +5751,7 @@
       </p:pic>
       <p:sp>
         <p:nvSpPr>
-          <p:cNvPr id="5" name="TextBox 4"/>
+          <p:cNvPr id="4" name="TextBox 3"/>
           <p:cNvSpPr txBox="1"/>
           <p:nvPr/>
         </p:nvSpPr>
@@ -22877,31 +22859,6 @@
           </a:p>
         </p:txBody>
       </p:sp>
-      <p:pic>
-        <p:nvPicPr>
-          <p:cNvPr id="10" name="Picture 9"/>
-          <p:cNvPicPr>
-            <a:picLocks noChangeAspect="1"/>
-          </p:cNvPicPr>
-          <p:nvPr/>
-        </p:nvPicPr>
-        <p:blipFill rotWithShape="1">
-          <a:blip r:embed="rId1"/>
-          <a:srcRect r="46866"/>
-          <a:stretch>
-            <a:fillRect/>
-          </a:stretch>
-        </p:blipFill>
-        <p:spPr>
-          <a:xfrm>
-            <a:off x="2485025" y="1401615"/>
-            <a:ext cx="2173838" cy="4319810"/>
-          </a:xfrm>
-          <a:prstGeom prst="rect">
-            <a:avLst/>
-          </a:prstGeom>
-        </p:spPr>
-      </p:pic>
       <p:sp>
         <p:nvSpPr>
           <p:cNvPr id="11" name="Oval 10"/>
@@ -22946,30 +22903,6 @@
           </a:p>
         </p:txBody>
       </p:sp>
-      <p:pic>
-        <p:nvPicPr>
-          <p:cNvPr id="12" name="Picture 11"/>
-          <p:cNvPicPr>
-            <a:picLocks noChangeAspect="1"/>
-          </p:cNvPicPr>
-          <p:nvPr/>
-        </p:nvPicPr>
-        <p:blipFill>
-          <a:blip r:embed="rId2"/>
-          <a:stretch>
-            <a:fillRect/>
-          </a:stretch>
-        </p:blipFill>
-        <p:spPr>
-          <a:xfrm>
-            <a:off x="4960459" y="1492664"/>
-            <a:ext cx="4915310" cy="3925111"/>
-          </a:xfrm>
-          <a:prstGeom prst="rect">
-            <a:avLst/>
-          </a:prstGeom>
-        </p:spPr>
-      </p:pic>
       <p:cxnSp>
         <p:nvCxnSpPr>
           <p:cNvPr id="13" name="Straight Arrow Connector 12"/>
@@ -23044,9 +22977,57 @@
           </a:fontRef>
         </p:style>
       </p:cxnSp>
-      <p:sp>
-        <p:nvSpPr>
-          <p:cNvPr id="15" name="TextBox 14"/>
+      <p:pic>
+        <p:nvPicPr>
+          <p:cNvPr id="15" name="Picture 14" descr="s46_1.png"/>
+          <p:cNvPicPr>
+            <a:picLocks noChangeAspect="1"/>
+          </p:cNvPicPr>
+          <p:nvPr/>
+        </p:nvPicPr>
+        <p:blipFill>
+          <a:blip r:embed="rId2"/>
+          <a:stretch>
+            <a:fillRect/>
+          </a:stretch>
+        </p:blipFill>
+        <p:spPr>
+          <a:xfrm>
+            <a:off x="2487168" y="1399032"/>
+            <a:ext cx="2176272" cy="4315968"/>
+          </a:xfrm>
+          <a:prstGeom prst="rect">
+            <a:avLst/>
+          </a:prstGeom>
+        </p:spPr>
+      </p:pic>
+      <p:pic>
+        <p:nvPicPr>
+          <p:cNvPr id="16" name="Picture 15" descr="s46_3.png"/>
+          <p:cNvPicPr>
+            <a:picLocks noChangeAspect="1"/>
+          </p:cNvPicPr>
+          <p:nvPr/>
+        </p:nvPicPr>
+        <p:blipFill>
+          <a:blip r:embed="rId3"/>
+          <a:stretch>
+            <a:fillRect/>
+          </a:stretch>
+        </p:blipFill>
+        <p:spPr>
+          <a:xfrm>
+            <a:off x="4956048" y="1490472"/>
+            <a:ext cx="4919472" cy="3922776"/>
+          </a:xfrm>
+          <a:prstGeom prst="rect">
+            <a:avLst/>
+          </a:prstGeom>
+        </p:spPr>
+      </p:pic>
+      <p:sp>
+        <p:nvSpPr>
+          <p:cNvPr id="17" name="TextBox 16"/>
           <p:cNvSpPr txBox="1"/>
           <p:nvPr/>
         </p:nvSpPr>
@@ -24602,52 +24583,21 @@
         <p:nvPr/>
       </p:nvGrpSpPr>
       <p:grpSpPr/>
-      <p:nvGrpSpPr>
-        <p:cNvPr id="1" name=""/>
-        <p:cNvGrpSpPr/>
-        <p:nvPr/>
-      </p:nvGrpSpPr>
-      <p:grpSpPr>
-        <a:xfrm>
-          <a:off x="0" y="0"/>
-          <a:ext cx="0" cy="0"/>
-          <a:chOff x="0" y="0"/>
-          <a:chExt cx="0" cy="0"/>
-        </a:xfrm>
-      </p:grpSpPr>
-      <p:graphicFrame>
-        <p:nvGraphicFramePr>
-          <p:cNvPr id="3" name="Diagram 2"/>
-          <p:cNvGraphicFramePr/>
-          <p:nvPr/>
-        </p:nvGraphicFramePr>
-        <p:xfrm>
-          <a:off x="65314" y="0"/>
-          <a:ext cx="12066815" cy="6858000"/>
-        </p:xfrm>
-        <a:graphic>
-          <a:graphicData uri="http://schemas.openxmlformats.org/drawingml/2006/diagram">
-            <dgm:relIds xmlns:dgm="http://schemas.openxmlformats.org/drawingml/2006/diagram" r:dm="rId1" r:lo="rId2" r:qs="rId3" r:cs="rId4"/>
-          </a:graphicData>
-        </a:graphic>
-      </p:graphicFrame>
-      <p:sp>
-        <p:nvSpPr>
-          <p:cNvPr id="4" name="TextBox 3"/>
+      <p:sp>
+        <p:nvSpPr>
+          <p:cNvPr id="2" name="TextBox 1"/>
           <p:cNvSpPr txBox="1"/>
           <p:nvPr/>
         </p:nvSpPr>
         <p:spPr>
           <a:xfrm>
-            <a:off x="365760" y="6263640"/>
+            <a:off x="365760" y="182880"/>
             <a:ext cx="11430000" cy="548640"/>
           </a:xfrm>
           <a:prstGeom prst="rect">
             <a:avLst/>
           </a:prstGeom>
-          <a:solidFill>
-            <a:srgbClr val="FFF6E0"/>
-          </a:solidFill>
+          <a:noFill/>
         </p:spPr>
         <p:txBody>
           <a:bodyPr wrap="square">
@@ -24656,13 +24606,749 @@
           <a:lstStyle/>
           <a:p>
             <a:r>
-              <a:rPr sz="1200">
-                <a:solidFill>
-                  <a:srgbClr val="805000"/>
+              <a:rPr sz="2100" b="1">
+                <a:solidFill>
+                  <a:srgbClr val="1F3B6E"/>
+                </a:solidFill>
+              </a:rPr>
+              <a:t>7 · 选择一个领域 Topic</a:t>
+            </a:r>
+          </a:p>
+        </p:txBody>
+      </p:sp>
+      <p:sp>
+        <p:nvSpPr>
+          <p:cNvPr id="3" name="TextBox 2"/>
+          <p:cNvSpPr txBox="1"/>
+          <p:nvPr/>
+        </p:nvSpPr>
+        <p:spPr>
+          <a:xfrm>
+            <a:off x="365760" y="914400"/>
+            <a:ext cx="5897880" cy="5760720"/>
+          </a:xfrm>
+          <a:prstGeom prst="rect">
+            <a:avLst/>
+          </a:prstGeom>
+          <a:noFill/>
+        </p:spPr>
+        <p:txBody>
+          <a:bodyPr wrap="square">
+            <a:spAutoFit/>
+          </a:bodyPr>
+          <a:lstStyle/>
+          <a:p>
+            <a:pPr>
+              <a:spcAft>
+                <a:spcPts val="400"/>
+              </a:spcAft>
+            </a:pPr>
+            <a:r>
+              <a:rPr sz="1400">
+                <a:solidFill>
+                  <a:srgbClr val="202020"/>
+                </a:solidFill>
+              </a:rPr>
+              <a:t>Topic: Choose either a SPORT/INDUSTRY or a COMMERCIAL DOMAIN</a:t>
+            </a:r>
+          </a:p>
+          <a:p>
+            <a:pPr>
+              <a:spcAft>
+                <a:spcPts val="400"/>
+              </a:spcAft>
+            </a:pPr>
+          </a:p>
+          <a:p>
+            <a:pPr>
+              <a:spcAft>
+                <a:spcPts val="400"/>
+              </a:spcAft>
+            </a:pPr>
+            <a:r>
+              <a:rPr sz="1400">
+                <a:solidFill>
+                  <a:srgbClr val="202020"/>
+                </a:solidFill>
+              </a:rPr>
+              <a:t>1. A particular sport or industry</a:t>
+            </a:r>
+          </a:p>
+          <a:p>
+            <a:pPr>
+              <a:spcAft>
+                <a:spcPts val="400"/>
+              </a:spcAft>
+            </a:pPr>
+            <a:r>
+              <a:rPr sz="1400">
+                <a:solidFill>
+                  <a:srgbClr val="202020"/>
+                </a:solidFill>
+              </a:rPr>
+              <a:t>   · Type of sport: Football / Cricket / Boxing / Basketball / Baseball / E-sports</a:t>
+            </a:r>
+          </a:p>
+          <a:p>
+            <a:pPr>
+              <a:spcAft>
+                <a:spcPts val="400"/>
+              </a:spcAft>
+            </a:pPr>
+            <a:r>
+              <a:rPr sz="1400">
+                <a:solidFill>
+                  <a:srgbClr val="202020"/>
+                </a:solidFill>
+              </a:rPr>
+              <a:t>   · Industry: Sports apparel or equipment / Sports betting</a:t>
+            </a:r>
+          </a:p>
+          <a:p>
+            <a:pPr>
+              <a:spcAft>
+                <a:spcPts val="400"/>
+              </a:spcAft>
+            </a:pPr>
+          </a:p>
+          <a:p>
+            <a:pPr>
+              <a:spcAft>
+                <a:spcPts val="400"/>
+              </a:spcAft>
+            </a:pPr>
+            <a:r>
+              <a:rPr sz="1400">
+                <a:solidFill>
+                  <a:srgbClr val="202020"/>
+                </a:solidFill>
+              </a:rPr>
+              <a:t>2. Use of AI-based technology in commercial domain</a:t>
+            </a:r>
+          </a:p>
+          <a:p>
+            <a:pPr>
+              <a:spcAft>
+                <a:spcPts val="400"/>
+              </a:spcAft>
+            </a:pPr>
+            <a:r>
+              <a:rPr sz="1400">
+                <a:solidFill>
+                  <a:srgbClr val="202020"/>
+                </a:solidFill>
+              </a:rPr>
+              <a:t>   · Ticketing / Fan engagement / Customer engagement / Fantasy leagues / Sponsorship evaluation</a:t>
+            </a:r>
+          </a:p>
+          <a:p>
+            <a:pPr>
+              <a:spcAft>
+                <a:spcPts val="400"/>
+              </a:spcAft>
+            </a:pPr>
+          </a:p>
+          <a:p>
+            <a:pPr>
+              <a:spcAft>
+                <a:spcPts val="400"/>
+              </a:spcAft>
+            </a:pPr>
+            <a:r>
+              <a:rPr sz="1400">
+                <a:solidFill>
+                  <a:srgbClr val="202020"/>
+                </a:solidFill>
+              </a:rPr>
+              <a:t>Areas AI-based technology can be used:</a:t>
+            </a:r>
+          </a:p>
+          <a:p>
+            <a:pPr>
+              <a:spcAft>
+                <a:spcPts val="400"/>
+              </a:spcAft>
+            </a:pPr>
+            <a:r>
+              <a:rPr sz="1400">
+                <a:solidFill>
+                  <a:srgbClr val="202020"/>
+                </a:solidFill>
+              </a:rPr>
+              <a:t>   · Personalised training &amp; injury prevention</a:t>
+            </a:r>
+          </a:p>
+          <a:p>
+            <a:pPr>
+              <a:spcAft>
+                <a:spcPts val="400"/>
+              </a:spcAft>
+            </a:pPr>
+            <a:r>
+              <a:rPr sz="1400">
+                <a:solidFill>
+                  <a:srgbClr val="202020"/>
+                </a:solidFill>
+              </a:rPr>
+              <a:t>   · Performance analysis &amp; technique refinement</a:t>
+            </a:r>
+          </a:p>
+          <a:p>
+            <a:pPr>
+              <a:spcAft>
+                <a:spcPts val="400"/>
+              </a:spcAft>
+            </a:pPr>
+            <a:r>
+              <a:rPr sz="1400">
+                <a:solidFill>
+                  <a:srgbClr val="202020"/>
+                </a:solidFill>
+              </a:rPr>
+              <a:t>   · Advances in talent identification</a:t>
+            </a:r>
+          </a:p>
+          <a:p>
+            <a:pPr>
+              <a:spcAft>
+                <a:spcPts val="400"/>
+              </a:spcAft>
+            </a:pPr>
+            <a:r>
+              <a:rPr sz="1400">
+                <a:solidFill>
+                  <a:srgbClr val="202020"/>
+                </a:solidFill>
+              </a:rPr>
+              <a:t>   · Game plans / tactics for matches</a:t>
+            </a:r>
+          </a:p>
+          <a:p>
+            <a:pPr>
+              <a:spcAft>
+                <a:spcPts val="400"/>
+              </a:spcAft>
+            </a:pPr>
+            <a:r>
+              <a:rPr sz="1400">
+                <a:solidFill>
+                  <a:srgbClr val="202020"/>
+                </a:solidFill>
+              </a:rPr>
+              <a:t>   · Personalisation of content</a:t>
+            </a:r>
+          </a:p>
+          <a:p>
+            <a:pPr>
+              <a:spcAft>
+                <a:spcPts val="400"/>
+              </a:spcAft>
+            </a:pPr>
+            <a:r>
+              <a:rPr sz="1400">
+                <a:solidFill>
+                  <a:srgbClr val="202020"/>
+                </a:solidFill>
+              </a:rPr>
+              <a:t>   · Automated sports journalism</a:t>
+            </a:r>
+          </a:p>
+          <a:p>
+            <a:pPr>
+              <a:spcAft>
+                <a:spcPts val="400"/>
+              </a:spcAft>
+            </a:pPr>
+            <a:r>
+              <a:rPr sz="1400">
+                <a:solidFill>
+                  <a:srgbClr val="202020"/>
+                </a:solidFill>
+              </a:rPr>
+              <a:t>   · Optimisation of broadcasts</a:t>
+            </a:r>
+          </a:p>
+          <a:p>
+            <a:pPr>
+              <a:spcAft>
+                <a:spcPts val="400"/>
+              </a:spcAft>
+            </a:pPr>
+            <a:r>
+              <a:rPr sz="1400">
+                <a:solidFill>
+                  <a:srgbClr val="202020"/>
+                </a:solidFill>
+              </a:rPr>
+              <a:t>   · Fan engagement &amp; marketing</a:t>
+            </a:r>
+          </a:p>
+          <a:p>
+            <a:pPr>
+              <a:spcAft>
+                <a:spcPts val="400"/>
+              </a:spcAft>
+            </a:pPr>
+            <a:r>
+              <a:rPr sz="1400">
+                <a:solidFill>
+                  <a:srgbClr val="202020"/>
+                </a:solidFill>
+              </a:rPr>
+              <a:t>   · Automated refereeing</a:t>
+            </a:r>
+          </a:p>
+          <a:p>
+            <a:pPr>
+              <a:spcAft>
+                <a:spcPts val="400"/>
+              </a:spcAft>
+            </a:pPr>
+            <a:r>
+              <a:rPr sz="1400">
+                <a:solidFill>
+                  <a:srgbClr val="202020"/>
+                </a:solidFill>
+              </a:rPr>
+              <a:t>   · Event security / abuse</a:t>
+            </a:r>
+          </a:p>
+          <a:p>
+            <a:pPr>
+              <a:spcAft>
+                <a:spcPts val="400"/>
+              </a:spcAft>
+            </a:pPr>
+            <a:r>
+              <a:rPr sz="1400">
+                <a:solidFill>
+                  <a:srgbClr val="202020"/>
+                </a:solidFill>
+              </a:rPr>
+              <a:t>   · Sustainability</a:t>
+            </a:r>
+          </a:p>
+        </p:txBody>
+      </p:sp>
+      <p:sp>
+        <p:nvSpPr>
+          <p:cNvPr id="4" name="TextBox 3"/>
+          <p:cNvSpPr txBox="1"/>
+          <p:nvPr/>
+        </p:nvSpPr>
+        <p:spPr>
+          <a:xfrm>
+            <a:off x="6400800" y="914400"/>
+            <a:ext cx="5394960" cy="5760720"/>
+          </a:xfrm>
+          <a:prstGeom prst="rect">
+            <a:avLst/>
+          </a:prstGeom>
+          <a:solidFill>
+            <a:srgbClr val="F4F6FB"/>
+          </a:solidFill>
+        </p:spPr>
+        <p:txBody>
+          <a:bodyPr wrap="square" lIns="137160" rIns="137160" tIns="91440" bIns="91440">
+            <a:spAutoFit/>
+          </a:bodyPr>
+          <a:lstStyle/>
+          <a:p>
+            <a:pPr>
+              <a:spcAft>
+                <a:spcPts val="500"/>
+              </a:spcAft>
+            </a:pPr>
+            <a:r>
+              <a:rPr sz="1400">
+                <a:solidFill>
+                  <a:srgbClr val="333333"/>
                 </a:solidFill>
                 <a:latin typeface="Microsoft YaHei"/>
               </a:rPr>
-              <a:t>中译：（本页为纯图片/背景页，无文字内容）</a:t>
+              <a:t>选择一个领域（主题）</a:t>
+            </a:r>
+          </a:p>
+          <a:p>
+            <a:pPr>
+              <a:spcAft>
+                <a:spcPts val="500"/>
+              </a:spcAft>
+            </a:pPr>
+          </a:p>
+          <a:p>
+            <a:pPr>
+              <a:spcAft>
+                <a:spcPts val="500"/>
+              </a:spcAft>
+            </a:pPr>
+            <a:r>
+              <a:rPr sz="1400">
+                <a:solidFill>
+                  <a:srgbClr val="333333"/>
+                </a:solidFill>
+                <a:latin typeface="Microsoft YaHei"/>
+              </a:rPr>
+              <a:t>选「运动/行业」或「商业领域」其一：</a:t>
+            </a:r>
+          </a:p>
+          <a:p>
+            <a:pPr>
+              <a:spcAft>
+                <a:spcPts val="500"/>
+              </a:spcAft>
+            </a:pPr>
+          </a:p>
+          <a:p>
+            <a:pPr>
+              <a:spcAft>
+                <a:spcPts val="500"/>
+              </a:spcAft>
+            </a:pPr>
+            <a:r>
+              <a:rPr sz="1400">
+                <a:solidFill>
+                  <a:srgbClr val="333333"/>
+                </a:solidFill>
+                <a:latin typeface="Microsoft YaHei"/>
+              </a:rPr>
+              <a:t>1. 某个运动或行业</a:t>
+            </a:r>
+          </a:p>
+          <a:p>
+            <a:pPr>
+              <a:spcAft>
+                <a:spcPts val="500"/>
+              </a:spcAft>
+            </a:pPr>
+            <a:r>
+              <a:rPr sz="1400">
+                <a:solidFill>
+                  <a:srgbClr val="333333"/>
+                </a:solidFill>
+                <a:latin typeface="Microsoft YaHei"/>
+              </a:rPr>
+              <a:t>   · 运动类型：足球/板球/拳击/篮球/棒球/电竞</a:t>
+            </a:r>
+          </a:p>
+          <a:p>
+            <a:pPr>
+              <a:spcAft>
+                <a:spcPts val="500"/>
+              </a:spcAft>
+            </a:pPr>
+            <a:r>
+              <a:rPr sz="1400">
+                <a:solidFill>
+                  <a:srgbClr val="333333"/>
+                </a:solidFill>
+                <a:latin typeface="Microsoft YaHei"/>
+              </a:rPr>
+              <a:t>   · 行业：运动服装装备/体育博彩</a:t>
+            </a:r>
+          </a:p>
+          <a:p>
+            <a:pPr>
+              <a:spcAft>
+                <a:spcPts val="500"/>
+              </a:spcAft>
+            </a:pPr>
+          </a:p>
+          <a:p>
+            <a:pPr>
+              <a:spcAft>
+                <a:spcPts val="500"/>
+              </a:spcAft>
+            </a:pPr>
+            <a:r>
+              <a:rPr sz="1400">
+                <a:solidFill>
+                  <a:srgbClr val="333333"/>
+                </a:solidFill>
+                <a:latin typeface="Microsoft YaHei"/>
+              </a:rPr>
+              <a:t>2. 商业领域的 AI 技术应用</a:t>
+            </a:r>
+          </a:p>
+          <a:p>
+            <a:pPr>
+              <a:spcAft>
+                <a:spcPts val="500"/>
+              </a:spcAft>
+            </a:pPr>
+            <a:r>
+              <a:rPr sz="1400">
+                <a:solidFill>
+                  <a:srgbClr val="333333"/>
+                </a:solidFill>
+                <a:latin typeface="Microsoft YaHei"/>
+              </a:rPr>
+              <a:t>   · 票务/球迷互动/客户互动/梦幻联赛/赞助评估</a:t>
+            </a:r>
+          </a:p>
+          <a:p>
+            <a:pPr>
+              <a:spcAft>
+                <a:spcPts val="500"/>
+              </a:spcAft>
+            </a:pPr>
+          </a:p>
+          <a:p>
+            <a:pPr>
+              <a:spcAft>
+                <a:spcPts val="500"/>
+              </a:spcAft>
+            </a:pPr>
+            <a:r>
+              <a:rPr sz="1400">
+                <a:solidFill>
+                  <a:srgbClr val="333333"/>
+                </a:solidFill>
+                <a:latin typeface="Microsoft YaHei"/>
+              </a:rPr>
+              <a:t>AI 技术可应用领域：</a:t>
+            </a:r>
+          </a:p>
+          <a:p>
+            <a:pPr>
+              <a:spcAft>
+                <a:spcPts val="500"/>
+              </a:spcAft>
+            </a:pPr>
+            <a:r>
+              <a:rPr sz="1400">
+                <a:solidFill>
+                  <a:srgbClr val="333333"/>
+                </a:solidFill>
+                <a:latin typeface="Microsoft YaHei"/>
+              </a:rPr>
+              <a:t>   · 个性化训练与伤病预防</a:t>
+            </a:r>
+          </a:p>
+          <a:p>
+            <a:pPr>
+              <a:spcAft>
+                <a:spcPts val="500"/>
+              </a:spcAft>
+            </a:pPr>
+            <a:r>
+              <a:rPr sz="1400">
+                <a:solidFill>
+                  <a:srgbClr val="333333"/>
+                </a:solidFill>
+                <a:latin typeface="Microsoft YaHei"/>
+              </a:rPr>
+              <a:t>   · 表现分析与技术优化</a:t>
+            </a:r>
+          </a:p>
+          <a:p>
+            <a:pPr>
+              <a:spcAft>
+                <a:spcPts val="500"/>
+              </a:spcAft>
+            </a:pPr>
+            <a:r>
+              <a:rPr sz="1400">
+                <a:solidFill>
+                  <a:srgbClr val="333333"/>
+                </a:solidFill>
+                <a:latin typeface="Microsoft YaHei"/>
+              </a:rPr>
+              <a:t>   · 人才识别进展</a:t>
+            </a:r>
+          </a:p>
+          <a:p>
+            <a:pPr>
+              <a:spcAft>
+                <a:spcPts val="500"/>
+              </a:spcAft>
+            </a:pPr>
+            <a:r>
+              <a:rPr sz="1400">
+                <a:solidFill>
+                  <a:srgbClr val="333333"/>
+                </a:solidFill>
+                <a:latin typeface="Microsoft YaHei"/>
+              </a:rPr>
+              <a:t>   · 比赛战术/战略运用</a:t>
+            </a:r>
+          </a:p>
+          <a:p>
+            <a:pPr>
+              <a:spcAft>
+                <a:spcPts val="500"/>
+              </a:spcAft>
+            </a:pPr>
+            <a:r>
+              <a:rPr sz="1400">
+                <a:solidFill>
+                  <a:srgbClr val="333333"/>
+                </a:solidFill>
+                <a:latin typeface="Microsoft YaHei"/>
+              </a:rPr>
+              <a:t>   · 内容个性化</a:t>
+            </a:r>
+          </a:p>
+          <a:p>
+            <a:pPr>
+              <a:spcAft>
+                <a:spcPts val="500"/>
+              </a:spcAft>
+            </a:pPr>
+            <a:r>
+              <a:rPr sz="1400">
+                <a:solidFill>
+                  <a:srgbClr val="333333"/>
+                </a:solidFill>
+                <a:latin typeface="Microsoft YaHei"/>
+              </a:rPr>
+              <a:t>   · 体育新闻自动化</a:t>
+            </a:r>
+          </a:p>
+          <a:p>
+            <a:pPr>
+              <a:spcAft>
+                <a:spcPts val="500"/>
+              </a:spcAft>
+            </a:pPr>
+            <a:r>
+              <a:rPr sz="1400">
+                <a:solidFill>
+                  <a:srgbClr val="333333"/>
+                </a:solidFill>
+                <a:latin typeface="Microsoft YaHei"/>
+              </a:rPr>
+              <a:t>   · 转播优化</a:t>
+            </a:r>
+          </a:p>
+          <a:p>
+            <a:pPr>
+              <a:spcAft>
+                <a:spcPts val="500"/>
+              </a:spcAft>
+            </a:pPr>
+            <a:r>
+              <a:rPr sz="1400">
+                <a:solidFill>
+                  <a:srgbClr val="333333"/>
+                </a:solidFill>
+                <a:latin typeface="Microsoft YaHei"/>
+              </a:rPr>
+              <a:t>   · 球迷互动与营销</a:t>
+            </a:r>
+          </a:p>
+          <a:p>
+            <a:pPr>
+              <a:spcAft>
+                <a:spcPts val="500"/>
+              </a:spcAft>
+            </a:pPr>
+            <a:r>
+              <a:rPr sz="1400">
+                <a:solidFill>
+                  <a:srgbClr val="333333"/>
+                </a:solidFill>
+                <a:latin typeface="Microsoft YaHei"/>
+              </a:rPr>
+              <a:t>   · 自动裁判</a:t>
+            </a:r>
+          </a:p>
+          <a:p>
+            <a:pPr>
+              <a:spcAft>
+                <a:spcPts val="500"/>
+              </a:spcAft>
+            </a:pPr>
+            <a:r>
+              <a:rPr sz="1400">
+                <a:solidFill>
+                  <a:srgbClr val="333333"/>
+                </a:solidFill>
+                <a:latin typeface="Microsoft YaHei"/>
+              </a:rPr>
+              <a:t>   · 赛事安全/防滥用</a:t>
+            </a:r>
+          </a:p>
+          <a:p>
+            <a:pPr>
+              <a:spcAft>
+                <a:spcPts val="500"/>
+              </a:spcAft>
+            </a:pPr>
+            <a:r>
+              <a:rPr sz="1400">
+                <a:solidFill>
+                  <a:srgbClr val="333333"/>
+                </a:solidFill>
+                <a:latin typeface="Microsoft YaHei"/>
+              </a:rPr>
+              <a:t>   · 可持续性</a:t>
+            </a:r>
+          </a:p>
+        </p:txBody>
+      </p:sp>
+      <p:sp>
+        <p:nvSpPr>
+          <p:cNvPr id="5" name="TextBox 4"/>
+          <p:cNvSpPr txBox="1"/>
+          <p:nvPr/>
+        </p:nvSpPr>
+        <p:spPr>
+          <a:xfrm>
+            <a:off x="365760" y="713232"/>
+            <a:ext cx="1828800" cy="237744"/>
+          </a:xfrm>
+          <a:prstGeom prst="rect">
+            <a:avLst/>
+          </a:prstGeom>
+          <a:noFill/>
+        </p:spPr>
+        <p:txBody>
+          <a:bodyPr wrap="none">
+            <a:spAutoFit/>
+          </a:bodyPr>
+          <a:lstStyle/>
+          <a:p>
+            <a:r>
+              <a:rPr sz="1000" b="1">
+                <a:solidFill>
+                  <a:srgbClr val="404040"/>
+                </a:solidFill>
+              </a:rPr>
+              <a:t>EN ▶</a:t>
+            </a:r>
+          </a:p>
+        </p:txBody>
+      </p:sp>
+      <p:sp>
+        <p:nvSpPr>
+          <p:cNvPr id="6" name="TextBox 5"/>
+          <p:cNvSpPr txBox="1"/>
+          <p:nvPr/>
+        </p:nvSpPr>
+        <p:spPr>
+          <a:xfrm>
+            <a:off x="6400800" y="713232"/>
+            <a:ext cx="1828800" cy="237744"/>
+          </a:xfrm>
+          <a:prstGeom prst="rect">
+            <a:avLst/>
+          </a:prstGeom>
+          <a:noFill/>
+        </p:spPr>
+        <p:txBody>
+          <a:bodyPr wrap="none">
+            <a:spAutoFit/>
+          </a:bodyPr>
+          <a:lstStyle/>
+          <a:p>
+            <a:r>
+              <a:rPr sz="1000" b="1">
+                <a:solidFill>
+                  <a:srgbClr val="404040"/>
+                </a:solidFill>
+              </a:rPr>
+              <a:t>中文 ▶</a:t>
             </a:r>
           </a:p>
         </p:txBody>
